--- a/docs/entregables/presentacion_bomba_prensaestopa.pptx
+++ b/docs/entregables/presentacion_bomba_prensaestopa.pptx
@@ -23,9 +23,11 @@
     <p:sldId id="271" r:id="rId17"/>
     <p:sldId id="272" r:id="rId18"/>
     <p:sldId id="273" r:id="rId19"/>
+    <p:sldId id="274" r:id="rId20"/>
+    <p:sldId id="275" r:id="rId21"/>
   </p:sldIdLst>
   <p:notesMasterIdLst>
-    <p:notesMasterId r:id="rId20"/>
+    <p:notesMasterId r:id="rId22"/>
   </p:notesMasterIdLst>
   <p:sldSz cx="12192000" cy="6858000"/>
   <p:notesSz cx="6858000" cy="12192000"/>
@@ -124,20 +126,20 @@
   <p:extLst>
     <p:ext uri="{521415D9-36F7-43E2-AB2F-B90AF26B5E84}">
       <p14:sectionLst xmlns:p14="http://schemas.microsoft.com/office/powerpoint/2010/main">
-        <p14:section name="Inicio" id="{36758655-8ee7-bc60-d097-0a35ed1d335c}">
+        <p14:section name="Inicio" id="{af6eb44a-09c0-7f1a-aed4-8ec7c3c21413}">
           <p14:sldIdLst>
             <p14:sldId id="256"/>
             <p14:sldId id="257"/>
           </p14:sldIdLst>
         </p14:section>
-        <p14:section name="Alcance y método" id="{c402d902-4e44-9cd5-e28f-ce8a907f7627}">
+        <p14:section name="Alcance y método" id="{4234e256-3155-c6b6-2e21-9cae271fa731}">
           <p14:sldIdLst>
             <p14:sldId id="258"/>
             <p14:sldId id="259"/>
             <p14:sldId id="260"/>
           </p14:sldIdLst>
         </p14:section>
-        <p14:section name="Análisis de causa raíz" id="{a8f9359c-db23-42f4-a4ce-d864fc20f550}">
+        <p14:section name="Análisis de causa raíz" id="{a268099e-602f-fd77-68e6-d66485809d94}">
           <p14:sldIdLst>
             <p14:sldId id="261"/>
             <p14:sldId id="262"/>
@@ -146,7 +148,7 @@
             <p14:sldId id="265"/>
           </p14:sldIdLst>
         </p14:section>
-        <p14:section name="Monitoreo, datos y normas" id="{b653a07e-132e-63b7-7070-091ddd805ffb}">
+        <p14:section name="Monitoreo, datos y normas" id="{6f4c6738-4a34-4277-ef16-d602057e1cf8}">
           <p14:sldIdLst>
             <p14:sldId id="266"/>
             <p14:sldId id="267"/>
@@ -156,6 +158,8 @@
             <p14:sldId id="271"/>
             <p14:sldId id="272"/>
             <p14:sldId id="273"/>
+            <p14:sldId id="274"/>
+            <p14:sldId id="275"/>
           </p14:sldIdLst>
         </p14:section>
       </p14:sectionLst>
@@ -288,7 +292,7 @@
                   <c:v>47</c:v>
                 </c:pt>
                 <c:pt idx="2">
-                  <c:v>1</c:v>
+                  <c:v>2</c:v>
                 </c:pt>
                 <c:pt idx="3">
                   <c:v>9</c:v>
@@ -1941,7 +1945,7 @@
           <a:p>
             <a:r>
               <a:rPr lang="en-US" dirty="0"/>
-              <a:t>Estas brechas justifican las preguntas finales a la persona.</a:t>
+              <a:t>El ajuste suele hacerse como respuesta a la fuga: sesgo de registro; hace falta la fecha para el orden temporal.</a:t>
             </a:r>
             <a:endParaRPr lang="en-US" dirty="0"/>
           </a:p>
@@ -2029,7 +2033,7 @@
           <a:p>
             <a:r>
               <a:rPr lang="en-US" dirty="0"/>
-              <a:t>Los valores numéricos de umbrales, intervalos y costos son SIN DATOS PARA ARMARLO.</a:t>
+              <a:t>El kit no tiene regresión de Cox; la comparación de dos grupos se hace con Kaplan-Meier y log-rank.</a:t>
             </a:r>
             <a:endParaRPr lang="en-US" dirty="0"/>
           </a:p>
@@ -2117,7 +2121,7 @@
           <a:p>
             <a:r>
               <a:rPr lang="en-US" dirty="0"/>
-              <a:t>Cada decisión tiene un efecto concreto en lo que el equipo puede afirmar.</a:t>
+              <a:t>Estas brechas justifican las preguntas finales a la persona.</a:t>
             </a:r>
             <a:endParaRPr lang="en-US" dirty="0"/>
           </a:p>
@@ -2205,7 +2209,7 @@
           <a:p>
             <a:r>
               <a:rPr lang="en-US" dirty="0"/>
-              <a:t/>
+              <a:t>Los valores numéricos de umbrales, intervalos y costos son SIN DATOS PARA ARMARLO.</a:t>
             </a:r>
             <a:endParaRPr lang="en-US" dirty="0"/>
           </a:p>
@@ -2293,7 +2297,7 @@
           <a:p>
             <a:r>
               <a:rPr lang="en-US" dirty="0"/>
-              <a:t/>
+              <a:t>Cada decisión tiene un efecto concreto en lo que el equipo puede afirmar.</a:t>
             </a:r>
             <a:endParaRPr lang="en-US" dirty="0"/>
           </a:p>
@@ -2317,6 +2321,94 @@
             <a:fld id="{F7021451-1387-4CA6-816F-3879F97B5CBC}" type="slidenum">
               <a:rPr lang="en-US"/>
               <a:t>18</a:t>
+            </a:fld>
+            <a:endParaRPr lang="en-US"/>
+          </a:p>
+        </p:txBody>
+      </p:sp>
+    </p:spTree>
+    <p:extLst>
+      <p:ext uri="{BB962C8B-B14F-4D97-AF65-F5344CB8AC3E}">
+        <p14:creationId xmlns:p14="http://schemas.microsoft.com/office/powerpoint/2010/main" val="1024086991"/>
+      </p:ext>
+    </p:extLst>
+  </p:cSld>
+  <p:clrMapOvr>
+    <a:masterClrMapping/>
+  </p:clrMapOvr>
+</p:notes>
+</file>
+
+<file path=ppt/notesSlides/notesSlide19.xml><?xml version="1.0" encoding="utf-8"?>
+<p:notes xmlns:a="http://schemas.openxmlformats.org/drawingml/2006/main" xmlns:r="http://schemas.openxmlformats.org/officeDocument/2006/relationships" xmlns:p="http://schemas.openxmlformats.org/presentationml/2006/main">
+  <p:cSld>
+    <p:spTree>
+      <p:nvGrpSpPr>
+        <p:cNvPr id="1" name=""/>
+        <p:cNvGrpSpPr/>
+        <p:nvPr/>
+      </p:nvGrpSpPr>
+      <p:grpSpPr>
+        <a:xfrm>
+          <a:off x="0" y="0"/>
+          <a:ext cx="0" cy="0"/>
+          <a:chOff x="0" y="0"/>
+          <a:chExt cx="0" cy="0"/>
+        </a:xfrm>
+      </p:grpSpPr>
+      <p:sp>
+        <p:nvSpPr>
+          <p:cNvPr id="2" name="Slide Image Placeholder 1"/>
+          <p:cNvSpPr>
+            <a:spLocks noGrp="1" noRot="1" noChangeAspect="1"/>
+          </p:cNvSpPr>
+          <p:nvPr>
+            <p:ph type="sldImg"/>
+          </p:nvPr>
+        </p:nvSpPr>
+        <p:spPr/>
+      </p:sp>
+      <p:sp>
+        <p:nvSpPr>
+          <p:cNvPr id="3" name="Notes Placeholder 2"/>
+          <p:cNvSpPr>
+            <a:spLocks noGrp="1"/>
+          </p:cNvSpPr>
+          <p:nvPr>
+            <p:ph type="body" idx="1"/>
+          </p:nvPr>
+        </p:nvSpPr>
+        <p:spPr/>
+        <p:txBody>
+          <a:bodyPr/>
+          <a:lstStyle/>
+          <a:p>
+            <a:r>
+              <a:rPr lang="en-US" dirty="0"/>
+              <a:t/>
+            </a:r>
+            <a:endParaRPr lang="en-US" dirty="0"/>
+          </a:p>
+        </p:txBody>
+      </p:sp>
+      <p:sp>
+        <p:nvSpPr>
+          <p:cNvPr id="4" name="Slide Number Placeholder 3"/>
+          <p:cNvSpPr>
+            <a:spLocks noGrp="1"/>
+          </p:cNvSpPr>
+          <p:nvPr>
+            <p:ph type="sldNum" sz="quarter" idx="10"/>
+          </p:nvPr>
+        </p:nvSpPr>
+        <p:spPr/>
+        <p:txBody>
+          <a:bodyPr/>
+          <a:lstStyle/>
+          <a:p>
+            <a:fld id="{F7021451-1387-4CA6-816F-3879F97B5CBC}" type="slidenum">
+              <a:rPr lang="en-US"/>
+              <a:t>19</a:t>
             </a:fld>
             <a:endParaRPr lang="en-US"/>
           </a:p>
@@ -2405,6 +2497,94 @@
             <a:fld id="{F7021451-1387-4CA6-816F-3879F97B5CBC}" type="slidenum">
               <a:rPr lang="en-US"/>
               <a:t>2</a:t>
+            </a:fld>
+            <a:endParaRPr lang="en-US"/>
+          </a:p>
+        </p:txBody>
+      </p:sp>
+    </p:spTree>
+    <p:extLst>
+      <p:ext uri="{BB962C8B-B14F-4D97-AF65-F5344CB8AC3E}">
+        <p14:creationId xmlns:p14="http://schemas.microsoft.com/office/powerpoint/2010/main" val="1024086991"/>
+      </p:ext>
+    </p:extLst>
+  </p:cSld>
+  <p:clrMapOvr>
+    <a:masterClrMapping/>
+  </p:clrMapOvr>
+</p:notes>
+</file>
+
+<file path=ppt/notesSlides/notesSlide20.xml><?xml version="1.0" encoding="utf-8"?>
+<p:notes xmlns:a="http://schemas.openxmlformats.org/drawingml/2006/main" xmlns:r="http://schemas.openxmlformats.org/officeDocument/2006/relationships" xmlns:p="http://schemas.openxmlformats.org/presentationml/2006/main">
+  <p:cSld>
+    <p:spTree>
+      <p:nvGrpSpPr>
+        <p:cNvPr id="1" name=""/>
+        <p:cNvGrpSpPr/>
+        <p:nvPr/>
+      </p:nvGrpSpPr>
+      <p:grpSpPr>
+        <a:xfrm>
+          <a:off x="0" y="0"/>
+          <a:ext cx="0" cy="0"/>
+          <a:chOff x="0" y="0"/>
+          <a:chExt cx="0" cy="0"/>
+        </a:xfrm>
+      </p:grpSpPr>
+      <p:sp>
+        <p:nvSpPr>
+          <p:cNvPr id="2" name="Slide Image Placeholder 1"/>
+          <p:cNvSpPr>
+            <a:spLocks noGrp="1" noRot="1" noChangeAspect="1"/>
+          </p:cNvSpPr>
+          <p:nvPr>
+            <p:ph type="sldImg"/>
+          </p:nvPr>
+        </p:nvSpPr>
+        <p:spPr/>
+      </p:sp>
+      <p:sp>
+        <p:nvSpPr>
+          <p:cNvPr id="3" name="Notes Placeholder 2"/>
+          <p:cNvSpPr>
+            <a:spLocks noGrp="1"/>
+          </p:cNvSpPr>
+          <p:nvPr>
+            <p:ph type="body" idx="1"/>
+          </p:nvPr>
+        </p:nvSpPr>
+        <p:spPr/>
+        <p:txBody>
+          <a:bodyPr/>
+          <a:lstStyle/>
+          <a:p>
+            <a:r>
+              <a:rPr lang="en-US" dirty="0"/>
+              <a:t/>
+            </a:r>
+            <a:endParaRPr lang="en-US" dirty="0"/>
+          </a:p>
+        </p:txBody>
+      </p:sp>
+      <p:sp>
+        <p:nvSpPr>
+          <p:cNvPr id="4" name="Slide Number Placeholder 3"/>
+          <p:cNvSpPr>
+            <a:spLocks noGrp="1"/>
+          </p:cNvSpPr>
+          <p:nvPr>
+            <p:ph type="sldNum" sz="quarter" idx="10"/>
+          </p:nvPr>
+        </p:nvSpPr>
+        <p:spPr/>
+        <p:txBody>
+          <a:bodyPr/>
+          <a:lstStyle/>
+          <a:p>
+            <a:fld id="{F7021451-1387-4CA6-816F-3879F97B5CBC}" type="slidenum">
+              <a:rPr lang="en-US"/>
+              <a:t>20</a:t>
             </a:fld>
             <a:endParaRPr lang="en-US"/>
           </a:p>
@@ -3588,7 +3768,7 @@
                 <a:ea typeface="Cambria" pitchFamily="34" charset="-122"/>
                 <a:cs typeface="Cambria" pitchFamily="34" charset="-120"/>
               </a:rPr>
-              <a:t>Rodamientos de bombas con prensaestopa</a:t>
+              <a:t>Paquete de rodamientos de bombas con prensaestopa</a:t>
             </a:r>
             <a:endParaRPr lang="en-US" sz="4400" dirty="0"/>
           </a:p>
@@ -5499,7 +5679,7 @@
                   <a:schemeClr val="tx1"/>
                 </a:solidFill>
               </a:rPr>
-              <a:t>Fijar con el negocio el objetivo (detección, diagnóstico o RUL), el horizonte H y el costo de falso negativo frente a falso positivo. Definir qué es falla funcional de la bomba (y por modo: rodamiento, sello, impulsor, hidráulica) y qué es censura (retiro preventivo, cambio por otra causa, bomba…</a:t>
+              <a:t>Fijar con el negocio el objetivo (detección temprana, diagnóstico o RUL del paquete de rodamientos), el horizonte H y el costo de falso negativo frente a falso positivo. Definir qué es falla funcional del paquete (criterio de retiro) y qué es censura (retiro preventivo, cambio por otra causa, bomba…</a:t>
             </a:r>
             <a:endParaRPr lang="en-US" sz="1200" dirty="0"/>
           </a:p>
@@ -5507,7 +5687,7 @@
       </p:sp>
       <p:sp>
         <p:nvSpPr>
-          <p:cNvPr id="7" name="tarjeta 1. Línea base por activo y por punto de operación"/>
+          <p:cNvPr id="7" name="tarjeta 1. Registro con fecha, sin sensores (primero, es lo más barato)"/>
           <p:cNvSpPr/>
           <p:nvPr/>
         </p:nvSpPr>
@@ -5562,7 +5742,7 @@
                   <a:schemeClr val="tx1"/>
                 </a:solidFill>
               </a:rPr>
-              <a:t>1. Línea base por activo y por punto de operación</a:t>
+              <a:t>1. Registro con fecha, sin sensores (primero, es lo más barato)</a:t>
             </a:r>
             <a:endParaRPr lang="en-US" sz="1300" dirty="0"/>
           </a:p>
@@ -5602,7 +5782,7 @@
                   <a:schemeClr val="tx1"/>
                 </a:solidFill>
               </a:rPr>
-              <a:t>Medir cada bomba en buen estado y construir su referencia propia por punto de operación (RMS, espectro de envolvente en los rodamientos, temperatura y corriente del motor), con carta de control o tendencia. Las variables hidráulicas se definen con un experto: SIN DATOS PARA ARMARLO por falta de…</a:t>
+              <a:t>Registrar por bomba, con fecha y responsable: (a) goteo del prensaestopa en una escala ordinal fija, medida con el mismo método y a calendario fijo (no solo cuando alguien ve la fuga), con la clase 'sin goteo' como categoría propia porque el exceso de ajuste también es dañino (E-2700); (b) cada…</a:t>
             </a:r>
             <a:endParaRPr lang="en-US" sz="1200" dirty="0"/>
           </a:p>
@@ -5610,7 +5790,7 @@
       </p:sp>
       <p:sp>
         <p:nvSpPr>
-          <p:cNvPr id="10" name="tarjeta 2. Detección de anomalías sin etiquetas, en sombra"/>
+          <p:cNvPr id="10" name="tarjeta 2. Línea base por bomba y posición: temperatura del soporte y vibración con envolvente"/>
           <p:cNvSpPr/>
           <p:nvPr/>
         </p:nvSpPr>
@@ -5665,7 +5845,7 @@
                   <a:schemeClr val="tx1"/>
                 </a:solidFill>
               </a:rPr>
-              <a:t>2. Detección de anomalías sin etiquetas, en sombra</a:t>
+              <a:t>2. Línea base por bomba y posición: temperatura del soporte y vibración con envolvente</a:t>
             </a:r>
             <a:endParaRPr lang="en-US" sz="1300" dirty="0"/>
           </a:p>
@@ -5705,7 +5885,7 @@
                   <a:schemeClr val="tx1"/>
                 </a:solidFill>
               </a:rPr>
-              <a:t>Entrenar solo con datos normales del propio activo (el diseño sin muestras anómalas de los retos acústicos y del ensayo de campo) y operar en sombra, sin actuar, registrando cada alerta con su inspección posterior. Partición cronológica por activo, descartando ventanas que cruzan el límite entre…</a:t>
+              <a:t>Con cada bomba en buen estado, y por punto de operación, medir en puntos y orientaciones fijados y marcados: temperatura del soporte (junto con temperatura ambiente y del fluido bombeado, para no confundir) y vibración con RMS y espectro de envolvente. Línea base propia con signals.linea_base…</a:t>
             </a:r>
             <a:endParaRPr lang="en-US" sz="1200" dirty="0"/>
           </a:p>
@@ -5713,7 +5893,7 @@
       </p:sp>
       <p:sp>
         <p:nvSpPr>
-          <p:cNvPr id="13" name="tarjeta 3. Diagnóstico (tipo y ubicación del defecto)"/>
+          <p:cNvPr id="13" name="tarjeta 3. Análisis de agua en el lubricante e inspección de drenaje"/>
           <p:cNvSpPr/>
           <p:nvPr/>
         </p:nvSpPr>
@@ -5768,7 +5948,7 @@
                   <a:schemeClr val="tx1"/>
                 </a:solidFill>
               </a:rPr>
-              <a:t>3. Diagnóstico (tipo y ubicación del defecto)</a:t>
+              <a:t>3. Análisis de agua en el lubricante e inspección de drenaje</a:t>
             </a:r>
             <a:endParaRPr lang="en-US" sz="1300" dirty="0"/>
           </a:p>
@@ -5808,7 +5988,7 @@
                   <a:schemeClr val="tx1"/>
                 </a:solidFill>
               </a:rPr>
-              <a:t>Diagnóstico por reglas: envolvente y frecuencias características para los rodamientos de bomba y motor, y corriente del motor para separar causa mecánica de eléctrica, contrastado con la inspección del componente desmontado. Un clasificador supervisado solo con fallas etiquetadas del propio activo…</a:t>
+              <a:t>Muestrear el lubricante del soporte en servicio, antes de abrir el soporte, a intervalos fijos y tras cada episodio de fuga o lavado; ensayar con un laboratorio y método definidos por un experto y registrar el resultado con su incertidumbre. Incluir bombas sin fuga como referencia: sin ellas no hay…</a:t>
             </a:r>
             <a:endParaRPr lang="en-US" sz="1200" dirty="0"/>
           </a:p>
@@ -5816,7 +5996,7 @@
       </p:sp>
       <p:sp>
         <p:nvSpPr>
-          <p:cNvPr id="16" name="tarjeta 4. Pronóstico (RUL) solo con tiempos hasta la falla"/>
+          <p:cNvPr id="16" name="tarjeta 4. Detección de anomalías sin etiquetas, en sombra"/>
           <p:cNvSpPr/>
           <p:nvPr/>
         </p:nvSpPr>
@@ -5871,7 +6051,7 @@
                   <a:schemeClr val="tx1"/>
                 </a:solidFill>
               </a:rPr>
-              <a:t>4. Pronóstico (RUL) solo con tiempos hasta la falla</a:t>
+              <a:t>4. Detección de anomalías sin etiquetas, en sombra</a:t>
             </a:r>
             <a:endParaRPr lang="en-US" sz="1300" dirty="0"/>
           </a:p>
@@ -5911,7 +6091,7 @@
                   <a:schemeClr val="tx1"/>
                 </a:solidFill>
               </a:rPr>
-              <a:t>Pasar a RUL únicamente cuando existan tiempos hasta la falla del propio activo o flota. Primero supervivencia clásica con censura (Kaplan-Meier, Weibull con tools/reliability), tratando la censura como tal y no como RUL = 0. Después evaluar CoxPH o bosque de supervivencia como candidatos de método.…</a:t>
+              <a:t>Sobre las series de las etapas 2 y 3, entrenar solo con datos normales de la propia bomba (diseño sin muestras anómalas de los retos acústicos y del ensayo de campo) y operar en sombra, sin actuar, registrando cada alerta con la inspección posterior (incluido el estado de goteo y de agua). Primero…</a:t>
             </a:r>
             <a:endParaRPr lang="en-US" sz="1200" dirty="0"/>
           </a:p>
@@ -5919,7 +6099,7 @@
       </p:sp>
       <p:sp>
         <p:nvSpPr>
-          <p:cNvPr id="19" name="tarjeta 5. Operación, deriva y reentrenamiento"/>
+          <p:cNvPr id="19" name="tarjeta 5. Diagnóstico por reglas (tipo de defecto y causa probable)"/>
           <p:cNvSpPr/>
           <p:nvPr/>
         </p:nvSpPr>
@@ -5974,7 +6154,7 @@
                   <a:schemeClr val="tx1"/>
                 </a:solidFill>
               </a:rPr>
-              <a:t>5. Operación, deriva y reentrenamiento</a:t>
+              <a:t>5. Diagnóstico por reglas (tipo de defecto y causa probable)</a:t>
             </a:r>
             <a:endParaRPr lang="en-US" sz="1300" dirty="0"/>
           </a:p>
@@ -6014,7 +6194,213 @@
                   <a:schemeClr val="tx1"/>
                 </a:solidFill>
               </a:rPr>
-              <a:t>Piloto en sombra antes de actuar. Plan de deriva por cambio de punto de operación, de rodamiento, de impulsor o de lubricante; recalibrar en planta, no importar parámetros de banco. Reentrenar solo con aprobación humana y guardar script, semilla y versiones.</a:t>
+              <a:t>Envolvente y frecuencias características de rodamiento para tipo y ubicación (E-8001), contrastado con el hallazgo al desmontar del formato de la etapa 1; la causa probable (agua, lubricante, montaje, sobrecalentamiento) se asigna por inspección y no por el modelo. Un clasificador supervisado solo…</a:t>
+            </a:r>
+            <a:endParaRPr lang="en-US" sz="1200" dirty="0"/>
+          </a:p>
+        </p:txBody>
+      </p:sp>
+      <p:sp>
+        <p:nvSpPr>
+          <p:cNvPr id="22" name="tarjeta 6. Supervivencia exploratoria y pronóstico, solo con tiempos hasta la falla propios"/>
+          <p:cNvSpPr/>
+          <p:nvPr/>
+        </p:nvSpPr>
+        <p:spPr>
+          <a:xfrm>
+            <a:off x="457200" y="6126480"/>
+            <a:ext cx="3657600" cy="2286000"/>
+          </a:xfrm>
+          <a:prstGeom prst="roundRect">
+            <a:avLst>
+              <a:gd name="adj" fmla="val 3200"/>
+            </a:avLst>
+          </a:prstGeom>
+          <a:solidFill>
+            <a:schemeClr val="bg2"/>
+          </a:solidFill>
+          <a:ln w="12700">
+            <a:solidFill>
+              <a:srgbClr val="333333"/>
+            </a:solidFill>
+            <a:prstDash val="solid"/>
+          </a:ln>
+        </p:spPr>
+      </p:sp>
+      <p:sp>
+        <p:nvSpPr>
+          <p:cNvPr id="23" name="Text 21"/>
+          <p:cNvSpPr txBox="1"/>
+          <p:nvPr/>
+        </p:nvSpPr>
+        <p:spPr>
+          <a:xfrm>
+            <a:off x="594360" y="6217920"/>
+            <a:ext cx="3383280" cy="365760"/>
+          </a:xfrm>
+          <a:prstGeom prst="rect">
+            <a:avLst/>
+          </a:prstGeom>
+          <a:noFill/>
+          <a:ln/>
+        </p:spPr>
+        <p:txBody>
+          <a:bodyPr wrap="square" lIns="0" tIns="0" rIns="0" bIns="0" rtlCol="0" anchor="t"/>
+          <a:lstStyle/>
+          <a:p>
+            <a:pPr indent="0" marL="0">
+              <a:buNone/>
+            </a:pPr>
+            <a:r>
+              <a:rPr lang="en-US" sz="1300" b="1" dirty="0">
+                <a:solidFill>
+                  <a:schemeClr val="tx1"/>
+                </a:solidFill>
+              </a:rPr>
+              <a:t>6. Supervivencia exploratoria y pronóstico, solo con tiempos hasta la falla propios</a:t>
+            </a:r>
+            <a:endParaRPr lang="en-US" sz="1300" dirty="0"/>
+          </a:p>
+        </p:txBody>
+      </p:sp>
+      <p:sp>
+        <p:nvSpPr>
+          <p:cNvPr id="24" name="Text 22"/>
+          <p:cNvSpPr txBox="1"/>
+          <p:nvPr/>
+        </p:nvSpPr>
+        <p:spPr>
+          <a:xfrm>
+            <a:off x="594360" y="6629400"/>
+            <a:ext cx="3383280" cy="1691640"/>
+          </a:xfrm>
+          <a:prstGeom prst="rect">
+            <a:avLst/>
+          </a:prstGeom>
+          <a:noFill/>
+          <a:ln/>
+        </p:spPr>
+        <p:txBody>
+          <a:bodyPr wrap="square" lIns="0" tIns="0" rIns="0" bIns="0" rtlCol="0" anchor="t"/>
+          <a:lstStyle/>
+          <a:p>
+            <a:pPr marL="342900" indent="-342900">
+              <a:spcAft>
+                <a:spcPts val="400"/>
+              </a:spcAft>
+              <a:buSzPct val="100000"/>
+              <a:buChar char="•"/>
+            </a:pPr>
+            <a:r>
+              <a:rPr lang="en-US" sz="1200" dirty="0">
+                <a:solidFill>
+                  <a:schemeClr val="tx1"/>
+                </a:solidFill>
+              </a:rPr>
+              <a:t>Cada paquete es una unidad con fecha de inicio, fecha de falla o de censura. Empezar por descriptivo: Kaplan-Meier (kaplan_meier y km_failure_quantile con su banda) y Weibull con fit_weibull_mle, con intervalo de la forma y advertencias del kit; la censura se trata como tal, nunca como RUL = 0.…</a:t>
+            </a:r>
+            <a:endParaRPr lang="en-US" sz="1200" dirty="0"/>
+          </a:p>
+        </p:txBody>
+      </p:sp>
+      <p:sp>
+        <p:nvSpPr>
+          <p:cNvPr id="25" name="tarjeta 7. Operación, deriva y reentrenamiento"/>
+          <p:cNvSpPr/>
+          <p:nvPr/>
+        </p:nvSpPr>
+        <p:spPr>
+          <a:xfrm>
+            <a:off x="4251960" y="6126480"/>
+            <a:ext cx="3657600" cy="2286000"/>
+          </a:xfrm>
+          <a:prstGeom prst="roundRect">
+            <a:avLst>
+              <a:gd name="adj" fmla="val 3200"/>
+            </a:avLst>
+          </a:prstGeom>
+          <a:solidFill>
+            <a:schemeClr val="bg2"/>
+          </a:solidFill>
+          <a:ln w="12700">
+            <a:solidFill>
+              <a:srgbClr val="333333"/>
+            </a:solidFill>
+            <a:prstDash val="solid"/>
+          </a:ln>
+        </p:spPr>
+      </p:sp>
+      <p:sp>
+        <p:nvSpPr>
+          <p:cNvPr id="26" name="Text 24"/>
+          <p:cNvSpPr txBox="1"/>
+          <p:nvPr/>
+        </p:nvSpPr>
+        <p:spPr>
+          <a:xfrm>
+            <a:off x="4389120" y="6217920"/>
+            <a:ext cx="3383280" cy="365760"/>
+          </a:xfrm>
+          <a:prstGeom prst="rect">
+            <a:avLst/>
+          </a:prstGeom>
+          <a:noFill/>
+          <a:ln/>
+        </p:spPr>
+        <p:txBody>
+          <a:bodyPr wrap="square" lIns="0" tIns="0" rIns="0" bIns="0" rtlCol="0" anchor="t"/>
+          <a:lstStyle/>
+          <a:p>
+            <a:pPr indent="0" marL="0">
+              <a:buNone/>
+            </a:pPr>
+            <a:r>
+              <a:rPr lang="en-US" sz="1300" b="1" dirty="0">
+                <a:solidFill>
+                  <a:schemeClr val="tx1"/>
+                </a:solidFill>
+              </a:rPr>
+              <a:t>7. Operación, deriva y reentrenamiento</a:t>
+            </a:r>
+            <a:endParaRPr lang="en-US" sz="1300" dirty="0"/>
+          </a:p>
+        </p:txBody>
+      </p:sp>
+      <p:sp>
+        <p:nvSpPr>
+          <p:cNvPr id="27" name="Text 25"/>
+          <p:cNvSpPr txBox="1"/>
+          <p:nvPr/>
+        </p:nvSpPr>
+        <p:spPr>
+          <a:xfrm>
+            <a:off x="4389120" y="6629400"/>
+            <a:ext cx="3383280" cy="1691640"/>
+          </a:xfrm>
+          <a:prstGeom prst="rect">
+            <a:avLst/>
+          </a:prstGeom>
+          <a:noFill/>
+          <a:ln/>
+        </p:spPr>
+        <p:txBody>
+          <a:bodyPr wrap="square" lIns="0" tIns="0" rIns="0" bIns="0" rtlCol="0" anchor="t"/>
+          <a:lstStyle/>
+          <a:p>
+            <a:pPr marL="342900" indent="-342900">
+              <a:spcAft>
+                <a:spcPts val="400"/>
+              </a:spcAft>
+              <a:buSzPct val="100000"/>
+              <a:buChar char="•"/>
+            </a:pPr>
+            <a:r>
+              <a:rPr lang="en-US" sz="1200" dirty="0">
+                <a:solidFill>
+                  <a:schemeClr val="tx1"/>
+                </a:solidFill>
+              </a:rPr>
+              <a:t>Piloto en sombra antes de actuar. Plan de deriva por cambio de punto de operación, de tipo o proveedor de empaquetadura, de lubricante, de rodamiento, de operador o de método de medición; recalibrar en planta, no importar parámetros de banco. Cada alerta dispara una inspección, nunca un cambio…</a:t>
             </a:r>
             <a:endParaRPr lang="en-US" sz="1200" dirty="0"/>
           </a:p>
@@ -9043,7 +9429,7 @@
                 <a:ea typeface="Cambria" pitchFamily="34" charset="-122"/>
                 <a:cs typeface="Cambria" pitchFamily="34" charset="-120"/>
               </a:rPr>
-              <a:t>Siete brechas impiden pasar de hipótesis a conclusiones; cada una indica qué la cerraría</a:t>
+              <a:t>La cadena prensaestopa, fuga, agua y rodamiento se plantea en dos rutas; ningún eslabón puente tiene fuente leída</a:t>
             </a:r>
             <a:endParaRPr lang="en-US" sz="2400" dirty="0"/>
           </a:p>
@@ -9079,6 +9465,1595 @@
                   <a:schemeClr val="tx2"/>
                 </a:solidFill>
               </a:rPr>
+              <a:t>Fuente: Análisis de causa raíz y FMECA del caso; hipótesis posibles, eslabones puente rotulados síntesis</a:t>
+            </a:r>
+            <a:endParaRPr lang="en-US" sz="1000" dirty="0"/>
+          </a:p>
+        </p:txBody>
+      </p:sp>
+      <p:sp>
+        <p:nvSpPr>
+          <p:cNvPr id="4" name="tarjeta Ruta A: agua"/>
+          <p:cNvSpPr/>
+          <p:nvPr/>
+        </p:nvSpPr>
+        <p:spPr>
+          <a:xfrm>
+            <a:off x="457200" y="1280160"/>
+            <a:ext cx="3657600" cy="4663440"/>
+          </a:xfrm>
+          <a:prstGeom prst="roundRect">
+            <a:avLst>
+              <a:gd name="adj" fmla="val 2000"/>
+            </a:avLst>
+          </a:prstGeom>
+          <a:solidFill>
+            <a:schemeClr val="bg2"/>
+          </a:solidFill>
+          <a:ln w="12700">
+            <a:solidFill>
+              <a:schemeClr val="accent1"/>
+            </a:solidFill>
+            <a:prstDash val="solid"/>
+          </a:ln>
+        </p:spPr>
+      </p:sp>
+      <p:sp>
+        <p:nvSpPr>
+          <p:cNvPr id="5" name="Text 3"/>
+          <p:cNvSpPr txBox="1"/>
+          <p:nvPr/>
+        </p:nvSpPr>
+        <p:spPr>
+          <a:xfrm>
+            <a:off x="594360" y="1371600"/>
+            <a:ext cx="3383280" cy="365760"/>
+          </a:xfrm>
+          <a:prstGeom prst="rect">
+            <a:avLst/>
+          </a:prstGeom>
+          <a:noFill/>
+          <a:ln/>
+        </p:spPr>
+        <p:txBody>
+          <a:bodyPr wrap="square" lIns="0" tIns="0" rIns="0" bIns="0" rtlCol="0" anchor="t"/>
+          <a:lstStyle/>
+          <a:p>
+            <a:pPr indent="0" marL="0">
+              <a:buNone/>
+            </a:pPr>
+            <a:r>
+              <a:rPr lang="en-US" sz="1600" b="1" dirty="0">
+                <a:solidFill>
+                  <a:schemeClr val="tx1"/>
+                </a:solidFill>
+              </a:rPr>
+              <a:t>Ruta A: agua</a:t>
+            </a:r>
+            <a:endParaRPr lang="en-US" sz="1600" dirty="0"/>
+          </a:p>
+        </p:txBody>
+      </p:sp>
+      <p:sp>
+        <p:nvSpPr>
+          <p:cNvPr id="6" name="Text 4"/>
+          <p:cNvSpPr txBox="1"/>
+          <p:nvPr/>
+        </p:nvSpPr>
+        <p:spPr>
+          <a:xfrm>
+            <a:off x="594360" y="1783080"/>
+            <a:ext cx="3383280" cy="4069080"/>
+          </a:xfrm>
+          <a:prstGeom prst="rect">
+            <a:avLst/>
+          </a:prstGeom>
+          <a:noFill/>
+          <a:ln/>
+        </p:spPr>
+        <p:txBody>
+          <a:bodyPr wrap="square" lIns="0" tIns="0" rIns="0" bIns="0" rtlCol="0" anchor="t"/>
+          <a:lstStyle/>
+          <a:p>
+            <a:pPr marL="342900" indent="-342900">
+              <a:spcAft>
+                <a:spcPts val="400"/>
+              </a:spcAft>
+              <a:buSzPct val="100000"/>
+              <a:buChar char="•"/>
+            </a:pPr>
+            <a:r>
+              <a:rPr lang="en-US" sz="1500" dirty="0">
+                <a:solidFill>
+                  <a:schemeClr val="tx1"/>
+                </a:solidFill>
+              </a:rPr>
+              <a:t>Ajuste insuficiente del prensaestopa</a:t>
+            </a:r>
+            <a:endParaRPr lang="en-US" sz="1500" dirty="0"/>
+          </a:p>
+          <a:p>
+            <a:pPr marL="342900" indent="-342900">
+              <a:spcAft>
+                <a:spcPts val="400"/>
+              </a:spcAft>
+              <a:buSzPct val="100000"/>
+              <a:buChar char="•"/>
+            </a:pPr>
+            <a:r>
+              <a:rPr lang="en-US" sz="1500" dirty="0">
+                <a:solidFill>
+                  <a:schemeClr val="tx1"/>
+                </a:solidFill>
+              </a:rPr>
+              <a:t>Fuga hacia el soporte</a:t>
+            </a:r>
+            <a:endParaRPr lang="en-US" sz="1500" dirty="0"/>
+          </a:p>
+          <a:p>
+            <a:pPr marL="342900" indent="-342900">
+              <a:spcAft>
+                <a:spcPts val="400"/>
+              </a:spcAft>
+              <a:buSzPct val="100000"/>
+              <a:buChar char="•"/>
+            </a:pPr>
+            <a:r>
+              <a:rPr lang="en-US" sz="1500" dirty="0">
+                <a:solidFill>
+                  <a:schemeClr val="tx1"/>
+                </a:solidFill>
+              </a:rPr>
+              <a:t>Agua o contaminante en el lubricante</a:t>
+            </a:r>
+            <a:endParaRPr lang="en-US" sz="1500" dirty="0"/>
+          </a:p>
+          <a:p>
+            <a:pPr marL="342900" indent="-342900">
+              <a:spcAft>
+                <a:spcPts val="400"/>
+              </a:spcAft>
+              <a:buSzPct val="100000"/>
+              <a:buChar char="•"/>
+            </a:pPr>
+            <a:r>
+              <a:rPr lang="en-US" sz="1500" dirty="0">
+                <a:solidFill>
+                  <a:schemeClr val="tx1"/>
+                </a:solidFill>
+              </a:rPr>
+              <a:t>Pérdida de película, corrosión y fatiga del rodamiento</a:t>
+            </a:r>
+            <a:endParaRPr lang="en-US" sz="1500" dirty="0"/>
+          </a:p>
+        </p:txBody>
+      </p:sp>
+      <p:sp>
+        <p:nvSpPr>
+          <p:cNvPr id="7" name="tarjeta Ruta B: calor"/>
+          <p:cNvSpPr/>
+          <p:nvPr/>
+        </p:nvSpPr>
+        <p:spPr>
+          <a:xfrm>
+            <a:off x="4297680" y="1280160"/>
+            <a:ext cx="3657600" cy="4663440"/>
+          </a:xfrm>
+          <a:prstGeom prst="roundRect">
+            <a:avLst>
+              <a:gd name="adj" fmla="val 2000"/>
+            </a:avLst>
+          </a:prstGeom>
+          <a:solidFill>
+            <a:schemeClr val="bg2"/>
+          </a:solidFill>
+          <a:ln w="12700">
+            <a:solidFill>
+              <a:schemeClr val="accent3"/>
+            </a:solidFill>
+            <a:prstDash val="solid"/>
+          </a:ln>
+        </p:spPr>
+      </p:sp>
+      <p:sp>
+        <p:nvSpPr>
+          <p:cNvPr id="8" name="Text 6"/>
+          <p:cNvSpPr txBox="1"/>
+          <p:nvPr/>
+        </p:nvSpPr>
+        <p:spPr>
+          <a:xfrm>
+            <a:off x="4434840" y="1371600"/>
+            <a:ext cx="3383280" cy="365760"/>
+          </a:xfrm>
+          <a:prstGeom prst="rect">
+            <a:avLst/>
+          </a:prstGeom>
+          <a:noFill/>
+          <a:ln/>
+        </p:spPr>
+        <p:txBody>
+          <a:bodyPr wrap="square" lIns="0" tIns="0" rIns="0" bIns="0" rtlCol="0" anchor="t"/>
+          <a:lstStyle/>
+          <a:p>
+            <a:pPr indent="0" marL="0">
+              <a:buNone/>
+            </a:pPr>
+            <a:r>
+              <a:rPr lang="en-US" sz="1600" b="1" dirty="0">
+                <a:solidFill>
+                  <a:schemeClr val="tx1"/>
+                </a:solidFill>
+              </a:rPr>
+              <a:t>Ruta B: calor</a:t>
+            </a:r>
+            <a:endParaRPr lang="en-US" sz="1600" dirty="0"/>
+          </a:p>
+        </p:txBody>
+      </p:sp>
+      <p:sp>
+        <p:nvSpPr>
+          <p:cNvPr id="9" name="Text 7"/>
+          <p:cNvSpPr txBox="1"/>
+          <p:nvPr/>
+        </p:nvSpPr>
+        <p:spPr>
+          <a:xfrm>
+            <a:off x="4434840" y="1783080"/>
+            <a:ext cx="3383280" cy="4069080"/>
+          </a:xfrm>
+          <a:prstGeom prst="rect">
+            <a:avLst/>
+          </a:prstGeom>
+          <a:noFill/>
+          <a:ln/>
+        </p:spPr>
+        <p:txBody>
+          <a:bodyPr wrap="square" lIns="0" tIns="0" rIns="0" bIns="0" rtlCol="0" anchor="t"/>
+          <a:lstStyle/>
+          <a:p>
+            <a:pPr marL="342900" indent="-342900">
+              <a:spcAft>
+                <a:spcPts val="400"/>
+              </a:spcAft>
+              <a:buSzPct val="100000"/>
+              <a:buChar char="•"/>
+            </a:pPr>
+            <a:r>
+              <a:rPr lang="en-US" sz="1500" dirty="0">
+                <a:solidFill>
+                  <a:schemeClr val="tx1"/>
+                </a:solidFill>
+              </a:rPr>
+              <a:t>Apriete excesivo por reacción a la fuga</a:t>
+            </a:r>
+            <a:endParaRPr lang="en-US" sz="1500" dirty="0"/>
+          </a:p>
+          <a:p>
+            <a:pPr marL="342900" indent="-342900">
+              <a:spcAft>
+                <a:spcPts val="400"/>
+              </a:spcAft>
+              <a:buSzPct val="100000"/>
+              <a:buChar char="•"/>
+            </a:pPr>
+            <a:r>
+              <a:rPr lang="en-US" sz="1500" dirty="0">
+                <a:solidFill>
+                  <a:schemeClr val="tx1"/>
+                </a:solidFill>
+              </a:rPr>
+              <a:t>Se elimina el goteo: fricción y calor</a:t>
+            </a:r>
+            <a:endParaRPr lang="en-US" sz="1500" dirty="0"/>
+          </a:p>
+          <a:p>
+            <a:pPr marL="342900" indent="-342900">
+              <a:spcAft>
+                <a:spcPts val="400"/>
+              </a:spcAft>
+              <a:buSzPct val="100000"/>
+              <a:buChar char="•"/>
+            </a:pPr>
+            <a:r>
+              <a:rPr lang="en-US" sz="1500" dirty="0">
+                <a:solidFill>
+                  <a:schemeClr val="tx1"/>
+                </a:solidFill>
+              </a:rPr>
+              <a:t>Recalentamiento de eje y camisa</a:t>
+            </a:r>
+            <a:endParaRPr lang="en-US" sz="1500" dirty="0"/>
+          </a:p>
+          <a:p>
+            <a:pPr marL="342900" indent="-342900">
+              <a:spcAft>
+                <a:spcPts val="400"/>
+              </a:spcAft>
+              <a:buSzPct val="100000"/>
+              <a:buChar char="•"/>
+            </a:pPr>
+            <a:r>
+              <a:rPr lang="en-US" sz="1500" dirty="0">
+                <a:solidFill>
+                  <a:schemeClr val="tx1"/>
+                </a:solidFill>
+              </a:rPr>
+              <a:t>Carga térmica y deflexión sobre el rodamiento</a:t>
+            </a:r>
+            <a:endParaRPr lang="en-US" sz="1500" dirty="0"/>
+          </a:p>
+        </p:txBody>
+      </p:sp>
+      <p:sp>
+        <p:nvSpPr>
+          <p:cNvPr id="10" name="tarjeta Qué dice la evidencia"/>
+          <p:cNvSpPr/>
+          <p:nvPr/>
+        </p:nvSpPr>
+        <p:spPr>
+          <a:xfrm>
+            <a:off x="8138160" y="1280160"/>
+            <a:ext cx="3566160" cy="4663440"/>
+          </a:xfrm>
+          <a:prstGeom prst="roundRect">
+            <a:avLst>
+              <a:gd name="adj" fmla="val 2051"/>
+            </a:avLst>
+          </a:prstGeom>
+          <a:solidFill>
+            <a:schemeClr val="bg2"/>
+          </a:solidFill>
+          <a:ln w="12700">
+            <a:solidFill>
+              <a:schemeClr val="accent2"/>
+            </a:solidFill>
+            <a:prstDash val="solid"/>
+          </a:ln>
+        </p:spPr>
+      </p:sp>
+      <p:sp>
+        <p:nvSpPr>
+          <p:cNvPr id="11" name="Text 9"/>
+          <p:cNvSpPr txBox="1"/>
+          <p:nvPr/>
+        </p:nvSpPr>
+        <p:spPr>
+          <a:xfrm>
+            <a:off x="8275320" y="1371600"/>
+            <a:ext cx="3291840" cy="365760"/>
+          </a:xfrm>
+          <a:prstGeom prst="rect">
+            <a:avLst/>
+          </a:prstGeom>
+          <a:noFill/>
+          <a:ln/>
+        </p:spPr>
+        <p:txBody>
+          <a:bodyPr wrap="square" lIns="0" tIns="0" rIns="0" bIns="0" rtlCol="0" anchor="t"/>
+          <a:lstStyle/>
+          <a:p>
+            <a:pPr indent="0" marL="0">
+              <a:buNone/>
+            </a:pPr>
+            <a:r>
+              <a:rPr lang="en-US" sz="1500" b="1" dirty="0">
+                <a:solidFill>
+                  <a:schemeClr val="tx1"/>
+                </a:solidFill>
+              </a:rPr>
+              <a:t>Qué dice la evidencia</a:t>
+            </a:r>
+            <a:endParaRPr lang="en-US" sz="1500" dirty="0"/>
+          </a:p>
+        </p:txBody>
+      </p:sp>
+      <p:sp>
+        <p:nvSpPr>
+          <p:cNvPr id="12" name="Text 10"/>
+          <p:cNvSpPr txBox="1"/>
+          <p:nvPr/>
+        </p:nvSpPr>
+        <p:spPr>
+          <a:xfrm>
+            <a:off x="8275320" y="1783080"/>
+            <a:ext cx="3291840" cy="4069080"/>
+          </a:xfrm>
+          <a:prstGeom prst="rect">
+            <a:avLst/>
+          </a:prstGeom>
+          <a:noFill/>
+          <a:ln/>
+        </p:spPr>
+        <p:txBody>
+          <a:bodyPr wrap="square" lIns="0" tIns="0" rIns="0" bIns="0" rtlCol="0" anchor="t"/>
+          <a:lstStyle/>
+          <a:p>
+            <a:pPr marL="342900" indent="-342900">
+              <a:spcAft>
+                <a:spcPts val="400"/>
+              </a:spcAft>
+              <a:buSzPct val="100000"/>
+              <a:buChar char="•"/>
+            </a:pPr>
+            <a:r>
+              <a:rPr lang="en-US" sz="1300" dirty="0">
+                <a:solidFill>
+                  <a:schemeClr val="tx1"/>
+                </a:solidFill>
+              </a:rPr>
+              <a:t>Solo se leyó el mecanismo de la empaquetadura (texto aportado, comercial)</a:t>
+            </a:r>
+            <a:endParaRPr lang="en-US" sz="1300" dirty="0"/>
+          </a:p>
+          <a:p>
+            <a:pPr marL="342900" indent="-342900">
+              <a:spcAft>
+                <a:spcPts val="400"/>
+              </a:spcAft>
+              <a:buSzPct val="100000"/>
+              <a:buChar char="•"/>
+            </a:pPr>
+            <a:r>
+              <a:rPr lang="en-US" sz="1300" dirty="0">
+                <a:solidFill>
+                  <a:schemeClr val="tx1"/>
+                </a:solidFill>
+              </a:rPr>
+              <a:t>Las pistas dicen que la cadena existe, sin frecuencia ni tiempo a la falla</a:t>
+            </a:r>
+            <a:endParaRPr lang="en-US" sz="1300" dirty="0"/>
+          </a:p>
+          <a:p>
+            <a:pPr marL="342900" indent="-342900">
+              <a:spcAft>
+                <a:spcPts val="400"/>
+              </a:spcAft>
+              <a:buSzPct val="100000"/>
+              <a:buChar char="•"/>
+            </a:pPr>
+            <a:r>
+              <a:rPr lang="en-US" sz="1300" dirty="0">
+                <a:solidFill>
+                  <a:schemeClr val="tx1"/>
+                </a:solidFill>
+              </a:rPr>
+              <a:t>El peso de la contaminación va de 14 % a más de la mitad según la fuente: no se usa</a:t>
+            </a:r>
+            <a:endParaRPr lang="en-US" sz="1300" dirty="0"/>
+          </a:p>
+          <a:p>
+            <a:pPr marL="342900" indent="-342900">
+              <a:spcAft>
+                <a:spcPts val="400"/>
+              </a:spcAft>
+              <a:buSzPct val="100000"/>
+              <a:buChar char="•"/>
+            </a:pPr>
+            <a:r>
+              <a:rPr lang="en-US" sz="1300" dirty="0">
+                <a:solidFill>
+                  <a:schemeClr val="tx1"/>
+                </a:solidFill>
+              </a:rPr>
+              <a:t>Humanas y latentes: preguntas a verificar</a:t>
+            </a:r>
+            <a:endParaRPr lang="en-US" sz="1300" dirty="0"/>
+          </a:p>
+        </p:txBody>
+      </p:sp>
+      <p:sp>
+        <p:nvSpPr>
+          <p:cNvPr id="25" name="Slide Number Placeholder 0"/>
+          <p:cNvSpPr>
+            <a:spLocks noGrp="1"/>
+          </p:cNvSpPr>
+          <p:nvPr>
+            <p:ph type="sldNum" sz="quarter" idx="4294967295"/>
+          </p:nvPr>
+        </p:nvSpPr>
+        <p:spPr>
+          <a:xfrm>
+            <a:off x="11247120" y="6473952"/>
+            <a:ext cx="548640" cy="274320"/>
+          </a:xfrm>
+          <a:prstGeom prst="rect">
+            <a:avLst/>
+          </a:prstGeom>
+          <a:extLst>
+            <a:ext uri="{C572A759-6A51-4108-AA02-DFA0A04FC94B}">
+              <ma14:wrappingTextBoxFlag xmlns:ma14="http://schemas.microsoft.com/office/mac/drawingml/2011/main" val="0"/>
+            </a:ext>
+          </a:extLst>
+        </p:spPr>
+        <p:txBody>
+          <a:bodyPr/>
+          <a:lstStyle>
+            <a:lvl1pPr>
+              <a:defRPr sz="1000">
+                <a:solidFill>
+                  <a:schemeClr val="tx2"/>
+                </a:solidFill>
+              </a:defRPr>
+            </a:lvl1pPr>
+          </a:lstStyle>
+          <a:p>
+            <a:pPr algn="l"/>
+            <a:fld id="{F7021451-1387-4CA6-816F-3879F97B5CBC}" type="slidenum">
+              <a:rPr b="0" lang="en-US"/>
+              <a:t>14</a:t>
+            </a:fld>
+            <a:endParaRPr lang="en-US"/>
+          </a:p>
+        </p:txBody>
+      </p:sp>
+    </p:spTree>
+  </p:cSld>
+  <p:clrMapOvr>
+    <a:masterClrMapping/>
+  </p:clrMapOvr>
+</p:sld>
+</file>
+
+<file path=ppt/slides/slide15.xml><?xml version="1.0" encoding="utf-8"?>
+<p:sld xmlns:a="http://schemas.openxmlformats.org/drawingml/2006/main" xmlns:r="http://schemas.openxmlformats.org/officeDocument/2006/relationships" xmlns:p="http://schemas.openxmlformats.org/presentationml/2006/main">
+  <p:cSld name="Slide 15">
+    <p:spTree>
+      <p:nvGrpSpPr>
+        <p:cNvPr id="1" name=""/>
+        <p:cNvGrpSpPr/>
+        <p:nvPr/>
+      </p:nvGrpSpPr>
+      <p:grpSpPr>
+        <a:xfrm>
+          <a:off x="0" y="0"/>
+          <a:ext cx="0" cy="0"/>
+          <a:chOff x="0" y="0"/>
+          <a:chExt cx="0" cy="0"/>
+        </a:xfrm>
+      </p:grpSpPr>
+      <p:sp>
+        <p:nvSpPr>
+          <p:cNvPr id="2" name="Text 0"/>
+          <p:cNvSpPr txBox="1"/>
+          <p:nvPr/>
+        </p:nvSpPr>
+        <p:spPr>
+          <a:xfrm>
+            <a:off x="457200" y="274320"/>
+            <a:ext cx="11247120" cy="868680"/>
+          </a:xfrm>
+          <a:prstGeom prst="rect">
+            <a:avLst/>
+          </a:prstGeom>
+          <a:noFill/>
+          <a:ln/>
+        </p:spPr>
+        <p:txBody>
+          <a:bodyPr wrap="square" lIns="0" tIns="0" rIns="0" bIns="0" rtlCol="0" anchor="t"/>
+          <a:lstStyle/>
+          <a:p>
+            <a:pPr indent="0" marL="0">
+              <a:buNone/>
+            </a:pPr>
+            <a:r>
+              <a:rPr lang="en-US" sz="2400" b="1" dirty="0">
+                <a:solidFill>
+                  <a:schemeClr val="tx1"/>
+                </a:solidFill>
+                <a:latin typeface="Cambria" pitchFamily="34" charset="0"/>
+                <a:ea typeface="Cambria" pitchFamily="34" charset="-122"/>
+                <a:cs typeface="Cambria" pitchFamily="34" charset="-120"/>
+              </a:rPr>
+              <a:t>Con la tabla de datos correcta, el análisis de vida deja de estar vacío; con menos de 10 fallas por modo es exploratorio</a:t>
+            </a:r>
+            <a:endParaRPr lang="en-US" sz="2400" dirty="0"/>
+          </a:p>
+        </p:txBody>
+      </p:sp>
+      <p:sp>
+        <p:nvSpPr>
+          <p:cNvPr id="3" name="Text 1"/>
+          <p:cNvSpPr txBox="1"/>
+          <p:nvPr/>
+        </p:nvSpPr>
+        <p:spPr>
+          <a:xfrm>
+            <a:off x="457200" y="6144768"/>
+            <a:ext cx="11247120" cy="274320"/>
+          </a:xfrm>
+          <a:prstGeom prst="rect">
+            <a:avLst/>
+          </a:prstGeom>
+          <a:noFill/>
+          <a:ln/>
+        </p:spPr>
+        <p:txBody>
+          <a:bodyPr wrap="square" lIns="0" tIns="0" rIns="0" bIns="0" rtlCol="0" anchor="t"/>
+          <a:lstStyle/>
+          <a:p>
+            <a:pPr indent="0" marL="0">
+              <a:buNone/>
+            </a:pPr>
+            <a:r>
+              <a:rPr lang="en-US" sz="1000" i="1" dirty="0">
+                <a:solidFill>
+                  <a:schemeClr val="tx2"/>
+                </a:solidFill>
+              </a:rPr>
+              <a:t>Fuente: Plantilla del auditor de datos; criterio del equipo, no norma</a:t>
+            </a:r>
+            <a:endParaRPr lang="en-US" sz="1000" dirty="0"/>
+          </a:p>
+        </p:txBody>
+      </p:sp>
+      <p:graphicFrame>
+        <p:nvGraphicFramePr>
+          <p:cNvPr id="16" name="Table 0"/>
+          <p:cNvGraphicFramePr>
+            <a:graphicFrameLocks noGrp="1"/>
+          </p:cNvGraphicFramePr>
+          <p:nvPr>
+            <p:extLst>
+              <p:ext uri="{D42A27DB-BD31-4B8C-83A1-F6EECF244321}">
+                <p14:modId xmlns:p14="http://schemas.microsoft.com/office/powerpoint/2010/main" val="1579011935"/>
+              </p:ext>
+            </p:extLst>
+          </p:nvPr>
+        </p:nvGraphicFramePr>
+        <p:xfrm>
+          <a:off x="457200" y="1280160"/>
+          <a:ext cx="11247120" cy="914400"/>
+        </p:xfrm>
+        <a:graphic>
+          <a:graphicData uri="http://schemas.openxmlformats.org/drawingml/2006/table">
+            <a:tbl>
+              <a:tblPr/>
+              <a:tblGrid>
+                <a:gridCol w="6035040"/>
+                <a:gridCol w="5212080"/>
+              </a:tblGrid>
+              <a:tr h="548640">
+                <a:tc>
+                  <a:txBody>
+                    <a:bodyPr/>
+                    <a:lstStyle/>
+                    <a:p>
+                      <a:pPr indent="0" marL="0">
+                        <a:buNone/>
+                      </a:pPr>
+                      <a:r>
+                        <a:rPr lang="en-US" sz="1200" b="1" dirty="0">
+                          <a:solidFill>
+                            <a:schemeClr val="bg1"/>
+                          </a:solidFill>
+                          <a:latin typeface="Calibri" pitchFamily="34" charset="0"/>
+                          <a:ea typeface="Calibri" pitchFamily="34" charset="-122"/>
+                          <a:cs typeface="Calibri" pitchFamily="34" charset="-120"/>
+                        </a:rPr>
+                        <a:t>Dato</a:t>
+                      </a:r>
+                      <a:endParaRPr lang="en-US" sz="1200" dirty="0">
+                        <a:latin typeface="Calibri" charset="0"/>
+                        <a:ea typeface="Calibri" charset="0"/>
+                        <a:cs typeface="Calibri" charset="0"/>
+                      </a:endParaRPr>
+                    </a:p>
+                  </a:txBody>
+                  <a:tcPr marL="91440" marR="91440" marT="45720" marB="45720">
+                    <a:lnL w="9525" cap="flat" cmpd="sng" algn="ctr">
+                      <a:solidFill>
+                        <a:srgbClr val="DDE9EE"/>
+                      </a:solidFill>
+                      <a:prstDash val="solid"/>
+                      <a:round/>
+                      <a:headEnd type="none" w="med" len="med"/>
+                      <a:tailEnd type="none" w="med" len="med"/>
+                    </a:lnL>
+                    <a:lnR w="9525" cap="flat" cmpd="sng" algn="ctr">
+                      <a:solidFill>
+                        <a:srgbClr val="DDE9EE"/>
+                      </a:solidFill>
+                      <a:prstDash val="solid"/>
+                      <a:round/>
+                      <a:headEnd type="none" w="med" len="med"/>
+                      <a:tailEnd type="none" w="med" len="med"/>
+                    </a:lnR>
+                    <a:lnT w="9525" cap="flat" cmpd="sng" algn="ctr">
+                      <a:solidFill>
+                        <a:srgbClr val="DDE9EE"/>
+                      </a:solidFill>
+                      <a:prstDash val="solid"/>
+                      <a:round/>
+                      <a:headEnd type="none" w="med" len="med"/>
+                      <a:tailEnd type="none" w="med" len="med"/>
+                    </a:lnT>
+                    <a:lnB w="9525" cap="flat" cmpd="sng" algn="ctr">
+                      <a:solidFill>
+                        <a:srgbClr val="DDE9EE"/>
+                      </a:solidFill>
+                      <a:prstDash val="solid"/>
+                      <a:round/>
+                      <a:headEnd type="none" w="med" len="med"/>
+                      <a:tailEnd type="none" w="med" len="med"/>
+                    </a:lnB>
+                    <a:solidFill>
+                      <a:schemeClr val="tx2"/>
+                    </a:solidFill>
+                  </a:tcPr>
+                </a:tc>
+                <a:tc>
+                  <a:txBody>
+                    <a:bodyPr/>
+                    <a:lstStyle/>
+                    <a:p>
+                      <a:pPr indent="0" marL="0">
+                        <a:buNone/>
+                      </a:pPr>
+                      <a:r>
+                        <a:rPr lang="en-US" sz="1200" b="1" dirty="0">
+                          <a:solidFill>
+                            <a:schemeClr val="bg1"/>
+                          </a:solidFill>
+                          <a:latin typeface="Calibri" pitchFamily="34" charset="0"/>
+                          <a:ea typeface="Calibri" pitchFamily="34" charset="-122"/>
+                          <a:cs typeface="Calibri" pitchFamily="34" charset="-120"/>
+                        </a:rPr>
+                        <a:t>Por qué importa</a:t>
+                      </a:r>
+                      <a:endParaRPr lang="en-US" sz="1200" dirty="0">
+                        <a:latin typeface="Calibri" charset="0"/>
+                        <a:ea typeface="Calibri" charset="0"/>
+                        <a:cs typeface="Calibri" charset="0"/>
+                      </a:endParaRPr>
+                    </a:p>
+                  </a:txBody>
+                  <a:tcPr marL="91440" marR="91440" marT="45720" marB="45720">
+                    <a:lnL w="9525" cap="flat" cmpd="sng" algn="ctr">
+                      <a:solidFill>
+                        <a:srgbClr val="DDE9EE"/>
+                      </a:solidFill>
+                      <a:prstDash val="solid"/>
+                      <a:round/>
+                      <a:headEnd type="none" w="med" len="med"/>
+                      <a:tailEnd type="none" w="med" len="med"/>
+                    </a:lnL>
+                    <a:lnR w="9525" cap="flat" cmpd="sng" algn="ctr">
+                      <a:solidFill>
+                        <a:srgbClr val="DDE9EE"/>
+                      </a:solidFill>
+                      <a:prstDash val="solid"/>
+                      <a:round/>
+                      <a:headEnd type="none" w="med" len="med"/>
+                      <a:tailEnd type="none" w="med" len="med"/>
+                    </a:lnR>
+                    <a:lnT w="9525" cap="flat" cmpd="sng" algn="ctr">
+                      <a:solidFill>
+                        <a:srgbClr val="DDE9EE"/>
+                      </a:solidFill>
+                      <a:prstDash val="solid"/>
+                      <a:round/>
+                      <a:headEnd type="none" w="med" len="med"/>
+                      <a:tailEnd type="none" w="med" len="med"/>
+                    </a:lnT>
+                    <a:lnB w="9525" cap="flat" cmpd="sng" algn="ctr">
+                      <a:solidFill>
+                        <a:srgbClr val="DDE9EE"/>
+                      </a:solidFill>
+                      <a:prstDash val="solid"/>
+                      <a:round/>
+                      <a:headEnd type="none" w="med" len="med"/>
+                      <a:tailEnd type="none" w="med" len="med"/>
+                    </a:lnB>
+                    <a:solidFill>
+                      <a:schemeClr val="tx2"/>
+                    </a:solidFill>
+                  </a:tcPr>
+                </a:tc>
+              </a:tr>
+              <a:tr h="548640">
+                <a:tc>
+                  <a:txBody>
+                    <a:bodyPr/>
+                    <a:lstStyle/>
+                    <a:p>
+                      <a:pPr indent="0" marL="0">
+                        <a:buNone/>
+                      </a:pPr>
+                      <a:r>
+                        <a:rPr lang="en-US" sz="1100" b="1" dirty="0">
+                          <a:solidFill>
+                            <a:schemeClr val="tx1"/>
+                          </a:solidFill>
+                          <a:latin typeface="Calibri" pitchFamily="34" charset="0"/>
+                          <a:ea typeface="Calibri" pitchFamily="34" charset="-122"/>
+                          <a:cs typeface="Calibri" pitchFamily="34" charset="-120"/>
+                        </a:rPr>
+                        <a:t>Fecha de instalación y de salida, horas de operación, fecha de corte</a:t>
+                      </a:r>
+                      <a:endParaRPr lang="en-US" sz="1100" dirty="0">
+                        <a:latin typeface="Calibri" charset="0"/>
+                        <a:ea typeface="Calibri" charset="0"/>
+                        <a:cs typeface="Calibri" charset="0"/>
+                      </a:endParaRPr>
+                    </a:p>
+                  </a:txBody>
+                  <a:tcPr marL="91440" marR="91440" marT="45720" marB="45720" anchor="t">
+                    <a:lnL w="9525" cap="flat" cmpd="sng" algn="ctr">
+                      <a:solidFill>
+                        <a:srgbClr val="DDE9EE"/>
+                      </a:solidFill>
+                      <a:prstDash val="solid"/>
+                      <a:round/>
+                      <a:headEnd type="none" w="med" len="med"/>
+                      <a:tailEnd type="none" w="med" len="med"/>
+                    </a:lnL>
+                    <a:lnR w="9525" cap="flat" cmpd="sng" algn="ctr">
+                      <a:solidFill>
+                        <a:srgbClr val="DDE9EE"/>
+                      </a:solidFill>
+                      <a:prstDash val="solid"/>
+                      <a:round/>
+                      <a:headEnd type="none" w="med" len="med"/>
+                      <a:tailEnd type="none" w="med" len="med"/>
+                    </a:lnR>
+                    <a:lnT w="9525" cap="flat" cmpd="sng" algn="ctr">
+                      <a:solidFill>
+                        <a:srgbClr val="DDE9EE"/>
+                      </a:solidFill>
+                      <a:prstDash val="solid"/>
+                      <a:round/>
+                      <a:headEnd type="none" w="med" len="med"/>
+                      <a:tailEnd type="none" w="med" len="med"/>
+                    </a:lnT>
+                    <a:lnB w="9525" cap="flat" cmpd="sng" algn="ctr">
+                      <a:solidFill>
+                        <a:srgbClr val="DDE9EE"/>
+                      </a:solidFill>
+                      <a:prstDash val="solid"/>
+                      <a:round/>
+                      <a:headEnd type="none" w="med" len="med"/>
+                      <a:tailEnd type="none" w="med" len="med"/>
+                    </a:lnB>
+                  </a:tcPr>
+                </a:tc>
+                <a:tc>
+                  <a:txBody>
+                    <a:bodyPr/>
+                    <a:lstStyle/>
+                    <a:p>
+                      <a:pPr indent="0" marL="0">
+                        <a:buNone/>
+                      </a:pPr>
+                      <a:r>
+                        <a:rPr lang="en-US" sz="1100" dirty="0">
+                          <a:solidFill>
+                            <a:schemeClr val="tx1"/>
+                          </a:solidFill>
+                          <a:latin typeface="Calibri" pitchFamily="34" charset="0"/>
+                          <a:ea typeface="Calibri" pitchFamily="34" charset="-122"/>
+                          <a:cs typeface="Calibri" pitchFamily="34" charset="-120"/>
+                        </a:rPr>
+                        <a:t>Vida con censura por la derecha</a:t>
+                      </a:r>
+                      <a:endParaRPr lang="en-US" sz="1100" dirty="0">
+                        <a:latin typeface="Calibri" charset="0"/>
+                        <a:ea typeface="Calibri" charset="0"/>
+                        <a:cs typeface="Calibri" charset="0"/>
+                      </a:endParaRPr>
+                    </a:p>
+                  </a:txBody>
+                  <a:tcPr marL="91440" marR="91440" marT="45720" marB="45720" anchor="t">
+                    <a:lnL w="9525" cap="flat" cmpd="sng" algn="ctr">
+                      <a:solidFill>
+                        <a:srgbClr val="DDE9EE"/>
+                      </a:solidFill>
+                      <a:prstDash val="solid"/>
+                      <a:round/>
+                      <a:headEnd type="none" w="med" len="med"/>
+                      <a:tailEnd type="none" w="med" len="med"/>
+                    </a:lnL>
+                    <a:lnR w="9525" cap="flat" cmpd="sng" algn="ctr">
+                      <a:solidFill>
+                        <a:srgbClr val="DDE9EE"/>
+                      </a:solidFill>
+                      <a:prstDash val="solid"/>
+                      <a:round/>
+                      <a:headEnd type="none" w="med" len="med"/>
+                      <a:tailEnd type="none" w="med" len="med"/>
+                    </a:lnR>
+                    <a:lnT w="9525" cap="flat" cmpd="sng" algn="ctr">
+                      <a:solidFill>
+                        <a:srgbClr val="DDE9EE"/>
+                      </a:solidFill>
+                      <a:prstDash val="solid"/>
+                      <a:round/>
+                      <a:headEnd type="none" w="med" len="med"/>
+                      <a:tailEnd type="none" w="med" len="med"/>
+                    </a:lnT>
+                    <a:lnB w="9525" cap="flat" cmpd="sng" algn="ctr">
+                      <a:solidFill>
+                        <a:srgbClr val="DDE9EE"/>
+                      </a:solidFill>
+                      <a:prstDash val="solid"/>
+                      <a:round/>
+                      <a:headEnd type="none" w="med" len="med"/>
+                      <a:tailEnd type="none" w="med" len="med"/>
+                    </a:lnB>
+                  </a:tcPr>
+                </a:tc>
+              </a:tr>
+              <a:tr h="548640">
+                <a:tc>
+                  <a:txBody>
+                    <a:bodyPr/>
+                    <a:lstStyle/>
+                    <a:p>
+                      <a:pPr indent="0" marL="0">
+                        <a:buNone/>
+                      </a:pPr>
+                      <a:r>
+                        <a:rPr lang="en-US" sz="1100" b="1" dirty="0">
+                          <a:solidFill>
+                            <a:schemeClr val="tx1"/>
+                          </a:solidFill>
+                          <a:latin typeface="Calibri" pitchFamily="34" charset="0"/>
+                          <a:ea typeface="Calibri" pitchFamily="34" charset="-122"/>
+                          <a:cs typeface="Calibri" pitchFamily="34" charset="-120"/>
+                        </a:rPr>
+                        <a:t>Motivo de salida: falla, preventivo, causa ajena, sigue operando</a:t>
+                      </a:r>
+                      <a:endParaRPr lang="en-US" sz="1100" dirty="0">
+                        <a:latin typeface="Calibri" charset="0"/>
+                        <a:ea typeface="Calibri" charset="0"/>
+                        <a:cs typeface="Calibri" charset="0"/>
+                      </a:endParaRPr>
+                    </a:p>
+                  </a:txBody>
+                  <a:tcPr marL="91440" marR="91440" marT="45720" marB="45720" anchor="t">
+                    <a:lnL w="9525" cap="flat" cmpd="sng" algn="ctr">
+                      <a:solidFill>
+                        <a:srgbClr val="DDE9EE"/>
+                      </a:solidFill>
+                      <a:prstDash val="solid"/>
+                      <a:round/>
+                      <a:headEnd type="none" w="med" len="med"/>
+                      <a:tailEnd type="none" w="med" len="med"/>
+                    </a:lnL>
+                    <a:lnR w="9525" cap="flat" cmpd="sng" algn="ctr">
+                      <a:solidFill>
+                        <a:srgbClr val="DDE9EE"/>
+                      </a:solidFill>
+                      <a:prstDash val="solid"/>
+                      <a:round/>
+                      <a:headEnd type="none" w="med" len="med"/>
+                      <a:tailEnd type="none" w="med" len="med"/>
+                    </a:lnR>
+                    <a:lnT w="9525" cap="flat" cmpd="sng" algn="ctr">
+                      <a:solidFill>
+                        <a:srgbClr val="DDE9EE"/>
+                      </a:solidFill>
+                      <a:prstDash val="solid"/>
+                      <a:round/>
+                      <a:headEnd type="none" w="med" len="med"/>
+                      <a:tailEnd type="none" w="med" len="med"/>
+                    </a:lnT>
+                    <a:lnB w="9525" cap="flat" cmpd="sng" algn="ctr">
+                      <a:solidFill>
+                        <a:srgbClr val="DDE9EE"/>
+                      </a:solidFill>
+                      <a:prstDash val="solid"/>
+                      <a:round/>
+                      <a:headEnd type="none" w="med" len="med"/>
+                      <a:tailEnd type="none" w="med" len="med"/>
+                    </a:lnB>
+                  </a:tcPr>
+                </a:tc>
+                <a:tc>
+                  <a:txBody>
+                    <a:bodyPr/>
+                    <a:lstStyle/>
+                    <a:p>
+                      <a:pPr indent="0" marL="0">
+                        <a:buNone/>
+                      </a:pPr>
+                      <a:r>
+                        <a:rPr lang="en-US" sz="1100" dirty="0">
+                          <a:solidFill>
+                            <a:schemeClr val="tx1"/>
+                          </a:solidFill>
+                          <a:latin typeface="Calibri" pitchFamily="34" charset="0"/>
+                          <a:ea typeface="Calibri" pitchFamily="34" charset="-122"/>
+                          <a:cs typeface="Calibri" pitchFamily="34" charset="-120"/>
+                        </a:rPr>
+                        <a:t>Los preventivos son censura, no falla</a:t>
+                      </a:r>
+                      <a:endParaRPr lang="en-US" sz="1100" dirty="0">
+                        <a:latin typeface="Calibri" charset="0"/>
+                        <a:ea typeface="Calibri" charset="0"/>
+                        <a:cs typeface="Calibri" charset="0"/>
+                      </a:endParaRPr>
+                    </a:p>
+                  </a:txBody>
+                  <a:tcPr marL="91440" marR="91440" marT="45720" marB="45720" anchor="t">
+                    <a:lnL w="9525" cap="flat" cmpd="sng" algn="ctr">
+                      <a:solidFill>
+                        <a:srgbClr val="DDE9EE"/>
+                      </a:solidFill>
+                      <a:prstDash val="solid"/>
+                      <a:round/>
+                      <a:headEnd type="none" w="med" len="med"/>
+                      <a:tailEnd type="none" w="med" len="med"/>
+                    </a:lnL>
+                    <a:lnR w="9525" cap="flat" cmpd="sng" algn="ctr">
+                      <a:solidFill>
+                        <a:srgbClr val="DDE9EE"/>
+                      </a:solidFill>
+                      <a:prstDash val="solid"/>
+                      <a:round/>
+                      <a:headEnd type="none" w="med" len="med"/>
+                      <a:tailEnd type="none" w="med" len="med"/>
+                    </a:lnR>
+                    <a:lnT w="9525" cap="flat" cmpd="sng" algn="ctr">
+                      <a:solidFill>
+                        <a:srgbClr val="DDE9EE"/>
+                      </a:solidFill>
+                      <a:prstDash val="solid"/>
+                      <a:round/>
+                      <a:headEnd type="none" w="med" len="med"/>
+                      <a:tailEnd type="none" w="med" len="med"/>
+                    </a:lnT>
+                    <a:lnB w="9525" cap="flat" cmpd="sng" algn="ctr">
+                      <a:solidFill>
+                        <a:srgbClr val="DDE9EE"/>
+                      </a:solidFill>
+                      <a:prstDash val="solid"/>
+                      <a:round/>
+                      <a:headEnd type="none" w="med" len="med"/>
+                      <a:tailEnd type="none" w="med" len="med"/>
+                    </a:lnB>
+                  </a:tcPr>
+                </a:tc>
+              </a:tr>
+              <a:tr h="548640">
+                <a:tc>
+                  <a:txBody>
+                    <a:bodyPr/>
+                    <a:lstStyle/>
+                    <a:p>
+                      <a:pPr indent="0" marL="0">
+                        <a:buNone/>
+                      </a:pPr>
+                      <a:r>
+                        <a:rPr lang="en-US" sz="1100" b="1" dirty="0">
+                          <a:solidFill>
+                            <a:schemeClr val="tx1"/>
+                          </a:solidFill>
+                          <a:latin typeface="Calibri" pitchFamily="34" charset="0"/>
+                          <a:ea typeface="Calibri" pitchFamily="34" charset="-122"/>
+                          <a:cs typeface="Calibri" pitchFamily="34" charset="-120"/>
+                        </a:rPr>
+                        <a:t>Ajuste del prensaestopa con fecha y fuga observada con fecha</a:t>
+                      </a:r>
+                      <a:endParaRPr lang="en-US" sz="1100" dirty="0">
+                        <a:latin typeface="Calibri" charset="0"/>
+                        <a:ea typeface="Calibri" charset="0"/>
+                        <a:cs typeface="Calibri" charset="0"/>
+                      </a:endParaRPr>
+                    </a:p>
+                  </a:txBody>
+                  <a:tcPr marL="91440" marR="91440" marT="45720" marB="45720" anchor="t">
+                    <a:lnL w="9525" cap="flat" cmpd="sng" algn="ctr">
+                      <a:solidFill>
+                        <a:srgbClr val="DDE9EE"/>
+                      </a:solidFill>
+                      <a:prstDash val="solid"/>
+                      <a:round/>
+                      <a:headEnd type="none" w="med" len="med"/>
+                      <a:tailEnd type="none" w="med" len="med"/>
+                    </a:lnL>
+                    <a:lnR w="9525" cap="flat" cmpd="sng" algn="ctr">
+                      <a:solidFill>
+                        <a:srgbClr val="DDE9EE"/>
+                      </a:solidFill>
+                      <a:prstDash val="solid"/>
+                      <a:round/>
+                      <a:headEnd type="none" w="med" len="med"/>
+                      <a:tailEnd type="none" w="med" len="med"/>
+                    </a:lnR>
+                    <a:lnT w="9525" cap="flat" cmpd="sng" algn="ctr">
+                      <a:solidFill>
+                        <a:srgbClr val="DDE9EE"/>
+                      </a:solidFill>
+                      <a:prstDash val="solid"/>
+                      <a:round/>
+                      <a:headEnd type="none" w="med" len="med"/>
+                      <a:tailEnd type="none" w="med" len="med"/>
+                    </a:lnT>
+                    <a:lnB w="9525" cap="flat" cmpd="sng" algn="ctr">
+                      <a:solidFill>
+                        <a:srgbClr val="DDE9EE"/>
+                      </a:solidFill>
+                      <a:prstDash val="solid"/>
+                      <a:round/>
+                      <a:headEnd type="none" w="med" len="med"/>
+                      <a:tailEnd type="none" w="med" len="med"/>
+                    </a:lnB>
+                  </a:tcPr>
+                </a:tc>
+                <a:tc>
+                  <a:txBody>
+                    <a:bodyPr/>
+                    <a:lstStyle/>
+                    <a:p>
+                      <a:pPr indent="0" marL="0">
+                        <a:buNone/>
+                      </a:pPr>
+                      <a:r>
+                        <a:rPr lang="en-US" sz="1100" dirty="0">
+                          <a:solidFill>
+                            <a:schemeClr val="tx1"/>
+                          </a:solidFill>
+                          <a:latin typeface="Calibri" pitchFamily="34" charset="0"/>
+                          <a:ea typeface="Calibri" pitchFamily="34" charset="-122"/>
+                          <a:cs typeface="Calibri" pitchFamily="34" charset="-120"/>
+                        </a:rPr>
+                        <a:t>El ajuste debe preceder a la falla; se ajusta como respuesta a la fuga</a:t>
+                      </a:r>
+                      <a:endParaRPr lang="en-US" sz="1100" dirty="0">
+                        <a:latin typeface="Calibri" charset="0"/>
+                        <a:ea typeface="Calibri" charset="0"/>
+                        <a:cs typeface="Calibri" charset="0"/>
+                      </a:endParaRPr>
+                    </a:p>
+                  </a:txBody>
+                  <a:tcPr marL="91440" marR="91440" marT="45720" marB="45720" anchor="t">
+                    <a:lnL w="9525" cap="flat" cmpd="sng" algn="ctr">
+                      <a:solidFill>
+                        <a:srgbClr val="DDE9EE"/>
+                      </a:solidFill>
+                      <a:prstDash val="solid"/>
+                      <a:round/>
+                      <a:headEnd type="none" w="med" len="med"/>
+                      <a:tailEnd type="none" w="med" len="med"/>
+                    </a:lnL>
+                    <a:lnR w="9525" cap="flat" cmpd="sng" algn="ctr">
+                      <a:solidFill>
+                        <a:srgbClr val="DDE9EE"/>
+                      </a:solidFill>
+                      <a:prstDash val="solid"/>
+                      <a:round/>
+                      <a:headEnd type="none" w="med" len="med"/>
+                      <a:tailEnd type="none" w="med" len="med"/>
+                    </a:lnR>
+                    <a:lnT w="9525" cap="flat" cmpd="sng" algn="ctr">
+                      <a:solidFill>
+                        <a:srgbClr val="DDE9EE"/>
+                      </a:solidFill>
+                      <a:prstDash val="solid"/>
+                      <a:round/>
+                      <a:headEnd type="none" w="med" len="med"/>
+                      <a:tailEnd type="none" w="med" len="med"/>
+                    </a:lnT>
+                    <a:lnB w="9525" cap="flat" cmpd="sng" algn="ctr">
+                      <a:solidFill>
+                        <a:srgbClr val="DDE9EE"/>
+                      </a:solidFill>
+                      <a:prstDash val="solid"/>
+                      <a:round/>
+                      <a:headEnd type="none" w="med" len="med"/>
+                      <a:tailEnd type="none" w="med" len="med"/>
+                    </a:lnB>
+                  </a:tcPr>
+                </a:tc>
+              </a:tr>
+              <a:tr h="548640">
+                <a:tc>
+                  <a:txBody>
+                    <a:bodyPr/>
+                    <a:lstStyle/>
+                    <a:p>
+                      <a:pPr indent="0" marL="0">
+                        <a:buNone/>
+                      </a:pPr>
+                      <a:r>
+                        <a:rPr lang="en-US" sz="1100" b="1" dirty="0">
+                          <a:solidFill>
+                            <a:schemeClr val="tx1"/>
+                          </a:solidFill>
+                          <a:latin typeface="Calibri" pitchFamily="34" charset="0"/>
+                          <a:ea typeface="Calibri" pitchFamily="34" charset="-122"/>
+                          <a:cs typeface="Calibri" pitchFamily="34" charset="-120"/>
+                        </a:rPr>
+                        <a:t>Hallazgos al desmontar: agua, herrumbre, lubricante, camisa; con la opción no inspeccionado</a:t>
+                      </a:r>
+                      <a:endParaRPr lang="en-US" sz="1100" dirty="0">
+                        <a:latin typeface="Calibri" charset="0"/>
+                        <a:ea typeface="Calibri" charset="0"/>
+                        <a:cs typeface="Calibri" charset="0"/>
+                      </a:endParaRPr>
+                    </a:p>
+                  </a:txBody>
+                  <a:tcPr marL="91440" marR="91440" marT="45720" marB="45720" anchor="t">
+                    <a:lnL w="9525" cap="flat" cmpd="sng" algn="ctr">
+                      <a:solidFill>
+                        <a:srgbClr val="DDE9EE"/>
+                      </a:solidFill>
+                      <a:prstDash val="solid"/>
+                      <a:round/>
+                      <a:headEnd type="none" w="med" len="med"/>
+                      <a:tailEnd type="none" w="med" len="med"/>
+                    </a:lnL>
+                    <a:lnR w="9525" cap="flat" cmpd="sng" algn="ctr">
+                      <a:solidFill>
+                        <a:srgbClr val="DDE9EE"/>
+                      </a:solidFill>
+                      <a:prstDash val="solid"/>
+                      <a:round/>
+                      <a:headEnd type="none" w="med" len="med"/>
+                      <a:tailEnd type="none" w="med" len="med"/>
+                    </a:lnR>
+                    <a:lnT w="9525" cap="flat" cmpd="sng" algn="ctr">
+                      <a:solidFill>
+                        <a:srgbClr val="DDE9EE"/>
+                      </a:solidFill>
+                      <a:prstDash val="solid"/>
+                      <a:round/>
+                      <a:headEnd type="none" w="med" len="med"/>
+                      <a:tailEnd type="none" w="med" len="med"/>
+                    </a:lnT>
+                    <a:lnB w="9525" cap="flat" cmpd="sng" algn="ctr">
+                      <a:solidFill>
+                        <a:srgbClr val="DDE9EE"/>
+                      </a:solidFill>
+                      <a:prstDash val="solid"/>
+                      <a:round/>
+                      <a:headEnd type="none" w="med" len="med"/>
+                      <a:tailEnd type="none" w="med" len="med"/>
+                    </a:lnB>
+                  </a:tcPr>
+                </a:tc>
+                <a:tc>
+                  <a:txBody>
+                    <a:bodyPr/>
+                    <a:lstStyle/>
+                    <a:p>
+                      <a:pPr indent="0" marL="0">
+                        <a:buNone/>
+                      </a:pPr>
+                      <a:r>
+                        <a:rPr lang="en-US" sz="1100" dirty="0">
+                          <a:solidFill>
+                            <a:schemeClr val="tx1"/>
+                          </a:solidFill>
+                          <a:latin typeface="Calibri" pitchFamily="34" charset="0"/>
+                          <a:ea typeface="Calibri" pitchFamily="34" charset="-122"/>
+                          <a:cs typeface="Calibri" pitchFamily="34" charset="-120"/>
+                        </a:rPr>
+                        <a:t>Distingue la ruta A de la ruta B</a:t>
+                      </a:r>
+                      <a:endParaRPr lang="en-US" sz="1100" dirty="0">
+                        <a:latin typeface="Calibri" charset="0"/>
+                        <a:ea typeface="Calibri" charset="0"/>
+                        <a:cs typeface="Calibri" charset="0"/>
+                      </a:endParaRPr>
+                    </a:p>
+                  </a:txBody>
+                  <a:tcPr marL="91440" marR="91440" marT="45720" marB="45720" anchor="t">
+                    <a:lnL w="9525" cap="flat" cmpd="sng" algn="ctr">
+                      <a:solidFill>
+                        <a:srgbClr val="DDE9EE"/>
+                      </a:solidFill>
+                      <a:prstDash val="solid"/>
+                      <a:round/>
+                      <a:headEnd type="none" w="med" len="med"/>
+                      <a:tailEnd type="none" w="med" len="med"/>
+                    </a:lnL>
+                    <a:lnR w="9525" cap="flat" cmpd="sng" algn="ctr">
+                      <a:solidFill>
+                        <a:srgbClr val="DDE9EE"/>
+                      </a:solidFill>
+                      <a:prstDash val="solid"/>
+                      <a:round/>
+                      <a:headEnd type="none" w="med" len="med"/>
+                      <a:tailEnd type="none" w="med" len="med"/>
+                    </a:lnR>
+                    <a:lnT w="9525" cap="flat" cmpd="sng" algn="ctr">
+                      <a:solidFill>
+                        <a:srgbClr val="DDE9EE"/>
+                      </a:solidFill>
+                      <a:prstDash val="solid"/>
+                      <a:round/>
+                      <a:headEnd type="none" w="med" len="med"/>
+                      <a:tailEnd type="none" w="med" len="med"/>
+                    </a:lnT>
+                    <a:lnB w="9525" cap="flat" cmpd="sng" algn="ctr">
+                      <a:solidFill>
+                        <a:srgbClr val="DDE9EE"/>
+                      </a:solidFill>
+                      <a:prstDash val="solid"/>
+                      <a:round/>
+                      <a:headEnd type="none" w="med" len="med"/>
+                      <a:tailEnd type="none" w="med" len="med"/>
+                    </a:lnB>
+                  </a:tcPr>
+                </a:tc>
+              </a:tr>
+              <a:tr h="548640">
+                <a:tc>
+                  <a:txBody>
+                    <a:bodyPr/>
+                    <a:lstStyle/>
+                    <a:p>
+                      <a:pPr indent="0" marL="0">
+                        <a:buNone/>
+                      </a:pPr>
+                      <a:r>
+                        <a:rPr lang="en-US" sz="1100" b="1" dirty="0">
+                          <a:solidFill>
+                            <a:schemeClr val="tx1"/>
+                          </a:solidFill>
+                          <a:latin typeface="Calibri" pitchFamily="34" charset="0"/>
+                          <a:ea typeface="Calibri" pitchFamily="34" charset="-122"/>
+                          <a:cs typeface="Calibri" pitchFamily="34" charset="-120"/>
+                        </a:rPr>
+                        <a:t>Costos de empaquetadura, agua de sellado, camisa, rodamiento, parada</a:t>
+                      </a:r>
+                      <a:endParaRPr lang="en-US" sz="1100" dirty="0">
+                        <a:latin typeface="Calibri" charset="0"/>
+                        <a:ea typeface="Calibri" charset="0"/>
+                        <a:cs typeface="Calibri" charset="0"/>
+                      </a:endParaRPr>
+                    </a:p>
+                  </a:txBody>
+                  <a:tcPr marL="91440" marR="91440" marT="45720" marB="45720" anchor="t">
+                    <a:lnL w="9525" cap="flat" cmpd="sng" algn="ctr">
+                      <a:solidFill>
+                        <a:srgbClr val="DDE9EE"/>
+                      </a:solidFill>
+                      <a:prstDash val="solid"/>
+                      <a:round/>
+                      <a:headEnd type="none" w="med" len="med"/>
+                      <a:tailEnd type="none" w="med" len="med"/>
+                    </a:lnL>
+                    <a:lnR w="9525" cap="flat" cmpd="sng" algn="ctr">
+                      <a:solidFill>
+                        <a:srgbClr val="DDE9EE"/>
+                      </a:solidFill>
+                      <a:prstDash val="solid"/>
+                      <a:round/>
+                      <a:headEnd type="none" w="med" len="med"/>
+                      <a:tailEnd type="none" w="med" len="med"/>
+                    </a:lnR>
+                    <a:lnT w="9525" cap="flat" cmpd="sng" algn="ctr">
+                      <a:solidFill>
+                        <a:srgbClr val="DDE9EE"/>
+                      </a:solidFill>
+                      <a:prstDash val="solid"/>
+                      <a:round/>
+                      <a:headEnd type="none" w="med" len="med"/>
+                      <a:tailEnd type="none" w="med" len="med"/>
+                    </a:lnT>
+                    <a:lnB w="9525" cap="flat" cmpd="sng" algn="ctr">
+                      <a:solidFill>
+                        <a:srgbClr val="DDE9EE"/>
+                      </a:solidFill>
+                      <a:prstDash val="solid"/>
+                      <a:round/>
+                      <a:headEnd type="none" w="med" len="med"/>
+                      <a:tailEnd type="none" w="med" len="med"/>
+                    </a:lnB>
+                  </a:tcPr>
+                </a:tc>
+                <a:tc>
+                  <a:txBody>
+                    <a:bodyPr/>
+                    <a:lstStyle/>
+                    <a:p>
+                      <a:pPr indent="0" marL="0">
+                        <a:buNone/>
+                      </a:pPr>
+                      <a:r>
+                        <a:rPr lang="en-US" sz="1100" dirty="0">
+                          <a:solidFill>
+                            <a:schemeClr val="tx1"/>
+                          </a:solidFill>
+                          <a:latin typeface="Calibri" pitchFamily="34" charset="0"/>
+                          <a:ea typeface="Calibri" pitchFamily="34" charset="-122"/>
+                          <a:cs typeface="Calibri" pitchFamily="34" charset="-120"/>
+                        </a:rPr>
+                        <a:t>Punto óptimo solo con costos aportados</a:t>
+                      </a:r>
+                      <a:endParaRPr lang="en-US" sz="1100" dirty="0">
+                        <a:latin typeface="Calibri" charset="0"/>
+                        <a:ea typeface="Calibri" charset="0"/>
+                        <a:cs typeface="Calibri" charset="0"/>
+                      </a:endParaRPr>
+                    </a:p>
+                  </a:txBody>
+                  <a:tcPr marL="91440" marR="91440" marT="45720" marB="45720" anchor="t">
+                    <a:lnL w="9525" cap="flat" cmpd="sng" algn="ctr">
+                      <a:solidFill>
+                        <a:srgbClr val="DDE9EE"/>
+                      </a:solidFill>
+                      <a:prstDash val="solid"/>
+                      <a:round/>
+                      <a:headEnd type="none" w="med" len="med"/>
+                      <a:tailEnd type="none" w="med" len="med"/>
+                    </a:lnL>
+                    <a:lnR w="9525" cap="flat" cmpd="sng" algn="ctr">
+                      <a:solidFill>
+                        <a:srgbClr val="DDE9EE"/>
+                      </a:solidFill>
+                      <a:prstDash val="solid"/>
+                      <a:round/>
+                      <a:headEnd type="none" w="med" len="med"/>
+                      <a:tailEnd type="none" w="med" len="med"/>
+                    </a:lnR>
+                    <a:lnT w="9525" cap="flat" cmpd="sng" algn="ctr">
+                      <a:solidFill>
+                        <a:srgbClr val="DDE9EE"/>
+                      </a:solidFill>
+                      <a:prstDash val="solid"/>
+                      <a:round/>
+                      <a:headEnd type="none" w="med" len="med"/>
+                      <a:tailEnd type="none" w="med" len="med"/>
+                    </a:lnT>
+                    <a:lnB w="9525" cap="flat" cmpd="sng" algn="ctr">
+                      <a:solidFill>
+                        <a:srgbClr val="DDE9EE"/>
+                      </a:solidFill>
+                      <a:prstDash val="solid"/>
+                      <a:round/>
+                      <a:headEnd type="none" w="med" len="med"/>
+                      <a:tailEnd type="none" w="med" len="med"/>
+                    </a:lnB>
+                  </a:tcPr>
+                </a:tc>
+              </a:tr>
+            </a:tbl>
+          </a:graphicData>
+        </a:graphic>
+      </p:graphicFrame>
+      <p:sp>
+        <p:nvSpPr>
+          <p:cNvPr id="25" name="Slide Number Placeholder 0"/>
+          <p:cNvSpPr>
+            <a:spLocks noGrp="1"/>
+          </p:cNvSpPr>
+          <p:nvPr>
+            <p:ph type="sldNum" sz="quarter" idx="4294967295"/>
+          </p:nvPr>
+        </p:nvSpPr>
+        <p:spPr>
+          <a:xfrm>
+            <a:off x="11247120" y="6473952"/>
+            <a:ext cx="548640" cy="274320"/>
+          </a:xfrm>
+          <a:prstGeom prst="rect">
+            <a:avLst/>
+          </a:prstGeom>
+          <a:extLst>
+            <a:ext uri="{C572A759-6A51-4108-AA02-DFA0A04FC94B}">
+              <ma14:wrappingTextBoxFlag xmlns:ma14="http://schemas.microsoft.com/office/mac/drawingml/2011/main" val="0"/>
+            </a:ext>
+          </a:extLst>
+        </p:spPr>
+        <p:txBody>
+          <a:bodyPr/>
+          <a:lstStyle>
+            <a:lvl1pPr>
+              <a:defRPr sz="1000">
+                <a:solidFill>
+                  <a:schemeClr val="tx2"/>
+                </a:solidFill>
+              </a:defRPr>
+            </a:lvl1pPr>
+          </a:lstStyle>
+          <a:p>
+            <a:pPr algn="l"/>
+            <a:fld id="{F7021451-1387-4CA6-816F-3879F97B5CBC}" type="slidenum">
+              <a:rPr b="0" lang="en-US"/>
+              <a:t>15</a:t>
+            </a:fld>
+            <a:endParaRPr lang="en-US"/>
+          </a:p>
+        </p:txBody>
+      </p:sp>
+    </p:spTree>
+  </p:cSld>
+  <p:clrMapOvr>
+    <a:masterClrMapping/>
+  </p:clrMapOvr>
+</p:sld>
+</file>
+
+<file path=ppt/slides/slide16.xml><?xml version="1.0" encoding="utf-8"?>
+<p:sld xmlns:a="http://schemas.openxmlformats.org/drawingml/2006/main" xmlns:r="http://schemas.openxmlformats.org/officeDocument/2006/relationships" xmlns:p="http://schemas.openxmlformats.org/presentationml/2006/main">
+  <p:cSld name="Slide 16">
+    <p:spTree>
+      <p:nvGrpSpPr>
+        <p:cNvPr id="1" name=""/>
+        <p:cNvGrpSpPr/>
+        <p:nvPr/>
+      </p:nvGrpSpPr>
+      <p:grpSpPr>
+        <a:xfrm>
+          <a:off x="0" y="0"/>
+          <a:ext cx="0" cy="0"/>
+          <a:chOff x="0" y="0"/>
+          <a:chExt cx="0" cy="0"/>
+        </a:xfrm>
+      </p:grpSpPr>
+      <p:sp>
+        <p:nvSpPr>
+          <p:cNvPr id="2" name="Text 0"/>
+          <p:cNvSpPr txBox="1"/>
+          <p:nvPr/>
+        </p:nvSpPr>
+        <p:spPr>
+          <a:xfrm>
+            <a:off x="457200" y="274320"/>
+            <a:ext cx="11247120" cy="868680"/>
+          </a:xfrm>
+          <a:prstGeom prst="rect">
+            <a:avLst/>
+          </a:prstGeom>
+          <a:noFill/>
+          <a:ln/>
+        </p:spPr>
+        <p:txBody>
+          <a:bodyPr wrap="square" lIns="0" tIns="0" rIns="0" bIns="0" rtlCol="0" anchor="t"/>
+          <a:lstStyle/>
+          <a:p>
+            <a:pPr indent="0" marL="0">
+              <a:buNone/>
+            </a:pPr>
+            <a:r>
+              <a:rPr lang="en-US" sz="2400" b="1" dirty="0">
+                <a:solidFill>
+                  <a:schemeClr val="tx1"/>
+                </a:solidFill>
+                <a:latin typeface="Cambria" pitchFamily="34" charset="0"/>
+                <a:ea typeface="Cambria" pitchFamily="34" charset="-122"/>
+                <a:cs typeface="Cambria" pitchFamily="34" charset="-120"/>
+              </a:rPr>
+              <a:t>Siete brechas impiden pasar de hipótesis a conclusiones; cada una indica qué la cerraría</a:t>
+            </a:r>
+            <a:endParaRPr lang="en-US" sz="2400" dirty="0"/>
+          </a:p>
+        </p:txBody>
+      </p:sp>
+      <p:sp>
+        <p:nvSpPr>
+          <p:cNvPr id="3" name="Text 1"/>
+          <p:cNvSpPr txBox="1"/>
+          <p:nvPr/>
+        </p:nvSpPr>
+        <p:spPr>
+          <a:xfrm>
+            <a:off x="457200" y="6144768"/>
+            <a:ext cx="11247120" cy="274320"/>
+          </a:xfrm>
+          <a:prstGeom prst="rect">
+            <a:avLst/>
+          </a:prstGeom>
+          <a:noFill/>
+          <a:ln/>
+        </p:spPr>
+        <p:txBody>
+          <a:bodyPr wrap="square" lIns="0" tIns="0" rIns="0" bIns="0" rtlCol="0" anchor="t"/>
+          <a:lstStyle/>
+          <a:p>
+            <a:pPr indent="0" marL="0">
+              <a:buNone/>
+            </a:pPr>
+            <a:r>
+              <a:rPr lang="en-US" sz="1000" i="1" dirty="0">
+                <a:solidFill>
+                  <a:schemeClr val="tx2"/>
+                </a:solidFill>
+              </a:rPr>
               <a:t>Fuente: Dossier del caso, secciones SIN DATOS PARA ARMARLO</a:t>
             </a:r>
             <a:endParaRPr lang="en-US" sz="1000" dirty="0"/>
@@ -9087,7 +11062,7 @@
       </p:sp>
       <p:graphicFrame>
         <p:nvGraphicFramePr>
-          <p:cNvPr id="15" name="Table 0"/>
+          <p:cNvPr id="17" name="Table 0"/>
           <p:cNvGraphicFramePr>
             <a:graphicFrameLocks noGrp="1"/>
           </p:cNvGraphicFramePr>
@@ -10740,7 +12715,7 @@
             <a:pPr algn="l"/>
             <a:fld id="{F7021451-1387-4CA6-816F-3879F97B5CBC}" type="slidenum">
               <a:rPr b="0" lang="en-US"/>
-              <a:t>14</a:t>
+              <a:t>16</a:t>
             </a:fld>
             <a:endParaRPr lang="en-US"/>
           </a:p>
@@ -10754,9 +12729,9 @@
 </p:sld>
 </file>
 
-<file path=ppt/slides/slide15.xml><?xml version="1.0" encoding="utf-8"?>
+<file path=ppt/slides/slide17.xml><?xml version="1.0" encoding="utf-8"?>
 <p:sld xmlns:a="http://schemas.openxmlformats.org/drawingml/2006/main" xmlns:r="http://schemas.openxmlformats.org/officeDocument/2006/relationships" xmlns:p="http://schemas.openxmlformats.org/presentationml/2006/main">
-  <p:cSld name="Slide 15">
+  <p:cSld name="Slide 17">
     <p:spTree>
       <p:nvGrpSpPr>
         <p:cNvPr id="1" name=""/>
@@ -11356,7 +13331,7 @@
             <a:pPr algn="l"/>
             <a:fld id="{F7021451-1387-4CA6-816F-3879F97B5CBC}" type="slidenum">
               <a:rPr b="0" lang="en-US"/>
-              <a:t>15</a:t>
+              <a:t>17</a:t>
             </a:fld>
             <a:endParaRPr lang="en-US"/>
           </a:p>
@@ -11370,9 +13345,9 @@
 </p:sld>
 </file>
 
-<file path=ppt/slides/slide16.xml><?xml version="1.0" encoding="utf-8"?>
+<file path=ppt/slides/slide18.xml><?xml version="1.0" encoding="utf-8"?>
 <p:sld xmlns:a="http://schemas.openxmlformats.org/drawingml/2006/main" xmlns:r="http://schemas.openxmlformats.org/officeDocument/2006/relationships" xmlns:p="http://schemas.openxmlformats.org/presentationml/2006/main">
-  <p:cSld name="Slide 16">
+  <p:cSld name="Slide 18">
     <p:spTree>
       <p:nvGrpSpPr>
         <p:cNvPr id="1" name=""/>
@@ -12141,7 +14116,7 @@
             <a:pPr algn="l"/>
             <a:fld id="{F7021451-1387-4CA6-816F-3879F97B5CBC}" type="slidenum">
               <a:rPr b="0" lang="en-US"/>
-              <a:t>16</a:t>
+              <a:t>18</a:t>
             </a:fld>
             <a:endParaRPr lang="en-US"/>
           </a:p>
@@ -12155,9 +14130,9 @@
 </p:sld>
 </file>
 
-<file path=ppt/slides/slide17.xml><?xml version="1.0" encoding="utf-8"?>
+<file path=ppt/slides/slide19.xml><?xml version="1.0" encoding="utf-8"?>
 <p:sld xmlns:a="http://schemas.openxmlformats.org/drawingml/2006/main" xmlns:r="http://schemas.openxmlformats.org/officeDocument/2006/relationships" xmlns:p="http://schemas.openxmlformats.org/presentationml/2006/main">
-  <p:cSld name="Slide 17">
+  <p:cSld name="Slide 19">
     <p:spTree>
       <p:nvGrpSpPr>
         <p:cNvPr id="1" name=""/>
@@ -12393,7 +14368,7 @@
             <a:pPr algn="l"/>
             <a:fld id="{F7021451-1387-4CA6-816F-3879F97B5CBC}" type="slidenum">
               <a:rPr b="0" lang="en-US"/>
-              <a:t>17</a:t>
+              <a:t>19</a:t>
             </a:fld>
             <a:endParaRPr lang="en-US"/>
           </a:p>
@@ -12407,9 +14382,9 @@
 </p:sld>
 </file>
 
-<file path=ppt/slides/slide18.xml><?xml version="1.0" encoding="utf-8"?>
+<file path=ppt/slides/slide2.xml><?xml version="1.0" encoding="utf-8"?>
 <p:sld xmlns:a="http://schemas.openxmlformats.org/drawingml/2006/main" xmlns:r="http://schemas.openxmlformats.org/officeDocument/2006/relationships" xmlns:p="http://schemas.openxmlformats.org/presentationml/2006/main">
-  <p:cSld name="Slide 18">
+  <p:cSld name="Slide 2">
     <p:spTree>
       <p:nvGrpSpPr>
         <p:cNvPr id="1" name=""/>
@@ -12457,7 +14432,7 @@
                 <a:ea typeface="Cambria" pitchFamily="34" charset="-122"/>
                 <a:cs typeface="Cambria" pitchFamily="34" charset="-120"/>
               </a:rPr>
-              <a:t>Referencias principales en APA 7 (2 de 2)</a:t>
+              <a:t>Ninguna fuente de prensaestopa se pudo leer: solo los rodamientos tienen respaldo y el vínculo con la empaquetadura queda SIN DATOS PARA ARMARLO</a:t>
             </a:r>
             <a:endParaRPr lang="en-US" sz="2400" dirty="0"/>
           </a:p>
@@ -12493,7 +14468,7 @@
                   <a:schemeClr val="tx2"/>
                 </a:solidFill>
               </a:rPr>
-              <a:t>Fuente: Registro de evidencia del caso; enlaces completos en la pestaña Referencias del informe</a:t>
+              <a:t>Fuente: Dossier del caso; registro de evidencia con 483 entradas</a:t>
             </a:r>
             <a:endParaRPr lang="en-US" sz="1000" dirty="0"/>
           </a:p>
@@ -12501,14 +14476,41 @@
       </p:sp>
       <p:sp>
         <p:nvSpPr>
-          <p:cNvPr id="4" name="Text 2"/>
+          <p:cNvPr id="4" name="tarjeta Qué sabemos"/>
+          <p:cNvSpPr/>
+          <p:nvPr/>
+        </p:nvSpPr>
+        <p:spPr>
+          <a:xfrm>
+            <a:off x="457200" y="1280160"/>
+            <a:ext cx="3657600" cy="4754880"/>
+          </a:xfrm>
+          <a:prstGeom prst="roundRect">
+            <a:avLst>
+              <a:gd name="adj" fmla="val 2000"/>
+            </a:avLst>
+          </a:prstGeom>
+          <a:solidFill>
+            <a:schemeClr val="bg2"/>
+          </a:solidFill>
+          <a:ln w="12700">
+            <a:solidFill>
+              <a:schemeClr val="accent2"/>
+            </a:solidFill>
+            <a:prstDash val="solid"/>
+          </a:ln>
+        </p:spPr>
+      </p:sp>
+      <p:sp>
+        <p:nvSpPr>
+          <p:cNvPr id="5" name="Text 3"/>
           <p:cNvSpPr txBox="1"/>
           <p:nvPr/>
         </p:nvSpPr>
         <p:spPr>
           <a:xfrm>
-            <a:off x="457200" y="1188720"/>
-            <a:ext cx="11247120" cy="4846320"/>
+            <a:off x="594360" y="1371600"/>
+            <a:ext cx="3383280" cy="365760"/>
           </a:xfrm>
           <a:prstGeom prst="rect">
             <a:avLst/>
@@ -12521,9 +14523,516 @@
           <a:lstStyle/>
           <a:p>
             <a:pPr indent="0" marL="0">
+              <a:buNone/>
+            </a:pPr>
+            <a:r>
+              <a:rPr lang="en-US" sz="1500" b="1" dirty="0">
+                <a:solidFill>
+                  <a:schemeClr val="tx1"/>
+                </a:solidFill>
+              </a:rPr>
+              <a:t>Qué sabemos</a:t>
+            </a:r>
+            <a:endParaRPr lang="en-US" sz="1500" dirty="0"/>
+          </a:p>
+        </p:txBody>
+      </p:sp>
+      <p:sp>
+        <p:nvSpPr>
+          <p:cNvPr id="6" name="Text 4"/>
+          <p:cNvSpPr txBox="1"/>
+          <p:nvPr/>
+        </p:nvSpPr>
+        <p:spPr>
+          <a:xfrm>
+            <a:off x="594360" y="1783080"/>
+            <a:ext cx="3383280" cy="4160520"/>
+          </a:xfrm>
+          <a:prstGeom prst="rect">
+            <a:avLst/>
+          </a:prstGeom>
+          <a:noFill/>
+          <a:ln/>
+        </p:spPr>
+        <p:txBody>
+          <a:bodyPr wrap="square" lIns="0" tIns="0" rIns="0" bIns="0" rtlCol="0" anchor="t"/>
+          <a:lstStyle/>
+          <a:p>
+            <a:pPr marL="342900" indent="-342900">
               <a:spcAft>
-                <a:spcPts val="800"/>
+                <a:spcPts val="400"/>
               </a:spcAft>
+              <a:buSzPct val="100000"/>
+              <a:buChar char="•"/>
+            </a:pPr>
+            <a:r>
+              <a:rPr lang="en-US" sz="1400" dirty="0">
+                <a:solidFill>
+                  <a:schemeClr val="tx1"/>
+                </a:solidFill>
+              </a:rPr>
+              <a:t>Los rodamientos de bombas se citan entre los componentes más propensos a fallar, por contaminación, mala lubricación y montaje inadecuado</a:t>
+            </a:r>
+            <a:endParaRPr lang="en-US" sz="1400" dirty="0"/>
+          </a:p>
+          <a:p>
+            <a:pPr marL="342900" indent="-342900">
+              <a:spcAft>
+                <a:spcPts val="400"/>
+              </a:spcAft>
+              <a:buSzPct val="100000"/>
+              <a:buChar char="•"/>
+            </a:pPr>
+            <a:r>
+              <a:rPr lang="en-US" sz="1400" dirty="0">
+                <a:solidFill>
+                  <a:schemeClr val="tx1"/>
+                </a:solidFill>
+              </a:rPr>
+              <a:t>Un resumen de 1988 atribuye el 90 % de las fallas prematuras de rodamientos de bolas de bombas a cuatro causas (no es estadística)</a:t>
+            </a:r>
+            <a:endParaRPr lang="en-US" sz="1400" dirty="0"/>
+          </a:p>
+          <a:p>
+            <a:pPr marL="342900" indent="-342900">
+              <a:spcAft>
+                <a:spcPts val="400"/>
+              </a:spcAft>
+              <a:buSzPct val="100000"/>
+              <a:buChar char="•"/>
+            </a:pPr>
+            <a:r>
+              <a:rPr lang="en-US" sz="1400" dirty="0">
+                <a:solidFill>
+                  <a:schemeClr val="tx1"/>
+                </a:solidFill>
+              </a:rPr>
+              <a:t>El defecto progresa en 4 etapas espectrales; la kurtosis no es monótona</a:t>
+            </a:r>
+            <a:endParaRPr lang="en-US" sz="1400" dirty="0"/>
+          </a:p>
+        </p:txBody>
+      </p:sp>
+      <p:sp>
+        <p:nvSpPr>
+          <p:cNvPr id="7" name="tarjeta Qué no sabemos"/>
+          <p:cNvSpPr/>
+          <p:nvPr/>
+        </p:nvSpPr>
+        <p:spPr>
+          <a:xfrm>
+            <a:off x="4297680" y="1280160"/>
+            <a:ext cx="3657600" cy="4754880"/>
+          </a:xfrm>
+          <a:prstGeom prst="roundRect">
+            <a:avLst>
+              <a:gd name="adj" fmla="val 2000"/>
+            </a:avLst>
+          </a:prstGeom>
+          <a:solidFill>
+            <a:schemeClr val="bg2"/>
+          </a:solidFill>
+          <a:ln w="12700">
+            <a:solidFill>
+              <a:schemeClr val="accent3"/>
+            </a:solidFill>
+            <a:prstDash val="solid"/>
+          </a:ln>
+        </p:spPr>
+      </p:sp>
+      <p:sp>
+        <p:nvSpPr>
+          <p:cNvPr id="8" name="Text 6"/>
+          <p:cNvSpPr txBox="1"/>
+          <p:nvPr/>
+        </p:nvSpPr>
+        <p:spPr>
+          <a:xfrm>
+            <a:off x="4434840" y="1371600"/>
+            <a:ext cx="3383280" cy="365760"/>
+          </a:xfrm>
+          <a:prstGeom prst="rect">
+            <a:avLst/>
+          </a:prstGeom>
+          <a:noFill/>
+          <a:ln/>
+        </p:spPr>
+        <p:txBody>
+          <a:bodyPr wrap="square" lIns="0" tIns="0" rIns="0" bIns="0" rtlCol="0" anchor="t"/>
+          <a:lstStyle/>
+          <a:p>
+            <a:pPr indent="0" marL="0">
+              <a:buNone/>
+            </a:pPr>
+            <a:r>
+              <a:rPr lang="en-US" sz="1500" b="1" dirty="0">
+                <a:solidFill>
+                  <a:schemeClr val="tx1"/>
+                </a:solidFill>
+              </a:rPr>
+              <a:t>Qué no sabemos</a:t>
+            </a:r>
+            <a:endParaRPr lang="en-US" sz="1500" dirty="0"/>
+          </a:p>
+        </p:txBody>
+      </p:sp>
+      <p:sp>
+        <p:nvSpPr>
+          <p:cNvPr id="9" name="Text 7"/>
+          <p:cNvSpPr txBox="1"/>
+          <p:nvPr/>
+        </p:nvSpPr>
+        <p:spPr>
+          <a:xfrm>
+            <a:off x="4434840" y="1783080"/>
+            <a:ext cx="3383280" cy="4160520"/>
+          </a:xfrm>
+          <a:prstGeom prst="rect">
+            <a:avLst/>
+          </a:prstGeom>
+          <a:noFill/>
+          <a:ln/>
+        </p:spPr>
+        <p:txBody>
+          <a:bodyPr wrap="square" lIns="0" tIns="0" rIns="0" bIns="0" rtlCol="0" anchor="t"/>
+          <a:lstStyle/>
+          <a:p>
+            <a:pPr marL="342900" indent="-342900">
+              <a:spcAft>
+                <a:spcPts val="400"/>
+              </a:spcAft>
+              <a:buSzPct val="100000"/>
+              <a:buChar char="•"/>
+            </a:pPr>
+            <a:r>
+              <a:rPr lang="en-US" sz="1400" dirty="0">
+                <a:solidFill>
+                  <a:schemeClr val="tx1"/>
+                </a:solidFill>
+              </a:rPr>
+              <a:t>Si la fuga o el ajuste de la empaquetadura dañan el rodamiento, y cuánto</a:t>
+            </a:r>
+            <a:endParaRPr lang="en-US" sz="1400" dirty="0"/>
+          </a:p>
+          <a:p>
+            <a:pPr marL="342900" indent="-342900">
+              <a:spcAft>
+                <a:spcPts val="400"/>
+              </a:spcAft>
+              <a:buSzPct val="100000"/>
+              <a:buChar char="•"/>
+            </a:pPr>
+            <a:r>
+              <a:rPr lang="en-US" sz="1400" dirty="0">
+                <a:solidFill>
+                  <a:schemeClr val="tx1"/>
+                </a:solidFill>
+              </a:rPr>
+              <a:t>Efecto del agua en la vida del rodamiento (hay cifras de segunda mano sin leer)</a:t>
+            </a:r>
+            <a:endParaRPr lang="en-US" sz="1400" dirty="0"/>
+          </a:p>
+          <a:p>
+            <a:pPr marL="342900" indent="-342900">
+              <a:spcAft>
+                <a:spcPts val="400"/>
+              </a:spcAft>
+              <a:buSzPct val="100000"/>
+              <a:buChar char="•"/>
+            </a:pPr>
+            <a:r>
+              <a:rPr lang="en-US" sz="1400" dirty="0">
+                <a:solidFill>
+                  <a:schemeClr val="tx1"/>
+                </a:solidFill>
+              </a:rPr>
+              <a:t>Reparto de modos de falla, MTBF, Weibull y costos de bombas con prensaestopa</a:t>
+            </a:r>
+            <a:endParaRPr lang="en-US" sz="1400" dirty="0"/>
+          </a:p>
+          <a:p>
+            <a:pPr marL="342900" indent="-342900">
+              <a:spcAft>
+                <a:spcPts val="400"/>
+              </a:spcAft>
+              <a:buSzPct val="100000"/>
+              <a:buChar char="•"/>
+            </a:pPr>
+            <a:r>
+              <a:rPr lang="en-US" sz="1400" dirty="0">
+                <a:solidFill>
+                  <a:schemeClr val="tx1"/>
+                </a:solidFill>
+              </a:rPr>
+              <a:t>Datos de bombas con prensaestopa con tiempos hasta la falla</a:t>
+            </a:r>
+            <a:endParaRPr lang="en-US" sz="1400" dirty="0"/>
+          </a:p>
+          <a:p>
+            <a:pPr marL="342900" indent="-342900">
+              <a:spcAft>
+                <a:spcPts val="400"/>
+              </a:spcAft>
+              <a:buSzPct val="100000"/>
+              <a:buChar char="•"/>
+            </a:pPr>
+            <a:r>
+              <a:rPr lang="en-US" sz="1400" dirty="0">
+                <a:solidFill>
+                  <a:schemeClr val="tx1"/>
+                </a:solidFill>
+              </a:rPr>
+              <a:t>Citas y cuartiles de las fuentes</a:t>
+            </a:r>
+            <a:endParaRPr lang="en-US" sz="1400" dirty="0"/>
+          </a:p>
+          <a:p>
+            <a:pPr marL="342900" indent="-342900">
+              <a:spcAft>
+                <a:spcPts val="400"/>
+              </a:spcAft>
+              <a:buSzPct val="100000"/>
+              <a:buChar char="•"/>
+            </a:pPr>
+            <a:r>
+              <a:rPr lang="en-US" sz="1400" dirty="0">
+                <a:solidFill>
+                  <a:schemeClr val="tx1"/>
+                </a:solidFill>
+              </a:rPr>
+              <a:t>Verificación oficial de las 62 normas</a:t>
+            </a:r>
+            <a:endParaRPr lang="en-US" sz="1400" dirty="0"/>
+          </a:p>
+        </p:txBody>
+      </p:sp>
+      <p:sp>
+        <p:nvSpPr>
+          <p:cNvPr id="10" name="tarjeta Qué recomendamos"/>
+          <p:cNvSpPr/>
+          <p:nvPr/>
+        </p:nvSpPr>
+        <p:spPr>
+          <a:xfrm>
+            <a:off x="8138160" y="1280160"/>
+            <a:ext cx="3566160" cy="2743200"/>
+          </a:xfrm>
+          <a:prstGeom prst="roundRect">
+            <a:avLst>
+              <a:gd name="adj" fmla="val 2667"/>
+            </a:avLst>
+          </a:prstGeom>
+          <a:solidFill>
+            <a:schemeClr val="bg2"/>
+          </a:solidFill>
+          <a:ln w="12700">
+            <a:solidFill>
+              <a:schemeClr val="accent1"/>
+            </a:solidFill>
+            <a:prstDash val="solid"/>
+          </a:ln>
+        </p:spPr>
+      </p:sp>
+      <p:sp>
+        <p:nvSpPr>
+          <p:cNvPr id="11" name="Text 9"/>
+          <p:cNvSpPr txBox="1"/>
+          <p:nvPr/>
+        </p:nvSpPr>
+        <p:spPr>
+          <a:xfrm>
+            <a:off x="8275320" y="1371600"/>
+            <a:ext cx="3291840" cy="365760"/>
+          </a:xfrm>
+          <a:prstGeom prst="rect">
+            <a:avLst/>
+          </a:prstGeom>
+          <a:noFill/>
+          <a:ln/>
+        </p:spPr>
+        <p:txBody>
+          <a:bodyPr wrap="square" lIns="0" tIns="0" rIns="0" bIns="0" rtlCol="0" anchor="t"/>
+          <a:lstStyle/>
+          <a:p>
+            <a:pPr indent="0" marL="0">
+              <a:buNone/>
+            </a:pPr>
+            <a:r>
+              <a:rPr lang="en-US" sz="1500" b="1" dirty="0">
+                <a:solidFill>
+                  <a:schemeClr val="tx1"/>
+                </a:solidFill>
+              </a:rPr>
+              <a:t>Qué recomendamos</a:t>
+            </a:r>
+            <a:endParaRPr lang="en-US" sz="1500" dirty="0"/>
+          </a:p>
+        </p:txBody>
+      </p:sp>
+      <p:sp>
+        <p:nvSpPr>
+          <p:cNvPr id="12" name="Text 10"/>
+          <p:cNvSpPr txBox="1"/>
+          <p:nvPr/>
+        </p:nvSpPr>
+        <p:spPr>
+          <a:xfrm>
+            <a:off x="8275320" y="1783080"/>
+            <a:ext cx="3291840" cy="2148840"/>
+          </a:xfrm>
+          <a:prstGeom prst="rect">
+            <a:avLst/>
+          </a:prstGeom>
+          <a:noFill/>
+          <a:ln/>
+        </p:spPr>
+        <p:txBody>
+          <a:bodyPr wrap="square" lIns="0" tIns="0" rIns="0" bIns="0" rtlCol="0" anchor="t"/>
+          <a:lstStyle/>
+          <a:p>
+            <a:pPr marL="342900" indent="-342900">
+              <a:spcAft>
+                <a:spcPts val="400"/>
+              </a:spcAft>
+              <a:buSzPct val="100000"/>
+              <a:buChar char="•"/>
+            </a:pPr>
+            <a:r>
+              <a:rPr lang="en-US" sz="1300" dirty="0">
+                <a:solidFill>
+                  <a:schemeClr val="tx1"/>
+                </a:solidFill>
+              </a:rPr>
+              <a:t>Abrir las pistas prioritarias con acceso a las fuentes</a:t>
+            </a:r>
+            <a:endParaRPr lang="en-US" sz="1300" dirty="0"/>
+          </a:p>
+          <a:p>
+            <a:pPr marL="342900" indent="-342900">
+              <a:spcAft>
+                <a:spcPts val="400"/>
+              </a:spcAft>
+              <a:buSzPct val="100000"/>
+              <a:buChar char="•"/>
+            </a:pPr>
+            <a:r>
+              <a:rPr lang="en-US" sz="1300" dirty="0">
+                <a:solidFill>
+                  <a:schemeClr val="tx1"/>
+                </a:solidFill>
+              </a:rPr>
+              <a:t>Reunir el historial de fallas con fechas</a:t>
+            </a:r>
+            <a:endParaRPr lang="en-US" sz="1300" dirty="0"/>
+          </a:p>
+          <a:p>
+            <a:pPr marL="342900" indent="-342900">
+              <a:spcAft>
+                <a:spcPts val="400"/>
+              </a:spcAft>
+              <a:buSzPct val="100000"/>
+              <a:buChar char="•"/>
+            </a:pPr>
+            <a:r>
+              <a:rPr lang="en-US" sz="1300" dirty="0">
+                <a:solidFill>
+                  <a:schemeClr val="tx1"/>
+                </a:solidFill>
+              </a:rPr>
+              <a:t>Línea base por activo antes de cualquier modelo</a:t>
+            </a:r>
+            <a:endParaRPr lang="en-US" sz="1300" dirty="0"/>
+          </a:p>
+        </p:txBody>
+      </p:sp>
+      <p:sp>
+        <p:nvSpPr>
+          <p:cNvPr id="13" name="kpi 72"/>
+          <p:cNvSpPr/>
+          <p:nvPr/>
+        </p:nvSpPr>
+        <p:spPr>
+          <a:xfrm>
+            <a:off x="8138160" y="4160520"/>
+            <a:ext cx="1691640" cy="1051560"/>
+          </a:xfrm>
+          <a:prstGeom prst="roundRect">
+            <a:avLst>
+              <a:gd name="adj" fmla="val 6957"/>
+            </a:avLst>
+          </a:prstGeom>
+          <a:solidFill>
+            <a:schemeClr val="bg2"/>
+          </a:solidFill>
+          <a:ln w="12700">
+            <a:solidFill>
+              <a:schemeClr val="accent1"/>
+            </a:solidFill>
+            <a:prstDash val="solid"/>
+          </a:ln>
+        </p:spPr>
+      </p:sp>
+      <p:sp>
+        <p:nvSpPr>
+          <p:cNvPr id="14" name="Text 12"/>
+          <p:cNvSpPr txBox="1"/>
+          <p:nvPr/>
+        </p:nvSpPr>
+        <p:spPr>
+          <a:xfrm>
+            <a:off x="8229600" y="4206240"/>
+            <a:ext cx="1508760" cy="548640"/>
+          </a:xfrm>
+          <a:prstGeom prst="rect">
+            <a:avLst/>
+          </a:prstGeom>
+          <a:noFill/>
+          <a:ln/>
+        </p:spPr>
+        <p:txBody>
+          <a:bodyPr wrap="square" lIns="0" tIns="0" rIns="0" bIns="0" rtlCol="0" anchor="ctr"/>
+          <a:lstStyle/>
+          <a:p>
+            <a:pPr algn="l" indent="0" marL="0">
+              <a:buNone/>
+            </a:pPr>
+            <a:r>
+              <a:rPr lang="en-US" sz="3000" b="1" dirty="0">
+                <a:solidFill>
+                  <a:schemeClr val="accent1"/>
+                </a:solidFill>
+                <a:latin typeface="Cambria" pitchFamily="34" charset="0"/>
+                <a:ea typeface="Cambria" pitchFamily="34" charset="-122"/>
+                <a:cs typeface="Cambria" pitchFamily="34" charset="-120"/>
+              </a:rPr>
+              <a:t>72</a:t>
+            </a:r>
+            <a:endParaRPr lang="en-US" sz="3000" dirty="0"/>
+          </a:p>
+        </p:txBody>
+      </p:sp>
+      <p:sp>
+        <p:nvSpPr>
+          <p:cNvPr id="15" name="Text 13"/>
+          <p:cNvSpPr txBox="1"/>
+          <p:nvPr/>
+        </p:nvSpPr>
+        <p:spPr>
+          <a:xfrm>
+            <a:off x="8229600" y="4754880"/>
+            <a:ext cx="1508760" cy="438912"/>
+          </a:xfrm>
+          <a:prstGeom prst="rect">
+            <a:avLst/>
+          </a:prstGeom>
+          <a:noFill/>
+          <a:ln/>
+        </p:spPr>
+        <p:txBody>
+          <a:bodyPr wrap="square" lIns="0" tIns="0" rIns="0" bIns="0" rtlCol="0" anchor="t"/>
+          <a:lstStyle/>
+          <a:p>
+            <a:pPr indent="0" marL="0">
               <a:buNone/>
             </a:pPr>
             <a:r>
@@ -12532,15 +15041,100 @@
                   <a:schemeClr val="tx1"/>
                 </a:solidFill>
               </a:rPr>
-              <a:t>Lillelund, C. M., Pannullo, F., Jakobsen, M. O., Morante, M., &amp; Pedersen, C. F. (2024). RULSurv: A probabilistic survival-based method for early censoring-aware prediction of remaining useful life in ball bearings. arXiv. https://arxiv.org/abs/2405.01614</a:t>
+              <a:t>documentos leídos de 351</a:t>
             </a:r>
             <a:endParaRPr lang="en-US" sz="1100" dirty="0"/>
           </a:p>
+        </p:txBody>
+      </p:sp>
+      <p:sp>
+        <p:nvSpPr>
+          <p:cNvPr id="16" name="kpi 62"/>
+          <p:cNvSpPr/>
+          <p:nvPr/>
+        </p:nvSpPr>
+        <p:spPr>
+          <a:xfrm>
+            <a:off x="10012680" y="4160520"/>
+            <a:ext cx="1691640" cy="1051560"/>
+          </a:xfrm>
+          <a:prstGeom prst="roundRect">
+            <a:avLst>
+              <a:gd name="adj" fmla="val 6957"/>
+            </a:avLst>
+          </a:prstGeom>
+          <a:solidFill>
+            <a:schemeClr val="bg2"/>
+          </a:solidFill>
+          <a:ln w="12700">
+            <a:solidFill>
+              <a:schemeClr val="accent2"/>
+            </a:solidFill>
+            <a:prstDash val="solid"/>
+          </a:ln>
+        </p:spPr>
+      </p:sp>
+      <p:sp>
+        <p:nvSpPr>
+          <p:cNvPr id="17" name="Text 15"/>
+          <p:cNvSpPr txBox="1"/>
+          <p:nvPr/>
+        </p:nvSpPr>
+        <p:spPr>
+          <a:xfrm>
+            <a:off x="10104120" y="4206240"/>
+            <a:ext cx="1508760" cy="548640"/>
+          </a:xfrm>
+          <a:prstGeom prst="rect">
+            <a:avLst/>
+          </a:prstGeom>
+          <a:noFill/>
+          <a:ln/>
+        </p:spPr>
+        <p:txBody>
+          <a:bodyPr wrap="square" lIns="0" tIns="0" rIns="0" bIns="0" rtlCol="0" anchor="ctr"/>
+          <a:lstStyle/>
+          <a:p>
+            <a:pPr algn="l" indent="0" marL="0">
+              <a:buNone/>
+            </a:pPr>
+            <a:r>
+              <a:rPr lang="en-US" sz="3000" b="1" dirty="0">
+                <a:solidFill>
+                  <a:schemeClr val="accent2"/>
+                </a:solidFill>
+                <a:latin typeface="Cambria" pitchFamily="34" charset="0"/>
+                <a:ea typeface="Cambria" pitchFamily="34" charset="-122"/>
+                <a:cs typeface="Cambria" pitchFamily="34" charset="-120"/>
+              </a:rPr>
+              <a:t>62</a:t>
+            </a:r>
+            <a:endParaRPr lang="en-US" sz="3000" dirty="0"/>
+          </a:p>
+        </p:txBody>
+      </p:sp>
+      <p:sp>
+        <p:nvSpPr>
+          <p:cNvPr id="18" name="Text 16"/>
+          <p:cNvSpPr txBox="1"/>
+          <p:nvPr/>
+        </p:nvSpPr>
+        <p:spPr>
+          <a:xfrm>
+            <a:off x="10104120" y="4754880"/>
+            <a:ext cx="1508760" cy="438912"/>
+          </a:xfrm>
+          <a:prstGeom prst="rect">
+            <a:avLst/>
+          </a:prstGeom>
+          <a:noFill/>
+          <a:ln/>
+        </p:spPr>
+        <p:txBody>
+          <a:bodyPr wrap="square" lIns="0" tIns="0" rIns="0" bIns="0" rtlCol="0" anchor="t"/>
+          <a:lstStyle/>
           <a:p>
             <a:pPr indent="0" marL="0">
-              <a:spcAft>
-                <a:spcPts val="800"/>
-              </a:spcAft>
               <a:buNone/>
             </a:pPr>
             <a:r>
@@ -12549,15 +15143,100 @@
                   <a:schemeClr val="tx1"/>
                 </a:solidFill>
               </a:rPr>
-              <a:t>Jayaswal, P., Wadhwani, A. K., Mulchandani, K. B., &amp; Kaneko, Y. (2008). Machine Fault Signature Analysis. International Journal of Rotating Machinery, 2008(1). https://doi.org/10.1155/2008/583982</a:t>
+              <a:t>normas en resúmenes de buscador</a:t>
             </a:r>
             <a:endParaRPr lang="en-US" sz="1100" dirty="0"/>
           </a:p>
+        </p:txBody>
+      </p:sp>
+      <p:sp>
+        <p:nvSpPr>
+          <p:cNvPr id="19" name="kpi 0"/>
+          <p:cNvSpPr/>
+          <p:nvPr/>
+        </p:nvSpPr>
+        <p:spPr>
+          <a:xfrm>
+            <a:off x="8138160" y="5303520"/>
+            <a:ext cx="1691640" cy="1051560"/>
+          </a:xfrm>
+          <a:prstGeom prst="roundRect">
+            <a:avLst>
+              <a:gd name="adj" fmla="val 6957"/>
+            </a:avLst>
+          </a:prstGeom>
+          <a:solidFill>
+            <a:schemeClr val="bg2"/>
+          </a:solidFill>
+          <a:ln w="12700">
+            <a:solidFill>
+              <a:schemeClr val="accent3"/>
+            </a:solidFill>
+            <a:prstDash val="solid"/>
+          </a:ln>
+        </p:spPr>
+      </p:sp>
+      <p:sp>
+        <p:nvSpPr>
+          <p:cNvPr id="20" name="Text 18"/>
+          <p:cNvSpPr txBox="1"/>
+          <p:nvPr/>
+        </p:nvSpPr>
+        <p:spPr>
+          <a:xfrm>
+            <a:off x="8229600" y="5349240"/>
+            <a:ext cx="1508760" cy="548640"/>
+          </a:xfrm>
+          <a:prstGeom prst="rect">
+            <a:avLst/>
+          </a:prstGeom>
+          <a:noFill/>
+          <a:ln/>
+        </p:spPr>
+        <p:txBody>
+          <a:bodyPr wrap="square" lIns="0" tIns="0" rIns="0" bIns="0" rtlCol="0" anchor="ctr"/>
+          <a:lstStyle/>
+          <a:p>
+            <a:pPr algn="l" indent="0" marL="0">
+              <a:buNone/>
+            </a:pPr>
+            <a:r>
+              <a:rPr lang="en-US" sz="3000" b="1" dirty="0">
+                <a:solidFill>
+                  <a:schemeClr val="accent3"/>
+                </a:solidFill>
+                <a:latin typeface="Cambria" pitchFamily="34" charset="0"/>
+                <a:ea typeface="Cambria" pitchFamily="34" charset="-122"/>
+                <a:cs typeface="Cambria" pitchFamily="34" charset="-120"/>
+              </a:rPr>
+              <a:t>0</a:t>
+            </a:r>
+            <a:endParaRPr lang="en-US" sz="3000" dirty="0"/>
+          </a:p>
+        </p:txBody>
+      </p:sp>
+      <p:sp>
+        <p:nvSpPr>
+          <p:cNvPr id="21" name="Text 19"/>
+          <p:cNvSpPr txBox="1"/>
+          <p:nvPr/>
+        </p:nvSpPr>
+        <p:spPr>
+          <a:xfrm>
+            <a:off x="8229600" y="5897880"/>
+            <a:ext cx="1508760" cy="438912"/>
+          </a:xfrm>
+          <a:prstGeom prst="rect">
+            <a:avLst/>
+          </a:prstGeom>
+          <a:noFill/>
+          <a:ln/>
+        </p:spPr>
+        <p:txBody>
+          <a:bodyPr wrap="square" lIns="0" tIns="0" rIns="0" bIns="0" rtlCol="0" anchor="t"/>
+          <a:lstStyle/>
           <a:p>
             <a:pPr indent="0" marL="0">
-              <a:spcAft>
-                <a:spcPts val="800"/>
-              </a:spcAft>
               <a:buNone/>
             </a:pPr>
             <a:r>
@@ -12566,15 +15245,100 @@
                   <a:schemeClr val="tx1"/>
                 </a:solidFill>
               </a:rPr>
-              <a:t>Burda, E. A., Zusman, G. V., Kudryavtseva, I. S., Naumenko, A. P., &amp; Nicoletti, R. (2022). An Overview of Vibration Analysis Techniques for the Fault Diagnostics of Rolling Bearings in Machinery. Shock and Vibration, 2022(1). https://doi.org/10.1155/2022/6136231</a:t>
+              <a:t>fuentes leídas de prensaestopa o empaquetadura</a:t>
             </a:r>
             <a:endParaRPr lang="en-US" sz="1100" dirty="0"/>
           </a:p>
+        </p:txBody>
+      </p:sp>
+      <p:sp>
+        <p:nvSpPr>
+          <p:cNvPr id="22" name="kpi 14"/>
+          <p:cNvSpPr/>
+          <p:nvPr/>
+        </p:nvSpPr>
+        <p:spPr>
+          <a:xfrm>
+            <a:off x="10012680" y="5303520"/>
+            <a:ext cx="1691640" cy="1051560"/>
+          </a:xfrm>
+          <a:prstGeom prst="roundRect">
+            <a:avLst>
+              <a:gd name="adj" fmla="val 6957"/>
+            </a:avLst>
+          </a:prstGeom>
+          <a:solidFill>
+            <a:schemeClr val="bg2"/>
+          </a:solidFill>
+          <a:ln w="12700">
+            <a:solidFill>
+              <a:schemeClr val="accent4"/>
+            </a:solidFill>
+            <a:prstDash val="solid"/>
+          </a:ln>
+        </p:spPr>
+      </p:sp>
+      <p:sp>
+        <p:nvSpPr>
+          <p:cNvPr id="23" name="Text 21"/>
+          <p:cNvSpPr txBox="1"/>
+          <p:nvPr/>
+        </p:nvSpPr>
+        <p:spPr>
+          <a:xfrm>
+            <a:off x="10104120" y="5349240"/>
+            <a:ext cx="1508760" cy="548640"/>
+          </a:xfrm>
+          <a:prstGeom prst="rect">
+            <a:avLst/>
+          </a:prstGeom>
+          <a:noFill/>
+          <a:ln/>
+        </p:spPr>
+        <p:txBody>
+          <a:bodyPr wrap="square" lIns="0" tIns="0" rIns="0" bIns="0" rtlCol="0" anchor="ctr"/>
+          <a:lstStyle/>
+          <a:p>
+            <a:pPr algn="l" indent="0" marL="0">
+              <a:buNone/>
+            </a:pPr>
+            <a:r>
+              <a:rPr lang="en-US" sz="3000" b="1" dirty="0">
+                <a:solidFill>
+                  <a:schemeClr val="accent4"/>
+                </a:solidFill>
+                <a:latin typeface="Cambria" pitchFamily="34" charset="0"/>
+                <a:ea typeface="Cambria" pitchFamily="34" charset="-122"/>
+                <a:cs typeface="Cambria" pitchFamily="34" charset="-120"/>
+              </a:rPr>
+              <a:t>14</a:t>
+            </a:r>
+            <a:endParaRPr lang="en-US" sz="3000" dirty="0"/>
+          </a:p>
+        </p:txBody>
+      </p:sp>
+      <p:sp>
+        <p:nvSpPr>
+          <p:cNvPr id="24" name="Text 22"/>
+          <p:cNvSpPr txBox="1"/>
+          <p:nvPr/>
+        </p:nvSpPr>
+        <p:spPr>
+          <a:xfrm>
+            <a:off x="10104120" y="5897880"/>
+            <a:ext cx="1508760" cy="438912"/>
+          </a:xfrm>
+          <a:prstGeom prst="rect">
+            <a:avLst/>
+          </a:prstGeom>
+          <a:noFill/>
+          <a:ln/>
+        </p:spPr>
+        <p:txBody>
+          <a:bodyPr wrap="square" lIns="0" tIns="0" rIns="0" bIns="0" rtlCol="0" anchor="t"/>
+          <a:lstStyle/>
           <a:p>
             <a:pPr indent="0" marL="0">
-              <a:spcAft>
-                <a:spcPts val="800"/>
-              </a:spcAft>
               <a:buNone/>
             </a:pPr>
             <a:r>
@@ -12583,24 +15347,7 @@
                   <a:schemeClr val="tx1"/>
                 </a:solidFill>
               </a:rPr>
-              <a:t>Purohit, H., Tanabe, R., Ichige, K., Endo, T., Nikaido, Y., Suefusa, K., &amp; Kawaguchi, Y. (2019). MIMII Dataset: Sound Dataset for Malfunctioning Industrial Machine Investigation and Inspection. arXiv:1909.09347; datos en Zenodo record 3384388 segun el resumen. https://arxiv.org/abs/1909.09347</a:t>
-            </a:r>
-            <a:endParaRPr lang="en-US" sz="1100" dirty="0"/>
-          </a:p>
-          <a:p>
-            <a:pPr indent="0" marL="0">
-              <a:spcAft>
-                <a:spcPts val="800"/>
-              </a:spcAft>
-              <a:buNone/>
-            </a:pPr>
-            <a:r>
-              <a:rPr lang="en-US" sz="1100" dirty="0">
-                <a:solidFill>
-                  <a:schemeClr val="tx1"/>
-                </a:solidFill>
-              </a:rPr>
-              <a:t>Lillelund, C. M., Pannullo, F., Jakobsen, M. O., Morante, M., &amp; Pedersen, C. F. (2025). RULSurv: A probabilistic survival-based method for early censoring-aware prediction of remaining useful life in ball bearings. arXiv 2405.01614 (version publicada: Expert Systems with Applications, segun la cabecera del preprint). https://arxiv.org/abs/2405.01614</a:t>
+              <a:t>hipótesis, todas posibles</a:t>
             </a:r>
             <a:endParaRPr lang="en-US" sz="1100" dirty="0"/>
           </a:p>
@@ -12645,7 +15392,7 @@
             <a:pPr algn="l"/>
             <a:fld id="{F7021451-1387-4CA6-816F-3879F97B5CBC}" type="slidenum">
               <a:rPr b="0" lang="en-US"/>
-              <a:t>18</a:t>
+              <a:t>2</a:t>
             </a:fld>
             <a:endParaRPr lang="en-US"/>
           </a:p>
@@ -12659,9 +15406,9 @@
 </p:sld>
 </file>
 
-<file path=ppt/slides/slide2.xml><?xml version="1.0" encoding="utf-8"?>
+<file path=ppt/slides/slide20.xml><?xml version="1.0" encoding="utf-8"?>
 <p:sld xmlns:a="http://schemas.openxmlformats.org/drawingml/2006/main" xmlns:r="http://schemas.openxmlformats.org/officeDocument/2006/relationships" xmlns:p="http://schemas.openxmlformats.org/presentationml/2006/main">
-  <p:cSld name="Slide 2">
+  <p:cSld name="Slide 20">
     <p:spTree>
       <p:nvGrpSpPr>
         <p:cNvPr id="1" name=""/>
@@ -12709,7 +15456,7 @@
                 <a:ea typeface="Cambria" pitchFamily="34" charset="-122"/>
                 <a:cs typeface="Cambria" pitchFamily="34" charset="-120"/>
               </a:rPr>
-              <a:t>Ninguna fuente de prensaestopa se pudo leer: solo los rodamientos tienen respaldo y el vínculo con la empaquetadura queda SIN DATOS PARA ARMARLO</a:t>
+              <a:t>Referencias principales en APA 7 (2 de 2)</a:t>
             </a:r>
             <a:endParaRPr lang="en-US" sz="2400" dirty="0"/>
           </a:p>
@@ -12745,7 +15492,7 @@
                   <a:schemeClr val="tx2"/>
                 </a:solidFill>
               </a:rPr>
-              <a:t>Fuente: Dossier del caso; registro de evidencia con 431 entradas</a:t>
+              <a:t>Fuente: Registro de evidencia del caso; enlaces completos en la pestaña Referencias del informe</a:t>
             </a:r>
             <a:endParaRPr lang="en-US" sz="1000" dirty="0"/>
           </a:p>
@@ -12753,41 +15500,14 @@
       </p:sp>
       <p:sp>
         <p:nvSpPr>
-          <p:cNvPr id="4" name="tarjeta Qué sabemos"/>
-          <p:cNvSpPr/>
+          <p:cNvPr id="4" name="Text 2"/>
+          <p:cNvSpPr txBox="1"/>
           <p:nvPr/>
         </p:nvSpPr>
         <p:spPr>
           <a:xfrm>
-            <a:off x="457200" y="1280160"/>
-            <a:ext cx="3657600" cy="4754880"/>
-          </a:xfrm>
-          <a:prstGeom prst="roundRect">
-            <a:avLst>
-              <a:gd name="adj" fmla="val 2000"/>
-            </a:avLst>
-          </a:prstGeom>
-          <a:solidFill>
-            <a:schemeClr val="bg2"/>
-          </a:solidFill>
-          <a:ln w="12700">
-            <a:solidFill>
-              <a:schemeClr val="accent2"/>
-            </a:solidFill>
-            <a:prstDash val="solid"/>
-          </a:ln>
-        </p:spPr>
-      </p:sp>
-      <p:sp>
-        <p:nvSpPr>
-          <p:cNvPr id="5" name="Text 3"/>
-          <p:cNvSpPr txBox="1"/>
-          <p:nvPr/>
-        </p:nvSpPr>
-        <p:spPr>
-          <a:xfrm>
-            <a:off x="594360" y="1371600"/>
-            <a:ext cx="3383280" cy="365760"/>
+            <a:off x="457200" y="1188720"/>
+            <a:ext cx="11247120" cy="4846320"/>
           </a:xfrm>
           <a:prstGeom prst="rect">
             <a:avLst/>
@@ -12800,516 +15520,9 @@
           <a:lstStyle/>
           <a:p>
             <a:pPr indent="0" marL="0">
-              <a:buNone/>
-            </a:pPr>
-            <a:r>
-              <a:rPr lang="en-US" sz="1500" b="1" dirty="0">
-                <a:solidFill>
-                  <a:schemeClr val="tx1"/>
-                </a:solidFill>
-              </a:rPr>
-              <a:t>Qué sabemos</a:t>
-            </a:r>
-            <a:endParaRPr lang="en-US" sz="1500" dirty="0"/>
-          </a:p>
-        </p:txBody>
-      </p:sp>
-      <p:sp>
-        <p:nvSpPr>
-          <p:cNvPr id="6" name="Text 4"/>
-          <p:cNvSpPr txBox="1"/>
-          <p:nvPr/>
-        </p:nvSpPr>
-        <p:spPr>
-          <a:xfrm>
-            <a:off x="594360" y="1783080"/>
-            <a:ext cx="3383280" cy="4160520"/>
-          </a:xfrm>
-          <a:prstGeom prst="rect">
-            <a:avLst/>
-          </a:prstGeom>
-          <a:noFill/>
-          <a:ln/>
-        </p:spPr>
-        <p:txBody>
-          <a:bodyPr wrap="square" lIns="0" tIns="0" rIns="0" bIns="0" rtlCol="0" anchor="t"/>
-          <a:lstStyle/>
-          <a:p>
-            <a:pPr marL="342900" indent="-342900">
               <a:spcAft>
-                <a:spcPts val="400"/>
+                <a:spcPts val="800"/>
               </a:spcAft>
-              <a:buSzPct val="100000"/>
-              <a:buChar char="•"/>
-            </a:pPr>
-            <a:r>
-              <a:rPr lang="en-US" sz="1400" dirty="0">
-                <a:solidFill>
-                  <a:schemeClr val="tx1"/>
-                </a:solidFill>
-              </a:rPr>
-              <a:t>Los rodamientos de bombas se citan entre los componentes más propensos a fallar, por contaminación, mala lubricación y montaje inadecuado</a:t>
-            </a:r>
-            <a:endParaRPr lang="en-US" sz="1400" dirty="0"/>
-          </a:p>
-          <a:p>
-            <a:pPr marL="342900" indent="-342900">
-              <a:spcAft>
-                <a:spcPts val="400"/>
-              </a:spcAft>
-              <a:buSzPct val="100000"/>
-              <a:buChar char="•"/>
-            </a:pPr>
-            <a:r>
-              <a:rPr lang="en-US" sz="1400" dirty="0">
-                <a:solidFill>
-                  <a:schemeClr val="tx1"/>
-                </a:solidFill>
-              </a:rPr>
-              <a:t>Un resumen de 1988 atribuye el 90 % de las fallas prematuras de rodamientos de bolas de bombas a cuatro causas (no es estadística)</a:t>
-            </a:r>
-            <a:endParaRPr lang="en-US" sz="1400" dirty="0"/>
-          </a:p>
-          <a:p>
-            <a:pPr marL="342900" indent="-342900">
-              <a:spcAft>
-                <a:spcPts val="400"/>
-              </a:spcAft>
-              <a:buSzPct val="100000"/>
-              <a:buChar char="•"/>
-            </a:pPr>
-            <a:r>
-              <a:rPr lang="en-US" sz="1400" dirty="0">
-                <a:solidFill>
-                  <a:schemeClr val="tx1"/>
-                </a:solidFill>
-              </a:rPr>
-              <a:t>El defecto progresa en 4 etapas espectrales; la kurtosis no es monótona</a:t>
-            </a:r>
-            <a:endParaRPr lang="en-US" sz="1400" dirty="0"/>
-          </a:p>
-        </p:txBody>
-      </p:sp>
-      <p:sp>
-        <p:nvSpPr>
-          <p:cNvPr id="7" name="tarjeta Qué no sabemos"/>
-          <p:cNvSpPr/>
-          <p:nvPr/>
-        </p:nvSpPr>
-        <p:spPr>
-          <a:xfrm>
-            <a:off x="4297680" y="1280160"/>
-            <a:ext cx="3657600" cy="4754880"/>
-          </a:xfrm>
-          <a:prstGeom prst="roundRect">
-            <a:avLst>
-              <a:gd name="adj" fmla="val 2000"/>
-            </a:avLst>
-          </a:prstGeom>
-          <a:solidFill>
-            <a:schemeClr val="bg2"/>
-          </a:solidFill>
-          <a:ln w="12700">
-            <a:solidFill>
-              <a:schemeClr val="accent3"/>
-            </a:solidFill>
-            <a:prstDash val="solid"/>
-          </a:ln>
-        </p:spPr>
-      </p:sp>
-      <p:sp>
-        <p:nvSpPr>
-          <p:cNvPr id="8" name="Text 6"/>
-          <p:cNvSpPr txBox="1"/>
-          <p:nvPr/>
-        </p:nvSpPr>
-        <p:spPr>
-          <a:xfrm>
-            <a:off x="4434840" y="1371600"/>
-            <a:ext cx="3383280" cy="365760"/>
-          </a:xfrm>
-          <a:prstGeom prst="rect">
-            <a:avLst/>
-          </a:prstGeom>
-          <a:noFill/>
-          <a:ln/>
-        </p:spPr>
-        <p:txBody>
-          <a:bodyPr wrap="square" lIns="0" tIns="0" rIns="0" bIns="0" rtlCol="0" anchor="t"/>
-          <a:lstStyle/>
-          <a:p>
-            <a:pPr indent="0" marL="0">
-              <a:buNone/>
-            </a:pPr>
-            <a:r>
-              <a:rPr lang="en-US" sz="1500" b="1" dirty="0">
-                <a:solidFill>
-                  <a:schemeClr val="tx1"/>
-                </a:solidFill>
-              </a:rPr>
-              <a:t>Qué no sabemos</a:t>
-            </a:r>
-            <a:endParaRPr lang="en-US" sz="1500" dirty="0"/>
-          </a:p>
-        </p:txBody>
-      </p:sp>
-      <p:sp>
-        <p:nvSpPr>
-          <p:cNvPr id="9" name="Text 7"/>
-          <p:cNvSpPr txBox="1"/>
-          <p:nvPr/>
-        </p:nvSpPr>
-        <p:spPr>
-          <a:xfrm>
-            <a:off x="4434840" y="1783080"/>
-            <a:ext cx="3383280" cy="4160520"/>
-          </a:xfrm>
-          <a:prstGeom prst="rect">
-            <a:avLst/>
-          </a:prstGeom>
-          <a:noFill/>
-          <a:ln/>
-        </p:spPr>
-        <p:txBody>
-          <a:bodyPr wrap="square" lIns="0" tIns="0" rIns="0" bIns="0" rtlCol="0" anchor="t"/>
-          <a:lstStyle/>
-          <a:p>
-            <a:pPr marL="342900" indent="-342900">
-              <a:spcAft>
-                <a:spcPts val="400"/>
-              </a:spcAft>
-              <a:buSzPct val="100000"/>
-              <a:buChar char="•"/>
-            </a:pPr>
-            <a:r>
-              <a:rPr lang="en-US" sz="1400" dirty="0">
-                <a:solidFill>
-                  <a:schemeClr val="tx1"/>
-                </a:solidFill>
-              </a:rPr>
-              <a:t>Si la fuga o el ajuste de la empaquetadura dañan el rodamiento, y cuánto</a:t>
-            </a:r>
-            <a:endParaRPr lang="en-US" sz="1400" dirty="0"/>
-          </a:p>
-          <a:p>
-            <a:pPr marL="342900" indent="-342900">
-              <a:spcAft>
-                <a:spcPts val="400"/>
-              </a:spcAft>
-              <a:buSzPct val="100000"/>
-              <a:buChar char="•"/>
-            </a:pPr>
-            <a:r>
-              <a:rPr lang="en-US" sz="1400" dirty="0">
-                <a:solidFill>
-                  <a:schemeClr val="tx1"/>
-                </a:solidFill>
-              </a:rPr>
-              <a:t>Efecto del agua en la vida del rodamiento (hay cifras de segunda mano sin leer)</a:t>
-            </a:r>
-            <a:endParaRPr lang="en-US" sz="1400" dirty="0"/>
-          </a:p>
-          <a:p>
-            <a:pPr marL="342900" indent="-342900">
-              <a:spcAft>
-                <a:spcPts val="400"/>
-              </a:spcAft>
-              <a:buSzPct val="100000"/>
-              <a:buChar char="•"/>
-            </a:pPr>
-            <a:r>
-              <a:rPr lang="en-US" sz="1400" dirty="0">
-                <a:solidFill>
-                  <a:schemeClr val="tx1"/>
-                </a:solidFill>
-              </a:rPr>
-              <a:t>Reparto de modos de falla, MTBF, Weibull y costos de bombas con prensaestopa</a:t>
-            </a:r>
-            <a:endParaRPr lang="en-US" sz="1400" dirty="0"/>
-          </a:p>
-          <a:p>
-            <a:pPr marL="342900" indent="-342900">
-              <a:spcAft>
-                <a:spcPts val="400"/>
-              </a:spcAft>
-              <a:buSzPct val="100000"/>
-              <a:buChar char="•"/>
-            </a:pPr>
-            <a:r>
-              <a:rPr lang="en-US" sz="1400" dirty="0">
-                <a:solidFill>
-                  <a:schemeClr val="tx1"/>
-                </a:solidFill>
-              </a:rPr>
-              <a:t>Datos de bombas con prensaestopa con tiempos hasta la falla</a:t>
-            </a:r>
-            <a:endParaRPr lang="en-US" sz="1400" dirty="0"/>
-          </a:p>
-          <a:p>
-            <a:pPr marL="342900" indent="-342900">
-              <a:spcAft>
-                <a:spcPts val="400"/>
-              </a:spcAft>
-              <a:buSzPct val="100000"/>
-              <a:buChar char="•"/>
-            </a:pPr>
-            <a:r>
-              <a:rPr lang="en-US" sz="1400" dirty="0">
-                <a:solidFill>
-                  <a:schemeClr val="tx1"/>
-                </a:solidFill>
-              </a:rPr>
-              <a:t>Citas y cuartiles de las fuentes</a:t>
-            </a:r>
-            <a:endParaRPr lang="en-US" sz="1400" dirty="0"/>
-          </a:p>
-          <a:p>
-            <a:pPr marL="342900" indent="-342900">
-              <a:spcAft>
-                <a:spcPts val="400"/>
-              </a:spcAft>
-              <a:buSzPct val="100000"/>
-              <a:buChar char="•"/>
-            </a:pPr>
-            <a:r>
-              <a:rPr lang="en-US" sz="1400" dirty="0">
-                <a:solidFill>
-                  <a:schemeClr val="tx1"/>
-                </a:solidFill>
-              </a:rPr>
-              <a:t>Verificación oficial de las 62 normas</a:t>
-            </a:r>
-            <a:endParaRPr lang="en-US" sz="1400" dirty="0"/>
-          </a:p>
-        </p:txBody>
-      </p:sp>
-      <p:sp>
-        <p:nvSpPr>
-          <p:cNvPr id="10" name="tarjeta Qué recomendamos"/>
-          <p:cNvSpPr/>
-          <p:nvPr/>
-        </p:nvSpPr>
-        <p:spPr>
-          <a:xfrm>
-            <a:off x="8138160" y="1280160"/>
-            <a:ext cx="3566160" cy="2743200"/>
-          </a:xfrm>
-          <a:prstGeom prst="roundRect">
-            <a:avLst>
-              <a:gd name="adj" fmla="val 2667"/>
-            </a:avLst>
-          </a:prstGeom>
-          <a:solidFill>
-            <a:schemeClr val="bg2"/>
-          </a:solidFill>
-          <a:ln w="12700">
-            <a:solidFill>
-              <a:schemeClr val="accent1"/>
-            </a:solidFill>
-            <a:prstDash val="solid"/>
-          </a:ln>
-        </p:spPr>
-      </p:sp>
-      <p:sp>
-        <p:nvSpPr>
-          <p:cNvPr id="11" name="Text 9"/>
-          <p:cNvSpPr txBox="1"/>
-          <p:nvPr/>
-        </p:nvSpPr>
-        <p:spPr>
-          <a:xfrm>
-            <a:off x="8275320" y="1371600"/>
-            <a:ext cx="3291840" cy="365760"/>
-          </a:xfrm>
-          <a:prstGeom prst="rect">
-            <a:avLst/>
-          </a:prstGeom>
-          <a:noFill/>
-          <a:ln/>
-        </p:spPr>
-        <p:txBody>
-          <a:bodyPr wrap="square" lIns="0" tIns="0" rIns="0" bIns="0" rtlCol="0" anchor="t"/>
-          <a:lstStyle/>
-          <a:p>
-            <a:pPr indent="0" marL="0">
-              <a:buNone/>
-            </a:pPr>
-            <a:r>
-              <a:rPr lang="en-US" sz="1500" b="1" dirty="0">
-                <a:solidFill>
-                  <a:schemeClr val="tx1"/>
-                </a:solidFill>
-              </a:rPr>
-              <a:t>Qué recomendamos</a:t>
-            </a:r>
-            <a:endParaRPr lang="en-US" sz="1500" dirty="0"/>
-          </a:p>
-        </p:txBody>
-      </p:sp>
-      <p:sp>
-        <p:nvSpPr>
-          <p:cNvPr id="12" name="Text 10"/>
-          <p:cNvSpPr txBox="1"/>
-          <p:nvPr/>
-        </p:nvSpPr>
-        <p:spPr>
-          <a:xfrm>
-            <a:off x="8275320" y="1783080"/>
-            <a:ext cx="3291840" cy="2148840"/>
-          </a:xfrm>
-          <a:prstGeom prst="rect">
-            <a:avLst/>
-          </a:prstGeom>
-          <a:noFill/>
-          <a:ln/>
-        </p:spPr>
-        <p:txBody>
-          <a:bodyPr wrap="square" lIns="0" tIns="0" rIns="0" bIns="0" rtlCol="0" anchor="t"/>
-          <a:lstStyle/>
-          <a:p>
-            <a:pPr marL="342900" indent="-342900">
-              <a:spcAft>
-                <a:spcPts val="400"/>
-              </a:spcAft>
-              <a:buSzPct val="100000"/>
-              <a:buChar char="•"/>
-            </a:pPr>
-            <a:r>
-              <a:rPr lang="en-US" sz="1300" dirty="0">
-                <a:solidFill>
-                  <a:schemeClr val="tx1"/>
-                </a:solidFill>
-              </a:rPr>
-              <a:t>Abrir las pistas prioritarias con acceso a las fuentes</a:t>
-            </a:r>
-            <a:endParaRPr lang="en-US" sz="1300" dirty="0"/>
-          </a:p>
-          <a:p>
-            <a:pPr marL="342900" indent="-342900">
-              <a:spcAft>
-                <a:spcPts val="400"/>
-              </a:spcAft>
-              <a:buSzPct val="100000"/>
-              <a:buChar char="•"/>
-            </a:pPr>
-            <a:r>
-              <a:rPr lang="en-US" sz="1300" dirty="0">
-                <a:solidFill>
-                  <a:schemeClr val="tx1"/>
-                </a:solidFill>
-              </a:rPr>
-              <a:t>Reunir el historial de fallas con fechas</a:t>
-            </a:r>
-            <a:endParaRPr lang="en-US" sz="1300" dirty="0"/>
-          </a:p>
-          <a:p>
-            <a:pPr marL="342900" indent="-342900">
-              <a:spcAft>
-                <a:spcPts val="400"/>
-              </a:spcAft>
-              <a:buSzPct val="100000"/>
-              <a:buChar char="•"/>
-            </a:pPr>
-            <a:r>
-              <a:rPr lang="en-US" sz="1300" dirty="0">
-                <a:solidFill>
-                  <a:schemeClr val="tx1"/>
-                </a:solidFill>
-              </a:rPr>
-              <a:t>Línea base por activo antes de cualquier modelo</a:t>
-            </a:r>
-            <a:endParaRPr lang="en-US" sz="1300" dirty="0"/>
-          </a:p>
-        </p:txBody>
-      </p:sp>
-      <p:sp>
-        <p:nvSpPr>
-          <p:cNvPr id="13" name="kpi 71"/>
-          <p:cNvSpPr/>
-          <p:nvPr/>
-        </p:nvSpPr>
-        <p:spPr>
-          <a:xfrm>
-            <a:off x="8138160" y="4160520"/>
-            <a:ext cx="1691640" cy="1051560"/>
-          </a:xfrm>
-          <a:prstGeom prst="roundRect">
-            <a:avLst>
-              <a:gd name="adj" fmla="val 6957"/>
-            </a:avLst>
-          </a:prstGeom>
-          <a:solidFill>
-            <a:schemeClr val="bg2"/>
-          </a:solidFill>
-          <a:ln w="12700">
-            <a:solidFill>
-              <a:schemeClr val="accent1"/>
-            </a:solidFill>
-            <a:prstDash val="solid"/>
-          </a:ln>
-        </p:spPr>
-      </p:sp>
-      <p:sp>
-        <p:nvSpPr>
-          <p:cNvPr id="14" name="Text 12"/>
-          <p:cNvSpPr txBox="1"/>
-          <p:nvPr/>
-        </p:nvSpPr>
-        <p:spPr>
-          <a:xfrm>
-            <a:off x="8229600" y="4206240"/>
-            <a:ext cx="1508760" cy="548640"/>
-          </a:xfrm>
-          <a:prstGeom prst="rect">
-            <a:avLst/>
-          </a:prstGeom>
-          <a:noFill/>
-          <a:ln/>
-        </p:spPr>
-        <p:txBody>
-          <a:bodyPr wrap="square" lIns="0" tIns="0" rIns="0" bIns="0" rtlCol="0" anchor="ctr"/>
-          <a:lstStyle/>
-          <a:p>
-            <a:pPr algn="l" indent="0" marL="0">
-              <a:buNone/>
-            </a:pPr>
-            <a:r>
-              <a:rPr lang="en-US" sz="3000" b="1" dirty="0">
-                <a:solidFill>
-                  <a:schemeClr val="accent1"/>
-                </a:solidFill>
-                <a:latin typeface="Cambria" pitchFamily="34" charset="0"/>
-                <a:ea typeface="Cambria" pitchFamily="34" charset="-122"/>
-                <a:cs typeface="Cambria" pitchFamily="34" charset="-120"/>
-              </a:rPr>
-              <a:t>71</a:t>
-            </a:r>
-            <a:endParaRPr lang="en-US" sz="3000" dirty="0"/>
-          </a:p>
-        </p:txBody>
-      </p:sp>
-      <p:sp>
-        <p:nvSpPr>
-          <p:cNvPr id="15" name="Text 13"/>
-          <p:cNvSpPr txBox="1"/>
-          <p:nvPr/>
-        </p:nvSpPr>
-        <p:spPr>
-          <a:xfrm>
-            <a:off x="8229600" y="4754880"/>
-            <a:ext cx="1508760" cy="438912"/>
-          </a:xfrm>
-          <a:prstGeom prst="rect">
-            <a:avLst/>
-          </a:prstGeom>
-          <a:noFill/>
-          <a:ln/>
-        </p:spPr>
-        <p:txBody>
-          <a:bodyPr wrap="square" lIns="0" tIns="0" rIns="0" bIns="0" rtlCol="0" anchor="t"/>
-          <a:lstStyle/>
-          <a:p>
-            <a:pPr indent="0" marL="0">
               <a:buNone/>
             </a:pPr>
             <a:r>
@@ -13318,100 +15531,15 @@
                   <a:schemeClr val="tx1"/>
                 </a:solidFill>
               </a:rPr>
-              <a:t>documentos leídos de 299</a:t>
+              <a:t>Lillelund, C. M., Pannullo, F., Jakobsen, M. O., Morante, M., &amp; Pedersen, C. F. (2024). RULSurv: A probabilistic survival-based method for early censoring-aware prediction of remaining useful life in ball bearings. arXiv. https://arxiv.org/abs/2405.01614</a:t>
             </a:r>
             <a:endParaRPr lang="en-US" sz="1100" dirty="0"/>
           </a:p>
-        </p:txBody>
-      </p:sp>
-      <p:sp>
-        <p:nvSpPr>
-          <p:cNvPr id="16" name="kpi 62"/>
-          <p:cNvSpPr/>
-          <p:nvPr/>
-        </p:nvSpPr>
-        <p:spPr>
-          <a:xfrm>
-            <a:off x="10012680" y="4160520"/>
-            <a:ext cx="1691640" cy="1051560"/>
-          </a:xfrm>
-          <a:prstGeom prst="roundRect">
-            <a:avLst>
-              <a:gd name="adj" fmla="val 6957"/>
-            </a:avLst>
-          </a:prstGeom>
-          <a:solidFill>
-            <a:schemeClr val="bg2"/>
-          </a:solidFill>
-          <a:ln w="12700">
-            <a:solidFill>
-              <a:schemeClr val="accent2"/>
-            </a:solidFill>
-            <a:prstDash val="solid"/>
-          </a:ln>
-        </p:spPr>
-      </p:sp>
-      <p:sp>
-        <p:nvSpPr>
-          <p:cNvPr id="17" name="Text 15"/>
-          <p:cNvSpPr txBox="1"/>
-          <p:nvPr/>
-        </p:nvSpPr>
-        <p:spPr>
-          <a:xfrm>
-            <a:off x="10104120" y="4206240"/>
-            <a:ext cx="1508760" cy="548640"/>
-          </a:xfrm>
-          <a:prstGeom prst="rect">
-            <a:avLst/>
-          </a:prstGeom>
-          <a:noFill/>
-          <a:ln/>
-        </p:spPr>
-        <p:txBody>
-          <a:bodyPr wrap="square" lIns="0" tIns="0" rIns="0" bIns="0" rtlCol="0" anchor="ctr"/>
-          <a:lstStyle/>
-          <a:p>
-            <a:pPr algn="l" indent="0" marL="0">
-              <a:buNone/>
-            </a:pPr>
-            <a:r>
-              <a:rPr lang="en-US" sz="3000" b="1" dirty="0">
-                <a:solidFill>
-                  <a:schemeClr val="accent2"/>
-                </a:solidFill>
-                <a:latin typeface="Cambria" pitchFamily="34" charset="0"/>
-                <a:ea typeface="Cambria" pitchFamily="34" charset="-122"/>
-                <a:cs typeface="Cambria" pitchFamily="34" charset="-120"/>
-              </a:rPr>
-              <a:t>62</a:t>
-            </a:r>
-            <a:endParaRPr lang="en-US" sz="3000" dirty="0"/>
-          </a:p>
-        </p:txBody>
-      </p:sp>
-      <p:sp>
-        <p:nvSpPr>
-          <p:cNvPr id="18" name="Text 16"/>
-          <p:cNvSpPr txBox="1"/>
-          <p:nvPr/>
-        </p:nvSpPr>
-        <p:spPr>
-          <a:xfrm>
-            <a:off x="10104120" y="4754880"/>
-            <a:ext cx="1508760" cy="438912"/>
-          </a:xfrm>
-          <a:prstGeom prst="rect">
-            <a:avLst/>
-          </a:prstGeom>
-          <a:noFill/>
-          <a:ln/>
-        </p:spPr>
-        <p:txBody>
-          <a:bodyPr wrap="square" lIns="0" tIns="0" rIns="0" bIns="0" rtlCol="0" anchor="t"/>
-          <a:lstStyle/>
           <a:p>
             <a:pPr indent="0" marL="0">
+              <a:spcAft>
+                <a:spcPts val="800"/>
+              </a:spcAft>
               <a:buNone/>
             </a:pPr>
             <a:r>
@@ -13420,100 +15548,15 @@
                   <a:schemeClr val="tx1"/>
                 </a:solidFill>
               </a:rPr>
-              <a:t>normas en resúmenes de buscador</a:t>
+              <a:t>Jayaswal, P., Wadhwani, A. K., Mulchandani, K. B., &amp; Kaneko, Y. (2008). Machine Fault Signature Analysis. International Journal of Rotating Machinery, 2008(1). https://doi.org/10.1155/2008/583982</a:t>
             </a:r>
             <a:endParaRPr lang="en-US" sz="1100" dirty="0"/>
           </a:p>
-        </p:txBody>
-      </p:sp>
-      <p:sp>
-        <p:nvSpPr>
-          <p:cNvPr id="19" name="kpi 0"/>
-          <p:cNvSpPr/>
-          <p:nvPr/>
-        </p:nvSpPr>
-        <p:spPr>
-          <a:xfrm>
-            <a:off x="8138160" y="5303520"/>
-            <a:ext cx="1691640" cy="1051560"/>
-          </a:xfrm>
-          <a:prstGeom prst="roundRect">
-            <a:avLst>
-              <a:gd name="adj" fmla="val 6957"/>
-            </a:avLst>
-          </a:prstGeom>
-          <a:solidFill>
-            <a:schemeClr val="bg2"/>
-          </a:solidFill>
-          <a:ln w="12700">
-            <a:solidFill>
-              <a:schemeClr val="accent3"/>
-            </a:solidFill>
-            <a:prstDash val="solid"/>
-          </a:ln>
-        </p:spPr>
-      </p:sp>
-      <p:sp>
-        <p:nvSpPr>
-          <p:cNvPr id="20" name="Text 18"/>
-          <p:cNvSpPr txBox="1"/>
-          <p:nvPr/>
-        </p:nvSpPr>
-        <p:spPr>
-          <a:xfrm>
-            <a:off x="8229600" y="5349240"/>
-            <a:ext cx="1508760" cy="548640"/>
-          </a:xfrm>
-          <a:prstGeom prst="rect">
-            <a:avLst/>
-          </a:prstGeom>
-          <a:noFill/>
-          <a:ln/>
-        </p:spPr>
-        <p:txBody>
-          <a:bodyPr wrap="square" lIns="0" tIns="0" rIns="0" bIns="0" rtlCol="0" anchor="ctr"/>
-          <a:lstStyle/>
-          <a:p>
-            <a:pPr algn="l" indent="0" marL="0">
-              <a:buNone/>
-            </a:pPr>
-            <a:r>
-              <a:rPr lang="en-US" sz="3000" b="1" dirty="0">
-                <a:solidFill>
-                  <a:schemeClr val="accent3"/>
-                </a:solidFill>
-                <a:latin typeface="Cambria" pitchFamily="34" charset="0"/>
-                <a:ea typeface="Cambria" pitchFamily="34" charset="-122"/>
-                <a:cs typeface="Cambria" pitchFamily="34" charset="-120"/>
-              </a:rPr>
-              <a:t>0</a:t>
-            </a:r>
-            <a:endParaRPr lang="en-US" sz="3000" dirty="0"/>
-          </a:p>
-        </p:txBody>
-      </p:sp>
-      <p:sp>
-        <p:nvSpPr>
-          <p:cNvPr id="21" name="Text 19"/>
-          <p:cNvSpPr txBox="1"/>
-          <p:nvPr/>
-        </p:nvSpPr>
-        <p:spPr>
-          <a:xfrm>
-            <a:off x="8229600" y="5897880"/>
-            <a:ext cx="1508760" cy="438912"/>
-          </a:xfrm>
-          <a:prstGeom prst="rect">
-            <a:avLst/>
-          </a:prstGeom>
-          <a:noFill/>
-          <a:ln/>
-        </p:spPr>
-        <p:txBody>
-          <a:bodyPr wrap="square" lIns="0" tIns="0" rIns="0" bIns="0" rtlCol="0" anchor="t"/>
-          <a:lstStyle/>
           <a:p>
             <a:pPr indent="0" marL="0">
+              <a:spcAft>
+                <a:spcPts val="800"/>
+              </a:spcAft>
               <a:buNone/>
             </a:pPr>
             <a:r>
@@ -13522,100 +15565,15 @@
                   <a:schemeClr val="tx1"/>
                 </a:solidFill>
               </a:rPr>
-              <a:t>fuentes leídas de prensaestopa o empaquetadura</a:t>
+              <a:t>Burda, E. A., Zusman, G. V., Kudryavtseva, I. S., Naumenko, A. P., &amp; Nicoletti, R. (2022). An Overview of Vibration Analysis Techniques for the Fault Diagnostics of Rolling Bearings in Machinery. Shock and Vibration, 2022(1). https://doi.org/10.1155/2022/6136231</a:t>
             </a:r>
             <a:endParaRPr lang="en-US" sz="1100" dirty="0"/>
           </a:p>
-        </p:txBody>
-      </p:sp>
-      <p:sp>
-        <p:nvSpPr>
-          <p:cNvPr id="22" name="kpi 11"/>
-          <p:cNvSpPr/>
-          <p:nvPr/>
-        </p:nvSpPr>
-        <p:spPr>
-          <a:xfrm>
-            <a:off x="10012680" y="5303520"/>
-            <a:ext cx="1691640" cy="1051560"/>
-          </a:xfrm>
-          <a:prstGeom prst="roundRect">
-            <a:avLst>
-              <a:gd name="adj" fmla="val 6957"/>
-            </a:avLst>
-          </a:prstGeom>
-          <a:solidFill>
-            <a:schemeClr val="bg2"/>
-          </a:solidFill>
-          <a:ln w="12700">
-            <a:solidFill>
-              <a:schemeClr val="accent4"/>
-            </a:solidFill>
-            <a:prstDash val="solid"/>
-          </a:ln>
-        </p:spPr>
-      </p:sp>
-      <p:sp>
-        <p:nvSpPr>
-          <p:cNvPr id="23" name="Text 21"/>
-          <p:cNvSpPr txBox="1"/>
-          <p:nvPr/>
-        </p:nvSpPr>
-        <p:spPr>
-          <a:xfrm>
-            <a:off x="10104120" y="5349240"/>
-            <a:ext cx="1508760" cy="548640"/>
-          </a:xfrm>
-          <a:prstGeom prst="rect">
-            <a:avLst/>
-          </a:prstGeom>
-          <a:noFill/>
-          <a:ln/>
-        </p:spPr>
-        <p:txBody>
-          <a:bodyPr wrap="square" lIns="0" tIns="0" rIns="0" bIns="0" rtlCol="0" anchor="ctr"/>
-          <a:lstStyle/>
-          <a:p>
-            <a:pPr algn="l" indent="0" marL="0">
-              <a:buNone/>
-            </a:pPr>
-            <a:r>
-              <a:rPr lang="en-US" sz="3000" b="1" dirty="0">
-                <a:solidFill>
-                  <a:schemeClr val="accent4"/>
-                </a:solidFill>
-                <a:latin typeface="Cambria" pitchFamily="34" charset="0"/>
-                <a:ea typeface="Cambria" pitchFamily="34" charset="-122"/>
-                <a:cs typeface="Cambria" pitchFamily="34" charset="-120"/>
-              </a:rPr>
-              <a:t>11</a:t>
-            </a:r>
-            <a:endParaRPr lang="en-US" sz="3000" dirty="0"/>
-          </a:p>
-        </p:txBody>
-      </p:sp>
-      <p:sp>
-        <p:nvSpPr>
-          <p:cNvPr id="24" name="Text 22"/>
-          <p:cNvSpPr txBox="1"/>
-          <p:nvPr/>
-        </p:nvSpPr>
-        <p:spPr>
-          <a:xfrm>
-            <a:off x="10104120" y="5897880"/>
-            <a:ext cx="1508760" cy="438912"/>
-          </a:xfrm>
-          <a:prstGeom prst="rect">
-            <a:avLst/>
-          </a:prstGeom>
-          <a:noFill/>
-          <a:ln/>
-        </p:spPr>
-        <p:txBody>
-          <a:bodyPr wrap="square" lIns="0" tIns="0" rIns="0" bIns="0" rtlCol="0" anchor="t"/>
-          <a:lstStyle/>
           <a:p>
             <a:pPr indent="0" marL="0">
+              <a:spcAft>
+                <a:spcPts val="800"/>
+              </a:spcAft>
               <a:buNone/>
             </a:pPr>
             <a:r>
@@ -13624,7 +15582,24 @@
                   <a:schemeClr val="tx1"/>
                 </a:solidFill>
               </a:rPr>
-              <a:t>hipótesis, todas posibles</a:t>
+              <a:t>Purohit, H., Tanabe, R., Ichige, K., Endo, T., Nikaido, Y., Suefusa, K., &amp; Kawaguchi, Y. (2019). MIMII Dataset: Sound Dataset for Malfunctioning Industrial Machine Investigation and Inspection. arXiv:1909.09347; datos en Zenodo record 3384388 segun el resumen. https://arxiv.org/abs/1909.09347</a:t>
+            </a:r>
+            <a:endParaRPr lang="en-US" sz="1100" dirty="0"/>
+          </a:p>
+          <a:p>
+            <a:pPr indent="0" marL="0">
+              <a:spcAft>
+                <a:spcPts val="800"/>
+              </a:spcAft>
+              <a:buNone/>
+            </a:pPr>
+            <a:r>
+              <a:rPr lang="en-US" sz="1100" dirty="0">
+                <a:solidFill>
+                  <a:schemeClr val="tx1"/>
+                </a:solidFill>
+              </a:rPr>
+              <a:t>Lillelund, C. M., Pannullo, F., Jakobsen, M. O., Morante, M., &amp; Pedersen, C. F. (2025). RULSurv: A probabilistic survival-based method for early censoring-aware prediction of remaining useful life in ball bearings. arXiv 2405.01614 (version publicada: Expert Systems with Applications, segun la cabecera del preprint). https://arxiv.org/abs/2405.01614</a:t>
             </a:r>
             <a:endParaRPr lang="en-US" sz="1100" dirty="0"/>
           </a:p>
@@ -13669,7 +15644,7 @@
             <a:pPr algn="l"/>
             <a:fld id="{F7021451-1387-4CA6-816F-3879F97B5CBC}" type="slidenum">
               <a:rPr b="0" lang="en-US"/>
-              <a:t>2</a:t>
+              <a:t>20</a:t>
             </a:fld>
             <a:endParaRPr lang="en-US"/>
           </a:p>
@@ -13733,7 +15708,7 @@
                 <a:ea typeface="Cambria" pitchFamily="34" charset="-122"/>
                 <a:cs typeface="Cambria" pitchFamily="34" charset="-120"/>
               </a:rPr>
-              <a:t>Los cinco frentes de búsqueda encontraron pistas, pero casi ninguna fuente de prensaestopa se pudo leer</a:t>
+              <a:t>Los siete frentes de búsqueda encontraron pistas, pero solo un texto aportado por la persona trata el prensaestopa</a:t>
             </a:r>
             <a:endParaRPr lang="en-US" sz="2400" dirty="0"/>
           </a:p>
@@ -15387,6 +17362,792 @@
                   </a:tcPr>
                 </a:tc>
               </a:tr>
+              <a:tr h="457200">
+                <a:tc>
+                  <a:txBody>
+                    <a:bodyPr/>
+                    <a:lstStyle/>
+                    <a:p>
+                      <a:pPr indent="0" marL="0">
+                        <a:buNone/>
+                      </a:pPr>
+                      <a:r>
+                        <a:rPr lang="en-US" sz="1100" b="1" dirty="0">
+                          <a:solidFill>
+                            <a:schemeClr val="tx1"/>
+                          </a:solidFill>
+                          <a:latin typeface="Calibri" pitchFamily="34" charset="0"/>
+                          <a:ea typeface="Calibri" pitchFamily="34" charset="-122"/>
+                          <a:cs typeface="Calibri" pitchFamily="34" charset="-120"/>
+                        </a:rPr>
+                        <a:t>Cadena prensaestopa a rodamiento (nuevo)</a:t>
+                      </a:r>
+                      <a:endParaRPr lang="en-US" sz="1100" dirty="0">
+                        <a:latin typeface="Calibri" charset="0"/>
+                        <a:ea typeface="Calibri" charset="0"/>
+                        <a:cs typeface="Calibri" charset="0"/>
+                      </a:endParaRPr>
+                    </a:p>
+                  </a:txBody>
+                  <a:tcPr marL="91440" marR="91440" marT="45720" marB="45720" anchor="t">
+                    <a:lnL w="9525" cap="flat" cmpd="sng" algn="ctr">
+                      <a:solidFill>
+                        <a:srgbClr val="DDE9EE"/>
+                      </a:solidFill>
+                      <a:prstDash val="solid"/>
+                      <a:round/>
+                      <a:headEnd type="none" w="med" len="med"/>
+                      <a:tailEnd type="none" w="med" len="med"/>
+                    </a:lnL>
+                    <a:lnR w="9525" cap="flat" cmpd="sng" algn="ctr">
+                      <a:solidFill>
+                        <a:srgbClr val="DDE9EE"/>
+                      </a:solidFill>
+                      <a:prstDash val="solid"/>
+                      <a:round/>
+                      <a:headEnd type="none" w="med" len="med"/>
+                      <a:tailEnd type="none" w="med" len="med"/>
+                    </a:lnR>
+                    <a:lnT w="9525" cap="flat" cmpd="sng" algn="ctr">
+                      <a:solidFill>
+                        <a:srgbClr val="DDE9EE"/>
+                      </a:solidFill>
+                      <a:prstDash val="solid"/>
+                      <a:round/>
+                      <a:headEnd type="none" w="med" len="med"/>
+                      <a:tailEnd type="none" w="med" len="med"/>
+                    </a:lnT>
+                    <a:lnB w="9525" cap="flat" cmpd="sng" algn="ctr">
+                      <a:solidFill>
+                        <a:srgbClr val="DDE9EE"/>
+                      </a:solidFill>
+                      <a:prstDash val="solid"/>
+                      <a:round/>
+                      <a:headEnd type="none" w="med" len="med"/>
+                      <a:tailEnd type="none" w="med" len="med"/>
+                    </a:lnB>
+                  </a:tcPr>
+                </a:tc>
+                <a:tc>
+                  <a:txBody>
+                    <a:bodyPr/>
+                    <a:lstStyle/>
+                    <a:p>
+                      <a:pPr indent="0" marL="0">
+                        <a:buNone/>
+                      </a:pPr>
+                      <a:r>
+                        <a:rPr lang="en-US" sz="1100" dirty="0">
+                          <a:solidFill>
+                            <a:schemeClr val="tx1"/>
+                          </a:solidFill>
+                          <a:latin typeface="Calibri" pitchFamily="34" charset="0"/>
+                          <a:ea typeface="Calibri" pitchFamily="34" charset="-122"/>
+                          <a:cs typeface="Calibri" pitchFamily="34" charset="-120"/>
+                        </a:rPr>
+                        <a:t>23</a:t>
+                      </a:r>
+                      <a:endParaRPr lang="en-US" sz="1100" dirty="0">
+                        <a:latin typeface="Calibri" charset="0"/>
+                        <a:ea typeface="Calibri" charset="0"/>
+                        <a:cs typeface="Calibri" charset="0"/>
+                      </a:endParaRPr>
+                    </a:p>
+                  </a:txBody>
+                  <a:tcPr marL="91440" marR="91440" marT="45720" marB="45720" anchor="t">
+                    <a:lnL w="9525" cap="flat" cmpd="sng" algn="ctr">
+                      <a:solidFill>
+                        <a:srgbClr val="DDE9EE"/>
+                      </a:solidFill>
+                      <a:prstDash val="solid"/>
+                      <a:round/>
+                      <a:headEnd type="none" w="med" len="med"/>
+                      <a:tailEnd type="none" w="med" len="med"/>
+                    </a:lnL>
+                    <a:lnR w="9525" cap="flat" cmpd="sng" algn="ctr">
+                      <a:solidFill>
+                        <a:srgbClr val="DDE9EE"/>
+                      </a:solidFill>
+                      <a:prstDash val="solid"/>
+                      <a:round/>
+                      <a:headEnd type="none" w="med" len="med"/>
+                      <a:tailEnd type="none" w="med" len="med"/>
+                    </a:lnR>
+                    <a:lnT w="9525" cap="flat" cmpd="sng" algn="ctr">
+                      <a:solidFill>
+                        <a:srgbClr val="DDE9EE"/>
+                      </a:solidFill>
+                      <a:prstDash val="solid"/>
+                      <a:round/>
+                      <a:headEnd type="none" w="med" len="med"/>
+                      <a:tailEnd type="none" w="med" len="med"/>
+                    </a:lnT>
+                    <a:lnB w="9525" cap="flat" cmpd="sng" algn="ctr">
+                      <a:solidFill>
+                        <a:srgbClr val="DDE9EE"/>
+                      </a:solidFill>
+                      <a:prstDash val="solid"/>
+                      <a:round/>
+                      <a:headEnd type="none" w="med" len="med"/>
+                      <a:tailEnd type="none" w="med" len="med"/>
+                    </a:lnB>
+                  </a:tcPr>
+                </a:tc>
+                <a:tc>
+                  <a:txBody>
+                    <a:bodyPr/>
+                    <a:lstStyle/>
+                    <a:p>
+                      <a:pPr indent="0" marL="0">
+                        <a:buNone/>
+                      </a:pPr>
+                      <a:r>
+                        <a:rPr lang="en-US" sz="1100" dirty="0">
+                          <a:solidFill>
+                            <a:schemeClr val="tx1"/>
+                          </a:solidFill>
+                          <a:latin typeface="Calibri" pitchFamily="34" charset="0"/>
+                          <a:ea typeface="Calibri" pitchFamily="34" charset="-122"/>
+                          <a:cs typeface="Calibri" pitchFamily="34" charset="-120"/>
+                        </a:rPr>
+                        <a:t>0</a:t>
+                      </a:r>
+                      <a:endParaRPr lang="en-US" sz="1100" dirty="0">
+                        <a:latin typeface="Calibri" charset="0"/>
+                        <a:ea typeface="Calibri" charset="0"/>
+                        <a:cs typeface="Calibri" charset="0"/>
+                      </a:endParaRPr>
+                    </a:p>
+                  </a:txBody>
+                  <a:tcPr marL="91440" marR="91440" marT="45720" marB="45720" anchor="t">
+                    <a:lnL w="9525" cap="flat" cmpd="sng" algn="ctr">
+                      <a:solidFill>
+                        <a:srgbClr val="DDE9EE"/>
+                      </a:solidFill>
+                      <a:prstDash val="solid"/>
+                      <a:round/>
+                      <a:headEnd type="none" w="med" len="med"/>
+                      <a:tailEnd type="none" w="med" len="med"/>
+                    </a:lnL>
+                    <a:lnR w="9525" cap="flat" cmpd="sng" algn="ctr">
+                      <a:solidFill>
+                        <a:srgbClr val="DDE9EE"/>
+                      </a:solidFill>
+                      <a:prstDash val="solid"/>
+                      <a:round/>
+                      <a:headEnd type="none" w="med" len="med"/>
+                      <a:tailEnd type="none" w="med" len="med"/>
+                    </a:lnR>
+                    <a:lnT w="9525" cap="flat" cmpd="sng" algn="ctr">
+                      <a:solidFill>
+                        <a:srgbClr val="DDE9EE"/>
+                      </a:solidFill>
+                      <a:prstDash val="solid"/>
+                      <a:round/>
+                      <a:headEnd type="none" w="med" len="med"/>
+                      <a:tailEnd type="none" w="med" len="med"/>
+                    </a:lnT>
+                    <a:lnB w="9525" cap="flat" cmpd="sng" algn="ctr">
+                      <a:solidFill>
+                        <a:srgbClr val="DDE9EE"/>
+                      </a:solidFill>
+                      <a:prstDash val="solid"/>
+                      <a:round/>
+                      <a:headEnd type="none" w="med" len="med"/>
+                      <a:tailEnd type="none" w="med" len="med"/>
+                    </a:lnB>
+                  </a:tcPr>
+                </a:tc>
+                <a:tc>
+                  <a:txBody>
+                    <a:bodyPr/>
+                    <a:lstStyle/>
+                    <a:p>
+                      <a:pPr indent="0" marL="0">
+                        <a:buNone/>
+                      </a:pPr>
+                      <a:r>
+                        <a:rPr lang="en-US" sz="1100" dirty="0">
+                          <a:solidFill>
+                            <a:schemeClr val="tx1"/>
+                          </a:solidFill>
+                          <a:latin typeface="Calibri" pitchFamily="34" charset="0"/>
+                          <a:ea typeface="Calibri" pitchFamily="34" charset="-122"/>
+                          <a:cs typeface="Calibri" pitchFamily="34" charset="-120"/>
+                        </a:rPr>
+                        <a:t>23 pistas; ninguna leída; peso de la causa contradictorio</a:t>
+                      </a:r>
+                      <a:endParaRPr lang="en-US" sz="1100" dirty="0">
+                        <a:latin typeface="Calibri" charset="0"/>
+                        <a:ea typeface="Calibri" charset="0"/>
+                        <a:cs typeface="Calibri" charset="0"/>
+                      </a:endParaRPr>
+                    </a:p>
+                  </a:txBody>
+                  <a:tcPr marL="91440" marR="91440" marT="45720" marB="45720" anchor="t">
+                    <a:lnL w="9525" cap="flat" cmpd="sng" algn="ctr">
+                      <a:solidFill>
+                        <a:srgbClr val="DDE9EE"/>
+                      </a:solidFill>
+                      <a:prstDash val="solid"/>
+                      <a:round/>
+                      <a:headEnd type="none" w="med" len="med"/>
+                      <a:tailEnd type="none" w="med" len="med"/>
+                    </a:lnL>
+                    <a:lnR w="9525" cap="flat" cmpd="sng" algn="ctr">
+                      <a:solidFill>
+                        <a:srgbClr val="DDE9EE"/>
+                      </a:solidFill>
+                      <a:prstDash val="solid"/>
+                      <a:round/>
+                      <a:headEnd type="none" w="med" len="med"/>
+                      <a:tailEnd type="none" w="med" len="med"/>
+                    </a:lnR>
+                    <a:lnT w="9525" cap="flat" cmpd="sng" algn="ctr">
+                      <a:solidFill>
+                        <a:srgbClr val="DDE9EE"/>
+                      </a:solidFill>
+                      <a:prstDash val="solid"/>
+                      <a:round/>
+                      <a:headEnd type="none" w="med" len="med"/>
+                      <a:tailEnd type="none" w="med" len="med"/>
+                    </a:lnT>
+                    <a:lnB w="9525" cap="flat" cmpd="sng" algn="ctr">
+                      <a:solidFill>
+                        <a:srgbClr val="DDE9EE"/>
+                      </a:solidFill>
+                      <a:prstDash val="solid"/>
+                      <a:round/>
+                      <a:headEnd type="none" w="med" len="med"/>
+                      <a:tailEnd type="none" w="med" len="med"/>
+                    </a:lnB>
+                  </a:tcPr>
+                </a:tc>
+              </a:tr>
+              <a:tr h="457200">
+                <a:tc>
+                  <a:txBody>
+                    <a:bodyPr/>
+                    <a:lstStyle/>
+                    <a:p>
+                      <a:pPr indent="0" marL="0">
+                        <a:buNone/>
+                      </a:pPr>
+                      <a:r>
+                        <a:rPr lang="en-US" sz="1100" b="1" dirty="0">
+                          <a:solidFill>
+                            <a:schemeClr val="tx1"/>
+                          </a:solidFill>
+                          <a:latin typeface="Calibri" pitchFamily="34" charset="0"/>
+                          <a:ea typeface="Calibri" pitchFamily="34" charset="-122"/>
+                          <a:cs typeface="Calibri" pitchFamily="34" charset="-120"/>
+                        </a:rPr>
+                        <a:t>Protección y detección (nuevo)</a:t>
+                      </a:r>
+                      <a:endParaRPr lang="en-US" sz="1100" dirty="0">
+                        <a:latin typeface="Calibri" charset="0"/>
+                        <a:ea typeface="Calibri" charset="0"/>
+                        <a:cs typeface="Calibri" charset="0"/>
+                      </a:endParaRPr>
+                    </a:p>
+                  </a:txBody>
+                  <a:tcPr marL="91440" marR="91440" marT="45720" marB="45720" anchor="t">
+                    <a:lnL w="9525" cap="flat" cmpd="sng" algn="ctr">
+                      <a:solidFill>
+                        <a:srgbClr val="DDE9EE"/>
+                      </a:solidFill>
+                      <a:prstDash val="solid"/>
+                      <a:round/>
+                      <a:headEnd type="none" w="med" len="med"/>
+                      <a:tailEnd type="none" w="med" len="med"/>
+                    </a:lnL>
+                    <a:lnR w="9525" cap="flat" cmpd="sng" algn="ctr">
+                      <a:solidFill>
+                        <a:srgbClr val="DDE9EE"/>
+                      </a:solidFill>
+                      <a:prstDash val="solid"/>
+                      <a:round/>
+                      <a:headEnd type="none" w="med" len="med"/>
+                      <a:tailEnd type="none" w="med" len="med"/>
+                    </a:lnR>
+                    <a:lnT w="9525" cap="flat" cmpd="sng" algn="ctr">
+                      <a:solidFill>
+                        <a:srgbClr val="DDE9EE"/>
+                      </a:solidFill>
+                      <a:prstDash val="solid"/>
+                      <a:round/>
+                      <a:headEnd type="none" w="med" len="med"/>
+                      <a:tailEnd type="none" w="med" len="med"/>
+                    </a:lnT>
+                    <a:lnB w="9525" cap="flat" cmpd="sng" algn="ctr">
+                      <a:solidFill>
+                        <a:srgbClr val="DDE9EE"/>
+                      </a:solidFill>
+                      <a:prstDash val="solid"/>
+                      <a:round/>
+                      <a:headEnd type="none" w="med" len="med"/>
+                      <a:tailEnd type="none" w="med" len="med"/>
+                    </a:lnB>
+                  </a:tcPr>
+                </a:tc>
+                <a:tc>
+                  <a:txBody>
+                    <a:bodyPr/>
+                    <a:lstStyle/>
+                    <a:p>
+                      <a:pPr indent="0" marL="0">
+                        <a:buNone/>
+                      </a:pPr>
+                      <a:r>
+                        <a:rPr lang="en-US" sz="1100" dirty="0">
+                          <a:solidFill>
+                            <a:schemeClr val="tx1"/>
+                          </a:solidFill>
+                          <a:latin typeface="Calibri" pitchFamily="34" charset="0"/>
+                          <a:ea typeface="Calibri" pitchFamily="34" charset="-122"/>
+                          <a:cs typeface="Calibri" pitchFamily="34" charset="-120"/>
+                        </a:rPr>
+                        <a:t>28</a:t>
+                      </a:r>
+                      <a:endParaRPr lang="en-US" sz="1100" dirty="0">
+                        <a:latin typeface="Calibri" charset="0"/>
+                        <a:ea typeface="Calibri" charset="0"/>
+                        <a:cs typeface="Calibri" charset="0"/>
+                      </a:endParaRPr>
+                    </a:p>
+                  </a:txBody>
+                  <a:tcPr marL="91440" marR="91440" marT="45720" marB="45720" anchor="t">
+                    <a:lnL w="9525" cap="flat" cmpd="sng" algn="ctr">
+                      <a:solidFill>
+                        <a:srgbClr val="DDE9EE"/>
+                      </a:solidFill>
+                      <a:prstDash val="solid"/>
+                      <a:round/>
+                      <a:headEnd type="none" w="med" len="med"/>
+                      <a:tailEnd type="none" w="med" len="med"/>
+                    </a:lnL>
+                    <a:lnR w="9525" cap="flat" cmpd="sng" algn="ctr">
+                      <a:solidFill>
+                        <a:srgbClr val="DDE9EE"/>
+                      </a:solidFill>
+                      <a:prstDash val="solid"/>
+                      <a:round/>
+                      <a:headEnd type="none" w="med" len="med"/>
+                      <a:tailEnd type="none" w="med" len="med"/>
+                    </a:lnR>
+                    <a:lnT w="9525" cap="flat" cmpd="sng" algn="ctr">
+                      <a:solidFill>
+                        <a:srgbClr val="DDE9EE"/>
+                      </a:solidFill>
+                      <a:prstDash val="solid"/>
+                      <a:round/>
+                      <a:headEnd type="none" w="med" len="med"/>
+                      <a:tailEnd type="none" w="med" len="med"/>
+                    </a:lnT>
+                    <a:lnB w="9525" cap="flat" cmpd="sng" algn="ctr">
+                      <a:solidFill>
+                        <a:srgbClr val="DDE9EE"/>
+                      </a:solidFill>
+                      <a:prstDash val="solid"/>
+                      <a:round/>
+                      <a:headEnd type="none" w="med" len="med"/>
+                      <a:tailEnd type="none" w="med" len="med"/>
+                    </a:lnB>
+                  </a:tcPr>
+                </a:tc>
+                <a:tc>
+                  <a:txBody>
+                    <a:bodyPr/>
+                    <a:lstStyle/>
+                    <a:p>
+                      <a:pPr indent="0" marL="0">
+                        <a:buNone/>
+                      </a:pPr>
+                      <a:r>
+                        <a:rPr lang="en-US" sz="1100" dirty="0">
+                          <a:solidFill>
+                            <a:schemeClr val="tx1"/>
+                          </a:solidFill>
+                          <a:latin typeface="Calibri" pitchFamily="34" charset="0"/>
+                          <a:ea typeface="Calibri" pitchFamily="34" charset="-122"/>
+                          <a:cs typeface="Calibri" pitchFamily="34" charset="-120"/>
+                        </a:rPr>
+                        <a:t>0</a:t>
+                      </a:r>
+                      <a:endParaRPr lang="en-US" sz="1100" dirty="0">
+                        <a:latin typeface="Calibri" charset="0"/>
+                        <a:ea typeface="Calibri" charset="0"/>
+                        <a:cs typeface="Calibri" charset="0"/>
+                      </a:endParaRPr>
+                    </a:p>
+                  </a:txBody>
+                  <a:tcPr marL="91440" marR="91440" marT="45720" marB="45720" anchor="t">
+                    <a:lnL w="9525" cap="flat" cmpd="sng" algn="ctr">
+                      <a:solidFill>
+                        <a:srgbClr val="DDE9EE"/>
+                      </a:solidFill>
+                      <a:prstDash val="solid"/>
+                      <a:round/>
+                      <a:headEnd type="none" w="med" len="med"/>
+                      <a:tailEnd type="none" w="med" len="med"/>
+                    </a:lnL>
+                    <a:lnR w="9525" cap="flat" cmpd="sng" algn="ctr">
+                      <a:solidFill>
+                        <a:srgbClr val="DDE9EE"/>
+                      </a:solidFill>
+                      <a:prstDash val="solid"/>
+                      <a:round/>
+                      <a:headEnd type="none" w="med" len="med"/>
+                      <a:tailEnd type="none" w="med" len="med"/>
+                    </a:lnR>
+                    <a:lnT w="9525" cap="flat" cmpd="sng" algn="ctr">
+                      <a:solidFill>
+                        <a:srgbClr val="DDE9EE"/>
+                      </a:solidFill>
+                      <a:prstDash val="solid"/>
+                      <a:round/>
+                      <a:headEnd type="none" w="med" len="med"/>
+                      <a:tailEnd type="none" w="med" len="med"/>
+                    </a:lnT>
+                    <a:lnB w="9525" cap="flat" cmpd="sng" algn="ctr">
+                      <a:solidFill>
+                        <a:srgbClr val="DDE9EE"/>
+                      </a:solidFill>
+                      <a:prstDash val="solid"/>
+                      <a:round/>
+                      <a:headEnd type="none" w="med" len="med"/>
+                      <a:tailEnd type="none" w="med" len="med"/>
+                    </a:lnB>
+                  </a:tcPr>
+                </a:tc>
+                <a:tc>
+                  <a:txBody>
+                    <a:bodyPr/>
+                    <a:lstStyle/>
+                    <a:p>
+                      <a:pPr indent="0" marL="0">
+                        <a:buNone/>
+                      </a:pPr>
+                      <a:r>
+                        <a:rPr lang="en-US" sz="1100" dirty="0">
+                          <a:solidFill>
+                            <a:schemeClr val="tx1"/>
+                          </a:solidFill>
+                          <a:latin typeface="Calibri" pitchFamily="34" charset="0"/>
+                          <a:ea typeface="Calibri" pitchFamily="34" charset="-122"/>
+                          <a:cs typeface="Calibri" pitchFamily="34" charset="-120"/>
+                        </a:rPr>
+                        <a:t>28 pistas; sin umbrales ni ensayos leídos</a:t>
+                      </a:r>
+                      <a:endParaRPr lang="en-US" sz="1100" dirty="0">
+                        <a:latin typeface="Calibri" charset="0"/>
+                        <a:ea typeface="Calibri" charset="0"/>
+                        <a:cs typeface="Calibri" charset="0"/>
+                      </a:endParaRPr>
+                    </a:p>
+                  </a:txBody>
+                  <a:tcPr marL="91440" marR="91440" marT="45720" marB="45720" anchor="t">
+                    <a:lnL w="9525" cap="flat" cmpd="sng" algn="ctr">
+                      <a:solidFill>
+                        <a:srgbClr val="DDE9EE"/>
+                      </a:solidFill>
+                      <a:prstDash val="solid"/>
+                      <a:round/>
+                      <a:headEnd type="none" w="med" len="med"/>
+                      <a:tailEnd type="none" w="med" len="med"/>
+                    </a:lnL>
+                    <a:lnR w="9525" cap="flat" cmpd="sng" algn="ctr">
+                      <a:solidFill>
+                        <a:srgbClr val="DDE9EE"/>
+                      </a:solidFill>
+                      <a:prstDash val="solid"/>
+                      <a:round/>
+                      <a:headEnd type="none" w="med" len="med"/>
+                      <a:tailEnd type="none" w="med" len="med"/>
+                    </a:lnR>
+                    <a:lnT w="9525" cap="flat" cmpd="sng" algn="ctr">
+                      <a:solidFill>
+                        <a:srgbClr val="DDE9EE"/>
+                      </a:solidFill>
+                      <a:prstDash val="solid"/>
+                      <a:round/>
+                      <a:headEnd type="none" w="med" len="med"/>
+                      <a:tailEnd type="none" w="med" len="med"/>
+                    </a:lnT>
+                    <a:lnB w="9525" cap="flat" cmpd="sng" algn="ctr">
+                      <a:solidFill>
+                        <a:srgbClr val="DDE9EE"/>
+                      </a:solidFill>
+                      <a:prstDash val="solid"/>
+                      <a:round/>
+                      <a:headEnd type="none" w="med" len="med"/>
+                      <a:tailEnd type="none" w="med" len="med"/>
+                    </a:lnB>
+                  </a:tcPr>
+                </a:tc>
+              </a:tr>
+              <a:tr h="457200">
+                <a:tc>
+                  <a:txBody>
+                    <a:bodyPr/>
+                    <a:lstStyle/>
+                    <a:p>
+                      <a:pPr indent="0" marL="0">
+                        <a:buNone/>
+                      </a:pPr>
+                      <a:r>
+                        <a:rPr lang="en-US" sz="1100" b="1" dirty="0">
+                          <a:solidFill>
+                            <a:schemeClr val="tx1"/>
+                          </a:solidFill>
+                          <a:latin typeface="Calibri" pitchFamily="34" charset="0"/>
+                          <a:ea typeface="Calibri" pitchFamily="34" charset="-122"/>
+                          <a:cs typeface="Calibri" pitchFamily="34" charset="-120"/>
+                        </a:rPr>
+                        <a:t>Texto aportado por la persona</a:t>
+                      </a:r>
+                      <a:endParaRPr lang="en-US" sz="1100" dirty="0">
+                        <a:latin typeface="Calibri" charset="0"/>
+                        <a:ea typeface="Calibri" charset="0"/>
+                        <a:cs typeface="Calibri" charset="0"/>
+                      </a:endParaRPr>
+                    </a:p>
+                  </a:txBody>
+                  <a:tcPr marL="91440" marR="91440" marT="45720" marB="45720" anchor="t">
+                    <a:lnL w="9525" cap="flat" cmpd="sng" algn="ctr">
+                      <a:solidFill>
+                        <a:srgbClr val="DDE9EE"/>
+                      </a:solidFill>
+                      <a:prstDash val="solid"/>
+                      <a:round/>
+                      <a:headEnd type="none" w="med" len="med"/>
+                      <a:tailEnd type="none" w="med" len="med"/>
+                    </a:lnL>
+                    <a:lnR w="9525" cap="flat" cmpd="sng" algn="ctr">
+                      <a:solidFill>
+                        <a:srgbClr val="DDE9EE"/>
+                      </a:solidFill>
+                      <a:prstDash val="solid"/>
+                      <a:round/>
+                      <a:headEnd type="none" w="med" len="med"/>
+                      <a:tailEnd type="none" w="med" len="med"/>
+                    </a:lnR>
+                    <a:lnT w="9525" cap="flat" cmpd="sng" algn="ctr">
+                      <a:solidFill>
+                        <a:srgbClr val="DDE9EE"/>
+                      </a:solidFill>
+                      <a:prstDash val="solid"/>
+                      <a:round/>
+                      <a:headEnd type="none" w="med" len="med"/>
+                      <a:tailEnd type="none" w="med" len="med"/>
+                    </a:lnT>
+                    <a:lnB w="9525" cap="flat" cmpd="sng" algn="ctr">
+                      <a:solidFill>
+                        <a:srgbClr val="DDE9EE"/>
+                      </a:solidFill>
+                      <a:prstDash val="solid"/>
+                      <a:round/>
+                      <a:headEnd type="none" w="med" len="med"/>
+                      <a:tailEnd type="none" w="med" len="med"/>
+                    </a:lnB>
+                  </a:tcPr>
+                </a:tc>
+                <a:tc>
+                  <a:txBody>
+                    <a:bodyPr/>
+                    <a:lstStyle/>
+                    <a:p>
+                      <a:pPr indent="0" marL="0">
+                        <a:buNone/>
+                      </a:pPr>
+                      <a:r>
+                        <a:rPr lang="en-US" sz="1100" dirty="0">
+                          <a:solidFill>
+                            <a:schemeClr val="tx1"/>
+                          </a:solidFill>
+                          <a:latin typeface="Calibri" pitchFamily="34" charset="0"/>
+                          <a:ea typeface="Calibri" pitchFamily="34" charset="-122"/>
+                          <a:cs typeface="Calibri" pitchFamily="34" charset="-120"/>
+                        </a:rPr>
+                        <a:t>1</a:t>
+                      </a:r>
+                      <a:endParaRPr lang="en-US" sz="1100" dirty="0">
+                        <a:latin typeface="Calibri" charset="0"/>
+                        <a:ea typeface="Calibri" charset="0"/>
+                        <a:cs typeface="Calibri" charset="0"/>
+                      </a:endParaRPr>
+                    </a:p>
+                  </a:txBody>
+                  <a:tcPr marL="91440" marR="91440" marT="45720" marB="45720" anchor="t">
+                    <a:lnL w="9525" cap="flat" cmpd="sng" algn="ctr">
+                      <a:solidFill>
+                        <a:srgbClr val="DDE9EE"/>
+                      </a:solidFill>
+                      <a:prstDash val="solid"/>
+                      <a:round/>
+                      <a:headEnd type="none" w="med" len="med"/>
+                      <a:tailEnd type="none" w="med" len="med"/>
+                    </a:lnL>
+                    <a:lnR w="9525" cap="flat" cmpd="sng" algn="ctr">
+                      <a:solidFill>
+                        <a:srgbClr val="DDE9EE"/>
+                      </a:solidFill>
+                      <a:prstDash val="solid"/>
+                      <a:round/>
+                      <a:headEnd type="none" w="med" len="med"/>
+                      <a:tailEnd type="none" w="med" len="med"/>
+                    </a:lnR>
+                    <a:lnT w="9525" cap="flat" cmpd="sng" algn="ctr">
+                      <a:solidFill>
+                        <a:srgbClr val="DDE9EE"/>
+                      </a:solidFill>
+                      <a:prstDash val="solid"/>
+                      <a:round/>
+                      <a:headEnd type="none" w="med" len="med"/>
+                      <a:tailEnd type="none" w="med" len="med"/>
+                    </a:lnT>
+                    <a:lnB w="9525" cap="flat" cmpd="sng" algn="ctr">
+                      <a:solidFill>
+                        <a:srgbClr val="DDE9EE"/>
+                      </a:solidFill>
+                      <a:prstDash val="solid"/>
+                      <a:round/>
+                      <a:headEnd type="none" w="med" len="med"/>
+                      <a:tailEnd type="none" w="med" len="med"/>
+                    </a:lnB>
+                  </a:tcPr>
+                </a:tc>
+                <a:tc>
+                  <a:txBody>
+                    <a:bodyPr/>
+                    <a:lstStyle/>
+                    <a:p>
+                      <a:pPr indent="0" marL="0">
+                        <a:buNone/>
+                      </a:pPr>
+                      <a:r>
+                        <a:rPr lang="en-US" sz="1100" dirty="0">
+                          <a:solidFill>
+                            <a:schemeClr val="tx1"/>
+                          </a:solidFill>
+                          <a:latin typeface="Calibri" pitchFamily="34" charset="0"/>
+                          <a:ea typeface="Calibri" pitchFamily="34" charset="-122"/>
+                          <a:cs typeface="Calibri" pitchFamily="34" charset="-120"/>
+                        </a:rPr>
+                        <a:t>1</a:t>
+                      </a:r>
+                      <a:endParaRPr lang="en-US" sz="1100" dirty="0">
+                        <a:latin typeface="Calibri" charset="0"/>
+                        <a:ea typeface="Calibri" charset="0"/>
+                        <a:cs typeface="Calibri" charset="0"/>
+                      </a:endParaRPr>
+                    </a:p>
+                  </a:txBody>
+                  <a:tcPr marL="91440" marR="91440" marT="45720" marB="45720" anchor="t">
+                    <a:lnL w="9525" cap="flat" cmpd="sng" algn="ctr">
+                      <a:solidFill>
+                        <a:srgbClr val="DDE9EE"/>
+                      </a:solidFill>
+                      <a:prstDash val="solid"/>
+                      <a:round/>
+                      <a:headEnd type="none" w="med" len="med"/>
+                      <a:tailEnd type="none" w="med" len="med"/>
+                    </a:lnL>
+                    <a:lnR w="9525" cap="flat" cmpd="sng" algn="ctr">
+                      <a:solidFill>
+                        <a:srgbClr val="DDE9EE"/>
+                      </a:solidFill>
+                      <a:prstDash val="solid"/>
+                      <a:round/>
+                      <a:headEnd type="none" w="med" len="med"/>
+                      <a:tailEnd type="none" w="med" len="med"/>
+                    </a:lnR>
+                    <a:lnT w="9525" cap="flat" cmpd="sng" algn="ctr">
+                      <a:solidFill>
+                        <a:srgbClr val="DDE9EE"/>
+                      </a:solidFill>
+                      <a:prstDash val="solid"/>
+                      <a:round/>
+                      <a:headEnd type="none" w="med" len="med"/>
+                      <a:tailEnd type="none" w="med" len="med"/>
+                    </a:lnT>
+                    <a:lnB w="9525" cap="flat" cmpd="sng" algn="ctr">
+                      <a:solidFill>
+                        <a:srgbClr val="DDE9EE"/>
+                      </a:solidFill>
+                      <a:prstDash val="solid"/>
+                      <a:round/>
+                      <a:headEnd type="none" w="med" len="med"/>
+                      <a:tailEnd type="none" w="med" len="med"/>
+                    </a:lnB>
+                  </a:tcPr>
+                </a:tc>
+                <a:tc>
+                  <a:txBody>
+                    <a:bodyPr/>
+                    <a:lstStyle/>
+                    <a:p>
+                      <a:pPr indent="0" marL="0">
+                        <a:buNone/>
+                      </a:pPr>
+                      <a:r>
+                        <a:rPr lang="en-US" sz="1100" dirty="0">
+                          <a:solidFill>
+                            <a:schemeClr val="tx1"/>
+                          </a:solidFill>
+                          <a:latin typeface="Calibri" pitchFamily="34" charset="0"/>
+                          <a:ea typeface="Calibri" pitchFamily="34" charset="-122"/>
+                          <a:cs typeface="Calibri" pitchFamily="34" charset="-120"/>
+                        </a:rPr>
+                        <a:t>Mecanismo del ajuste de la empaquetadura; fuente comercial</a:t>
+                      </a:r>
+                      <a:endParaRPr lang="en-US" sz="1100" dirty="0">
+                        <a:latin typeface="Calibri" charset="0"/>
+                        <a:ea typeface="Calibri" charset="0"/>
+                        <a:cs typeface="Calibri" charset="0"/>
+                      </a:endParaRPr>
+                    </a:p>
+                  </a:txBody>
+                  <a:tcPr marL="91440" marR="91440" marT="45720" marB="45720" anchor="t">
+                    <a:lnL w="9525" cap="flat" cmpd="sng" algn="ctr">
+                      <a:solidFill>
+                        <a:srgbClr val="DDE9EE"/>
+                      </a:solidFill>
+                      <a:prstDash val="solid"/>
+                      <a:round/>
+                      <a:headEnd type="none" w="med" len="med"/>
+                      <a:tailEnd type="none" w="med" len="med"/>
+                    </a:lnL>
+                    <a:lnR w="9525" cap="flat" cmpd="sng" algn="ctr">
+                      <a:solidFill>
+                        <a:srgbClr val="DDE9EE"/>
+                      </a:solidFill>
+                      <a:prstDash val="solid"/>
+                      <a:round/>
+                      <a:headEnd type="none" w="med" len="med"/>
+                      <a:tailEnd type="none" w="med" len="med"/>
+                    </a:lnR>
+                    <a:lnT w="9525" cap="flat" cmpd="sng" algn="ctr">
+                      <a:solidFill>
+                        <a:srgbClr val="DDE9EE"/>
+                      </a:solidFill>
+                      <a:prstDash val="solid"/>
+                      <a:round/>
+                      <a:headEnd type="none" w="med" len="med"/>
+                      <a:tailEnd type="none" w="med" len="med"/>
+                    </a:lnT>
+                    <a:lnB w="9525" cap="flat" cmpd="sng" algn="ctr">
+                      <a:solidFill>
+                        <a:srgbClr val="DDE9EE"/>
+                      </a:solidFill>
+                      <a:prstDash val="solid"/>
+                      <a:round/>
+                      <a:headEnd type="none" w="med" len="med"/>
+                      <a:tailEnd type="none" w="med" len="med"/>
+                    </a:lnB>
+                  </a:tcPr>
+                </a:tc>
+              </a:tr>
             </a:tbl>
           </a:graphicData>
         </a:graphic>
@@ -15399,8 +18160,8 @@
         </p:nvSpPr>
         <p:spPr>
           <a:xfrm>
-            <a:off x="457200" y="5212080"/>
-            <a:ext cx="11247120" cy="640080"/>
+            <a:off x="457200" y="5715000"/>
+            <a:ext cx="11247120" cy="457200"/>
           </a:xfrm>
           <a:prstGeom prst="rect">
             <a:avLst/>
@@ -15416,14 +18177,14 @@
               <a:buNone/>
             </a:pPr>
             <a:r>
-              <a:rPr lang="en-US" sz="1400" b="1" dirty="0">
+              <a:rPr lang="en-US" sz="1300" b="1" dirty="0">
                 <a:solidFill>
                   <a:schemeClr val="tx2"/>
                 </a:solidFill>
               </a:rPr>
               <a:t>Para compensar, se heredaron las 351 entradas del caso de la bomba centrífuga (rodamientos y vibración), que no tratan prensaestopa.</a:t>
             </a:r>
-            <a:endParaRPr lang="en-US" sz="1400" dirty="0"/>
+            <a:endParaRPr lang="en-US" sz="1300" dirty="0"/>
           </a:p>
         </p:txBody>
       </p:sp>
@@ -15800,7 +18561,7 @@
                   <a:schemeClr val="tx1"/>
                 </a:solidFill>
               </a:rPr>
-              <a:t>5 frentes en paralelo</a:t>
+              <a:t>7 frentes en paralelo</a:t>
             </a:r>
             <a:endParaRPr lang="en-US" sz="1100" dirty="0"/>
           </a:p>
@@ -17055,7 +19816,7 @@
                 <a:ea typeface="Cambria" pitchFamily="34" charset="-122"/>
                 <a:cs typeface="Cambria" pitchFamily="34" charset="-120"/>
               </a:rPr>
-              <a:t>Se leyeron 71 documentos de 299 registrados, casi todos de rodamientos y vibración, ninguno de libros ni tesis</a:t>
+              <a:t>Se leyeron 72 documentos de 351 registrados, casi todos de rodamientos y vibración, ninguno de libros ni tesis</a:t>
             </a:r>
             <a:endParaRPr lang="en-US" sz="2400" dirty="0"/>
           </a:p>
@@ -17131,7 +19892,7 @@
       </p:graphicFrame>
       <p:sp>
         <p:nvSpPr>
-          <p:cNvPr id="6" name="kpi 431"/>
+          <p:cNvPr id="6" name="kpi 483"/>
           <p:cNvSpPr/>
           <p:nvPr/>
         </p:nvSpPr>
@@ -17189,7 +19950,7 @@
                 <a:ea typeface="Cambria" pitchFamily="34" charset="-122"/>
                 <a:cs typeface="Cambria" pitchFamily="34" charset="-120"/>
               </a:rPr>
-              <a:t>431</a:t>
+              <a:t>483</a:t>
             </a:r>
             <a:endParaRPr lang="en-US" sz="3000" dirty="0"/>
           </a:p>
@@ -17233,7 +19994,7 @@
       </p:sp>
       <p:sp>
         <p:nvSpPr>
-          <p:cNvPr id="9" name="kpi 191"/>
+          <p:cNvPr id="9" name="kpi 192"/>
           <p:cNvSpPr/>
           <p:nvPr/>
         </p:nvSpPr>
@@ -17291,7 +20052,7 @@
                 <a:ea typeface="Cambria" pitchFamily="34" charset="-122"/>
                 <a:cs typeface="Cambria" pitchFamily="34" charset="-120"/>
               </a:rPr>
-              <a:t>191</a:t>
+              <a:t>192</a:t>
             </a:r>
             <a:endParaRPr lang="en-US" sz="3000" dirty="0"/>
           </a:p>
@@ -17335,7 +20096,7 @@
       </p:sp>
       <p:sp>
         <p:nvSpPr>
-          <p:cNvPr id="12" name="kpi 225"/>
+          <p:cNvPr id="12" name="kpi 276"/>
           <p:cNvSpPr/>
           <p:nvPr/>
         </p:nvSpPr>
@@ -17393,7 +20154,7 @@
                 <a:ea typeface="Cambria" pitchFamily="34" charset="-122"/>
                 <a:cs typeface="Cambria" pitchFamily="34" charset="-120"/>
               </a:rPr>
-              <a:t>225</a:t>
+              <a:t>276</a:t>
             </a:r>
             <a:endParaRPr lang="en-US" sz="3000" dirty="0"/>
           </a:p>
@@ -18933,7 +21694,7 @@
                           <a:ea typeface="Calibri" pitchFamily="34" charset="-122"/>
                           <a:cs typeface="Calibri" pitchFamily="34" charset="-120"/>
                         </a:rPr>
-                        <a:t>Si se cumpliera, porque tipo, cantidad o intervalo de relubricación no estaban ajustados a la condición de operación y la temperatura reales, de las que depende la salud del rodamiento.</a:t>
+                        <a:t>Si se cumpliera, porque tipo, cantidad o intervalo de relubricación no estaban ajustados a la condición de operación y la temperatura reales, o por contaminación con agua (ruta A).</a:t>
                       </a:r>
                       <a:endParaRPr lang="en-US" sz="1100" dirty="0">
                         <a:latin typeface="Calibri" charset="0"/>
@@ -19130,7 +21891,7 @@
                           <a:ea typeface="Calibri" pitchFamily="34" charset="-122"/>
                           <a:cs typeface="Calibri" pitchFamily="34" charset="-120"/>
                         </a:rPr>
-                        <a:t>Si se cumpliera, porque la barrera del alojamiento no impidió el ingreso de partículas o humedad, o porque se introdujo durante la instalación o el engrase (a verificar).</a:t>
+                        <a:t>Si se cumpliera, porque la barrera del alojamiento no impidió el ingreso de partículas o humedad (incluida la fuga del prensaestopa, ruta A), o porque se introdujo durante la instalación o el engrase.</a:t>
                       </a:r>
                       <a:endParaRPr lang="en-US" sz="1100" dirty="0">
                         <a:latin typeface="Calibri" charset="0"/>
@@ -19260,7 +22021,7 @@
                           <a:ea typeface="Calibri" pitchFamily="34" charset="-122"/>
                           <a:cs typeface="Calibri" pitchFamily="34" charset="-120"/>
                         </a:rPr>
-                        <a:t>Si se cumpliera, porque la selección y el plan de mantenimiento se apoyaron en la vida nominal, que cubre fatiga en condiciones convencionales, y no trataron la contaminación como modo de falla…</a:t>
+                        <a:t>Si se cumpliera, porque la selección y el plan de mantenimiento se apoyaron en la vida nominal y no trataron la contaminación como modo de falla gestionado. Causa latente a confirmar con registros.</a:t>
                       </a:r>
                       <a:endParaRPr lang="en-US" sz="1100" dirty="0">
                         <a:latin typeface="Calibri" charset="0"/>
@@ -19392,7 +22153,7 @@
                           <a:ea typeface="Calibri" pitchFamily="34" charset="-122"/>
                           <a:cs typeface="Calibri" pitchFamily="34" charset="-120"/>
                         </a:rPr>
-                        <a:t>Si se cumpliera, porque el eje y el soporte quedaron fuera de la posición de diseño, a verificar con medición de alineación.</a:t>
+                        <a:t>Si se cumpliera, porque el eje y el soporte quedaron fuera de la posición de diseño, a verificar con medición.</a:t>
                       </a:r>
                       <a:endParaRPr lang="en-US" sz="1100" dirty="0">
                         <a:latin typeface="Calibri" charset="0"/>
@@ -19457,7 +22218,7 @@
                           <a:ea typeface="Calibri" pitchFamily="34" charset="-122"/>
                           <a:cs typeface="Calibri" pitchFamily="34" charset="-120"/>
                         </a:rPr>
-                        <a:t>Si se cumpliera, por falta de verificación de alineación al montar o tras intervenciones, o por pérdida de posición en servicio; sin fuente leída propia de bombas.</a:t>
+                        <a:t>Si se cumpliera, por falta de verificación al montar o tras intervenciones, o por pérdida de posición en servicio; sin fuente leída propia de bombas.</a:t>
                       </a:r>
                       <a:endParaRPr lang="en-US" sz="1100" dirty="0">
                         <a:latin typeface="Calibri" charset="0"/>
@@ -19522,7 +22283,7 @@
                           <a:ea typeface="Calibri" pitchFamily="34" charset="-122"/>
                           <a:cs typeface="Calibri" pitchFamily="34" charset="-120"/>
                         </a:rPr>
-                        <a:t>Si se cumpliera, porque no hay requisito de verificar alineación en la puesta en servicio ni tras intervenciones, ni indicador que la vigile. Causa latente a confirmar con registros.</a:t>
+                        <a:t>Si se cumpliera, porque no hay requisito de verificar alineación en la puesta en servicio ni tras intervenciones. Causa latente a confirmar con registros.</a:t>
                       </a:r>
                       <a:endParaRPr lang="en-US" sz="1100" dirty="0">
                         <a:latin typeface="Calibri" charset="0"/>
@@ -19605,7 +22366,7 @@
                   <a:schemeClr val="tx1"/>
                 </a:solidFill>
               </a:rPr>
-              <a:t>Hay 11 hipótesis en total, todas posibles; los modos propios de la bomba sin fuente leída no entran como hipótesis.</a:t>
+              <a:t>Hay 14 hipótesis en total, todas posibles; los modos propios de la bomba sin fuente leída no entran como hipótesis.</a:t>
             </a:r>
             <a:endParaRPr lang="en-US" sz="1300" dirty="0"/>
           </a:p>
@@ -19758,7 +22519,7 @@
       </p:sp>
       <p:sp>
         <p:nvSpPr>
-          <p:cNvPr id="4" name="tarjeta Máquina  |  3 con respaldo, 3 síntesis"/>
+          <p:cNvPr id="4" name="tarjeta Máquina  |  4 con respaldo, 5 síntesis"/>
           <p:cNvSpPr/>
           <p:nvPr/>
         </p:nvSpPr>
@@ -19813,7 +22574,7 @@
                   <a:schemeClr val="tx1"/>
                 </a:solidFill>
               </a:rPr>
-              <a:t>Máquina  |  3 con respaldo, 3 síntesis</a:t>
+              <a:t>Máquina  |  4 con respaldo, 5 síntesis</a:t>
             </a:r>
             <a:endParaRPr lang="en-US" sz="1300" dirty="0"/>
           </a:p>
@@ -19889,7 +22650,7 @@
                   <a:schemeClr val="tx1"/>
                 </a:solidFill>
               </a:rPr>
-              <a:t>Carga radial o axial sobre el rodamiento mayor que la de diseño. CONDICION A VERIFICAR.</a:t>
+              <a:t>Carga radial o axial sobre el rodamiento mayor que la de diseño, incluida la que pudie…</a:t>
             </a:r>
             <a:endParaRPr lang="en-US" sz="1100" dirty="0"/>
           </a:p>
@@ -19897,7 +22658,7 @@
       </p:sp>
       <p:sp>
         <p:nvSpPr>
-          <p:cNvPr id="7" name="tarjeta Método  |  0 con respaldo, 3 síntesis"/>
+          <p:cNvPr id="7" name="tarjeta Método  |  0 con respaldo, 5 síntesis"/>
           <p:cNvSpPr/>
           <p:nvPr/>
         </p:nvSpPr>
@@ -19952,7 +22713,7 @@
                   <a:schemeClr val="tx1"/>
                 </a:solidFill>
               </a:rPr>
-              <a:t>Método  |  0 con respaldo, 3 síntesis</a:t>
+              <a:t>Método  |  0 con respaldo, 5 síntesis</a:t>
             </a:r>
             <a:endParaRPr lang="en-US" sz="1300" dirty="0"/>
           </a:p>
@@ -20010,7 +22771,7 @@
                   <a:schemeClr val="tx1"/>
                 </a:solidFill>
               </a:rPr>
-              <a:t>Montaje e instalación del rodamiento sin control suficiente (manipulación previa, méto…</a:t>
+              <a:t>Montaje e instalación del rodamiento sin control suficiente.</a:t>
             </a:r>
             <a:endParaRPr lang="en-US" sz="1100" dirty="0"/>
           </a:p>
@@ -20036,7 +22797,7 @@
       </p:sp>
       <p:sp>
         <p:nvSpPr>
-          <p:cNvPr id="10" name="tarjeta Material  |  2 con respaldo, 2 síntesis"/>
+          <p:cNvPr id="10" name="tarjeta Material  |  2 con respaldo, 3 síntesis"/>
           <p:cNvSpPr/>
           <p:nvPr/>
         </p:nvSpPr>
@@ -20091,7 +22852,7 @@
                   <a:schemeClr val="tx1"/>
                 </a:solidFill>
               </a:rPr>
-              <a:t>Material  |  2 con respaldo, 2 síntesis</a:t>
+              <a:t>Material  |  2 con respaldo, 3 síntesis</a:t>
             </a:r>
             <a:endParaRPr lang="en-US" sz="1300" dirty="0"/>
           </a:p>
@@ -20131,7 +22892,7 @@
                   <a:schemeClr val="tx1"/>
                 </a:solidFill>
               </a:rPr>
-              <a:t>Lubricante degradado, inadecuado o incompatible con la aplicación.</a:t>
+              <a:t>Lubricante degradado, inadecuado o incompatible, o contaminado con agua.</a:t>
             </a:r>
             <a:endParaRPr lang="en-US" sz="1100" dirty="0"/>
           </a:p>
@@ -20175,7 +22936,7 @@
       </p:sp>
       <p:sp>
         <p:nvSpPr>
-          <p:cNvPr id="13" name="tarjeta Mano de obra  |  SIN DATOS PARA ARMARLO"/>
+          <p:cNvPr id="13" name="tarjeta Mano de obra  |  0 con respaldo, 2 síntesis"/>
           <p:cNvSpPr/>
           <p:nvPr/>
         </p:nvSpPr>
@@ -20230,7 +22991,7 @@
                   <a:schemeClr val="tx1"/>
                 </a:solidFill>
               </a:rPr>
-              <a:t>Mano de obra  |  SIN DATOS PARA ARMARLO</a:t>
+              <a:t>Mano de obra  |  0 con respaldo, 2 síntesis</a:t>
             </a:r>
             <a:endParaRPr lang="en-US" sz="1300" dirty="0"/>
           </a:p>
@@ -20270,15 +23031,33 @@
                   <a:schemeClr val="tx1"/>
                 </a:solidFill>
               </a:rPr>
-              <a:t>Datos que faltan: ver el informe HTML</a:t>
+              <a:t>Ajuste del prensaestopa hecho sin conocer el criterio de goteo o el efecto de ajustar …</a:t>
             </a:r>
             <a:endParaRPr lang="en-US" sz="1100" dirty="0"/>
           </a:p>
+          <a:p>
+            <a:pPr marL="342900" indent="-342900">
+              <a:spcAft>
+                <a:spcPts val="400"/>
+              </a:spcAft>
+              <a:buSzPct val="100000"/>
+              <a:buChar char="•"/>
+            </a:pPr>
+            <a:r>
+              <a:rPr lang="en-US" sz="1100" dirty="0">
+                <a:solidFill>
+                  <a:schemeClr val="tx1"/>
+                </a:solidFill>
+              </a:rPr>
+              <a:t>Señales tempranas (fuga continua, ruido, soporte caliente) vistas en ronda pero sin tr…</a:t>
+            </a:r>
+            <a:endParaRPr lang="en-US" sz="1100" dirty="0"/>
+          </a:p>
         </p:txBody>
       </p:sp>
       <p:sp>
         <p:nvSpPr>
-          <p:cNvPr id="16" name="tarjeta Medición  |  3 con respaldo, 2 síntesis"/>
+          <p:cNvPr id="16" name="tarjeta Medición  |  3 con respaldo, 3 síntesis"/>
           <p:cNvSpPr/>
           <p:nvPr/>
         </p:nvSpPr>
@@ -20333,7 +23112,7 @@
                   <a:schemeClr val="tx1"/>
                 </a:solidFill>
               </a:rPr>
-              <a:t>Medición  |  3 con respaldo, 2 síntesis</a:t>
+              <a:t>Medición  |  3 con respaldo, 3 síntesis</a:t>
             </a:r>
             <a:endParaRPr lang="en-US" sz="1300" dirty="0"/>
           </a:p>
@@ -20417,7 +23196,7 @@
       </p:sp>
       <p:sp>
         <p:nvSpPr>
-          <p:cNvPr id="19" name="tarjeta Medio ambiente  |  SIN DATOS PARA ARMARLO"/>
+          <p:cNvPr id="19" name="tarjeta Medio ambiente  |  0 con respaldo, 2 síntesis"/>
           <p:cNvSpPr/>
           <p:nvPr/>
         </p:nvSpPr>
@@ -20472,7 +23251,7 @@
                   <a:schemeClr val="tx1"/>
                 </a:solidFill>
               </a:rPr>
-              <a:t>Medio ambiente  |  SIN DATOS PARA ARMARLO</a:t>
+              <a:t>Medio ambiente  |  0 con respaldo, 2 síntesis</a:t>
             </a:r>
             <a:endParaRPr lang="en-US" sz="1300" dirty="0"/>
           </a:p>
@@ -20512,7 +23291,25 @@
                   <a:schemeClr val="tx1"/>
                 </a:solidFill>
               </a:rPr>
-              <a:t>Datos que faltan: ver el informe HTML</a:t>
+              <a:t>Presencia de agua de lavado, fuga o humedad en el entorno del soporte. CONDICION A VER…</a:t>
+            </a:r>
+            <a:endParaRPr lang="en-US" sz="1100" dirty="0"/>
+          </a:p>
+          <a:p>
+            <a:pPr marL="342900" indent="-342900">
+              <a:spcAft>
+                <a:spcPts val="400"/>
+              </a:spcAft>
+              <a:buSzPct val="100000"/>
+              <a:buChar char="•"/>
+            </a:pPr>
+            <a:r>
+              <a:rPr lang="en-US" sz="1100" dirty="0">
+                <a:solidFill>
+                  <a:schemeClr val="tx1"/>
+                </a:solidFill>
+              </a:rPr>
+              <a:t>Temperatura ambiente, carcasa caliente o fluido caliente que eleva la temperatura del …</a:t>
             </a:r>
             <a:endParaRPr lang="en-US" sz="1100" dirty="0"/>
           </a:p>
@@ -20621,7 +23418,7 @@
                 <a:ea typeface="Cambria" pitchFamily="34" charset="-122"/>
                 <a:cs typeface="Cambria" pitchFamily="34" charset="-120"/>
               </a:rPr>
-              <a:t>El FMECA lista 7 modos de falla del rodamiento; el aporte del prensaestopa queda como vacío con la pista por leer</a:t>
+              <a:t>El FMECA lista 14 modos de falla del rodamiento; el aporte del prensaestopa queda como vacío con la pista por leer</a:t>
             </a:r>
             <a:endParaRPr lang="en-US" sz="2400" dirty="0"/>
           </a:p>
@@ -22751,6 +25548,1840 @@
                           <a:cs typeface="Calibri" pitchFamily="34" charset="-120"/>
                         </a:rPr>
                         <a:t>Rediseño de procedimiento (consecuencia: A confirmar). La causa es de método de trabajo; mejorar el procedimiento y verificar con el…</a:t>
+                      </a:r>
+                      <a:endParaRPr lang="en-US" sz="1000" dirty="0">
+                        <a:latin typeface="Calibri" charset="0"/>
+                        <a:ea typeface="Calibri" charset="0"/>
+                        <a:cs typeface="Calibri" charset="0"/>
+                      </a:endParaRPr>
+                    </a:p>
+                  </a:txBody>
+                  <a:tcPr marL="91440" marR="91440" marT="45720" marB="45720" anchor="t">
+                    <a:lnL w="9525" cap="flat" cmpd="sng" algn="ctr">
+                      <a:solidFill>
+                        <a:srgbClr val="DDE9EE"/>
+                      </a:solidFill>
+                      <a:prstDash val="solid"/>
+                      <a:round/>
+                      <a:headEnd type="none" w="med" len="med"/>
+                      <a:tailEnd type="none" w="med" len="med"/>
+                    </a:lnL>
+                    <a:lnR w="9525" cap="flat" cmpd="sng" algn="ctr">
+                      <a:solidFill>
+                        <a:srgbClr val="DDE9EE"/>
+                      </a:solidFill>
+                      <a:prstDash val="solid"/>
+                      <a:round/>
+                      <a:headEnd type="none" w="med" len="med"/>
+                      <a:tailEnd type="none" w="med" len="med"/>
+                    </a:lnR>
+                    <a:lnT w="9525" cap="flat" cmpd="sng" algn="ctr">
+                      <a:solidFill>
+                        <a:srgbClr val="DDE9EE"/>
+                      </a:solidFill>
+                      <a:prstDash val="solid"/>
+                      <a:round/>
+                      <a:headEnd type="none" w="med" len="med"/>
+                      <a:tailEnd type="none" w="med" len="med"/>
+                    </a:lnT>
+                    <a:lnB w="9525" cap="flat" cmpd="sng" algn="ctr">
+                      <a:solidFill>
+                        <a:srgbClr val="DDE9EE"/>
+                      </a:solidFill>
+                      <a:prstDash val="solid"/>
+                      <a:round/>
+                      <a:headEnd type="none" w="med" len="med"/>
+                      <a:tailEnd type="none" w="med" len="med"/>
+                    </a:lnB>
+                  </a:tcPr>
+                </a:tc>
+              </a:tr>
+              <a:tr h="566928">
+                <a:tc>
+                  <a:txBody>
+                    <a:bodyPr/>
+                    <a:lstStyle/>
+                    <a:p>
+                      <a:pPr indent="0" marL="0">
+                        <a:buNone/>
+                      </a:pPr>
+                      <a:r>
+                        <a:rPr lang="en-US" sz="1100" b="1" dirty="0">
+                          <a:solidFill>
+                            <a:schemeClr val="tx1"/>
+                          </a:solidFill>
+                          <a:latin typeface="Calibri" pitchFamily="34" charset="0"/>
+                          <a:ea typeface="Calibri" pitchFamily="34" charset="-122"/>
+                          <a:cs typeface="Calibri" pitchFamily="34" charset="-120"/>
+                        </a:rPr>
+                        <a:t>FM8</a:t>
+                      </a:r>
+                      <a:endParaRPr lang="en-US" sz="1100" dirty="0">
+                        <a:latin typeface="Calibri" charset="0"/>
+                        <a:ea typeface="Calibri" charset="0"/>
+                        <a:cs typeface="Calibri" charset="0"/>
+                      </a:endParaRPr>
+                    </a:p>
+                  </a:txBody>
+                  <a:tcPr marL="91440" marR="91440" marT="45720" marB="45720" anchor="t">
+                    <a:lnL w="9525" cap="flat" cmpd="sng" algn="ctr">
+                      <a:solidFill>
+                        <a:srgbClr val="DDE9EE"/>
+                      </a:solidFill>
+                      <a:prstDash val="solid"/>
+                      <a:round/>
+                      <a:headEnd type="none" w="med" len="med"/>
+                      <a:tailEnd type="none" w="med" len="med"/>
+                    </a:lnL>
+                    <a:lnR w="9525" cap="flat" cmpd="sng" algn="ctr">
+                      <a:solidFill>
+                        <a:srgbClr val="DDE9EE"/>
+                      </a:solidFill>
+                      <a:prstDash val="solid"/>
+                      <a:round/>
+                      <a:headEnd type="none" w="med" len="med"/>
+                      <a:tailEnd type="none" w="med" len="med"/>
+                    </a:lnR>
+                    <a:lnT w="9525" cap="flat" cmpd="sng" algn="ctr">
+                      <a:solidFill>
+                        <a:srgbClr val="DDE9EE"/>
+                      </a:solidFill>
+                      <a:prstDash val="solid"/>
+                      <a:round/>
+                      <a:headEnd type="none" w="med" len="med"/>
+                      <a:tailEnd type="none" w="med" len="med"/>
+                    </a:lnT>
+                    <a:lnB w="9525" cap="flat" cmpd="sng" algn="ctr">
+                      <a:solidFill>
+                        <a:srgbClr val="DDE9EE"/>
+                      </a:solidFill>
+                      <a:prstDash val="solid"/>
+                      <a:round/>
+                      <a:headEnd type="none" w="med" len="med"/>
+                      <a:tailEnd type="none" w="med" len="med"/>
+                    </a:lnB>
+                  </a:tcPr>
+                </a:tc>
+                <a:tc>
+                  <a:txBody>
+                    <a:bodyPr/>
+                    <a:lstStyle/>
+                    <a:p>
+                      <a:pPr indent="0" marL="0">
+                        <a:buNone/>
+                      </a:pPr>
+                      <a:r>
+                        <a:rPr lang="en-US" sz="1100" dirty="0">
+                          <a:solidFill>
+                            <a:schemeClr val="tx1"/>
+                          </a:solidFill>
+                          <a:latin typeface="Calibri" pitchFamily="34" charset="0"/>
+                          <a:ea typeface="Calibri" pitchFamily="34" charset="-122"/>
+                          <a:cs typeface="Calibri" pitchFamily="34" charset="-120"/>
+                        </a:rPr>
+                        <a:t>Empaquetadura con ajuste insuficiente (fuga excesiva)</a:t>
+                      </a:r>
+                      <a:endParaRPr lang="en-US" sz="1100" dirty="0">
+                        <a:latin typeface="Calibri" charset="0"/>
+                        <a:ea typeface="Calibri" charset="0"/>
+                        <a:cs typeface="Calibri" charset="0"/>
+                      </a:endParaRPr>
+                    </a:p>
+                  </a:txBody>
+                  <a:tcPr marL="91440" marR="91440" marT="45720" marB="45720" anchor="t">
+                    <a:lnL w="9525" cap="flat" cmpd="sng" algn="ctr">
+                      <a:solidFill>
+                        <a:srgbClr val="DDE9EE"/>
+                      </a:solidFill>
+                      <a:prstDash val="solid"/>
+                      <a:round/>
+                      <a:headEnd type="none" w="med" len="med"/>
+                      <a:tailEnd type="none" w="med" len="med"/>
+                    </a:lnL>
+                    <a:lnR w="9525" cap="flat" cmpd="sng" algn="ctr">
+                      <a:solidFill>
+                        <a:srgbClr val="DDE9EE"/>
+                      </a:solidFill>
+                      <a:prstDash val="solid"/>
+                      <a:round/>
+                      <a:headEnd type="none" w="med" len="med"/>
+                      <a:tailEnd type="none" w="med" len="med"/>
+                    </a:lnR>
+                    <a:lnT w="9525" cap="flat" cmpd="sng" algn="ctr">
+                      <a:solidFill>
+                        <a:srgbClr val="DDE9EE"/>
+                      </a:solidFill>
+                      <a:prstDash val="solid"/>
+                      <a:round/>
+                      <a:headEnd type="none" w="med" len="med"/>
+                      <a:tailEnd type="none" w="med" len="med"/>
+                    </a:lnT>
+                    <a:lnB w="9525" cap="flat" cmpd="sng" algn="ctr">
+                      <a:solidFill>
+                        <a:srgbClr val="DDE9EE"/>
+                      </a:solidFill>
+                      <a:prstDash val="solid"/>
+                      <a:round/>
+                      <a:headEnd type="none" w="med" len="med"/>
+                      <a:tailEnd type="none" w="med" len="med"/>
+                    </a:lnB>
+                  </a:tcPr>
+                </a:tc>
+                <a:tc>
+                  <a:txBody>
+                    <a:bodyPr/>
+                    <a:lstStyle/>
+                    <a:p>
+                      <a:pPr indent="0" marL="0">
+                        <a:buNone/>
+                      </a:pPr>
+                      <a:r>
+                        <a:rPr lang="en-US" sz="1000" dirty="0">
+                          <a:solidFill>
+                            <a:schemeClr val="tx1"/>
+                          </a:solidFill>
+                          <a:latin typeface="Calibri" pitchFamily="34" charset="0"/>
+                          <a:ea typeface="Calibri" pitchFamily="34" charset="-122"/>
+                          <a:cs typeface="Calibri" pitchFamily="34" charset="-120"/>
+                        </a:rPr>
+                        <a:t>Inspección visual del goteo y de su tendencia: consta en pista, sin respaldo (E-2104, E-2000 SOLO-SNIPPET). E-2700 no entrega técnica de…</a:t>
+                      </a:r>
+                      <a:endParaRPr lang="en-US" sz="1000" dirty="0">
+                        <a:latin typeface="Calibri" charset="0"/>
+                        <a:ea typeface="Calibri" charset="0"/>
+                        <a:cs typeface="Calibri" charset="0"/>
+                      </a:endParaRPr>
+                    </a:p>
+                  </a:txBody>
+                  <a:tcPr marL="91440" marR="91440" marT="45720" marB="45720" anchor="t">
+                    <a:lnL w="9525" cap="flat" cmpd="sng" algn="ctr">
+                      <a:solidFill>
+                        <a:srgbClr val="DDE9EE"/>
+                      </a:solidFill>
+                      <a:prstDash val="solid"/>
+                      <a:round/>
+                      <a:headEnd type="none" w="med" len="med"/>
+                      <a:tailEnd type="none" w="med" len="med"/>
+                    </a:lnL>
+                    <a:lnR w="9525" cap="flat" cmpd="sng" algn="ctr">
+                      <a:solidFill>
+                        <a:srgbClr val="DDE9EE"/>
+                      </a:solidFill>
+                      <a:prstDash val="solid"/>
+                      <a:round/>
+                      <a:headEnd type="none" w="med" len="med"/>
+                      <a:tailEnd type="none" w="med" len="med"/>
+                    </a:lnR>
+                    <a:lnT w="9525" cap="flat" cmpd="sng" algn="ctr">
+                      <a:solidFill>
+                        <a:srgbClr val="DDE9EE"/>
+                      </a:solidFill>
+                      <a:prstDash val="solid"/>
+                      <a:round/>
+                      <a:headEnd type="none" w="med" len="med"/>
+                      <a:tailEnd type="none" w="med" len="med"/>
+                    </a:lnT>
+                    <a:lnB w="9525" cap="flat" cmpd="sng" algn="ctr">
+                      <a:solidFill>
+                        <a:srgbClr val="DDE9EE"/>
+                      </a:solidFill>
+                      <a:prstDash val="solid"/>
+                      <a:round/>
+                      <a:headEnd type="none" w="med" len="med"/>
+                      <a:tailEnd type="none" w="med" len="med"/>
+                    </a:lnB>
+                  </a:tcPr>
+                </a:tc>
+                <a:tc>
+                  <a:txBody>
+                    <a:bodyPr/>
+                    <a:lstStyle/>
+                    <a:p>
+                      <a:pPr indent="0" marL="0">
+                        <a:buNone/>
+                      </a:pPr>
+                      <a:r>
+                        <a:rPr lang="en-US" sz="1000" dirty="0">
+                          <a:solidFill>
+                            <a:schemeClr val="tx1"/>
+                          </a:solidFill>
+                          <a:latin typeface="Calibri" pitchFamily="34" charset="0"/>
+                          <a:ea typeface="Calibri" pitchFamily="34" charset="-122"/>
+                          <a:cs typeface="Calibri" pitchFamily="34" charset="-120"/>
+                        </a:rPr>
+                        <a:t>En condición (inspección de goteo) y tarea de ajuste con criterio escrito (consecuencia: A confirmar; fuga visible, por tanto evidente…</a:t>
+                      </a:r>
+                      <a:endParaRPr lang="en-US" sz="1000" dirty="0">
+                        <a:latin typeface="Calibri" charset="0"/>
+                        <a:ea typeface="Calibri" charset="0"/>
+                        <a:cs typeface="Calibri" charset="0"/>
+                      </a:endParaRPr>
+                    </a:p>
+                  </a:txBody>
+                  <a:tcPr marL="91440" marR="91440" marT="45720" marB="45720" anchor="t">
+                    <a:lnL w="9525" cap="flat" cmpd="sng" algn="ctr">
+                      <a:solidFill>
+                        <a:srgbClr val="DDE9EE"/>
+                      </a:solidFill>
+                      <a:prstDash val="solid"/>
+                      <a:round/>
+                      <a:headEnd type="none" w="med" len="med"/>
+                      <a:tailEnd type="none" w="med" len="med"/>
+                    </a:lnL>
+                    <a:lnR w="9525" cap="flat" cmpd="sng" algn="ctr">
+                      <a:solidFill>
+                        <a:srgbClr val="DDE9EE"/>
+                      </a:solidFill>
+                      <a:prstDash val="solid"/>
+                      <a:round/>
+                      <a:headEnd type="none" w="med" len="med"/>
+                      <a:tailEnd type="none" w="med" len="med"/>
+                    </a:lnR>
+                    <a:lnT w="9525" cap="flat" cmpd="sng" algn="ctr">
+                      <a:solidFill>
+                        <a:srgbClr val="DDE9EE"/>
+                      </a:solidFill>
+                      <a:prstDash val="solid"/>
+                      <a:round/>
+                      <a:headEnd type="none" w="med" len="med"/>
+                      <a:tailEnd type="none" w="med" len="med"/>
+                    </a:lnT>
+                    <a:lnB w="9525" cap="flat" cmpd="sng" algn="ctr">
+                      <a:solidFill>
+                        <a:srgbClr val="DDE9EE"/>
+                      </a:solidFill>
+                      <a:prstDash val="solid"/>
+                      <a:round/>
+                      <a:headEnd type="none" w="med" len="med"/>
+                      <a:tailEnd type="none" w="med" len="med"/>
+                    </a:lnB>
+                  </a:tcPr>
+                </a:tc>
+              </a:tr>
+              <a:tr h="566928">
+                <a:tc>
+                  <a:txBody>
+                    <a:bodyPr/>
+                    <a:lstStyle/>
+                    <a:p>
+                      <a:pPr indent="0" marL="0">
+                        <a:buNone/>
+                      </a:pPr>
+                      <a:r>
+                        <a:rPr lang="en-US" sz="1100" b="1" dirty="0">
+                          <a:solidFill>
+                            <a:schemeClr val="tx1"/>
+                          </a:solidFill>
+                          <a:latin typeface="Calibri" pitchFamily="34" charset="0"/>
+                          <a:ea typeface="Calibri" pitchFamily="34" charset="-122"/>
+                          <a:cs typeface="Calibri" pitchFamily="34" charset="-120"/>
+                        </a:rPr>
+                        <a:t>FM9</a:t>
+                      </a:r>
+                      <a:endParaRPr lang="en-US" sz="1100" dirty="0">
+                        <a:latin typeface="Calibri" charset="0"/>
+                        <a:ea typeface="Calibri" charset="0"/>
+                        <a:cs typeface="Calibri" charset="0"/>
+                      </a:endParaRPr>
+                    </a:p>
+                  </a:txBody>
+                  <a:tcPr marL="91440" marR="91440" marT="45720" marB="45720" anchor="t">
+                    <a:lnL w="9525" cap="flat" cmpd="sng" algn="ctr">
+                      <a:solidFill>
+                        <a:srgbClr val="DDE9EE"/>
+                      </a:solidFill>
+                      <a:prstDash val="solid"/>
+                      <a:round/>
+                      <a:headEnd type="none" w="med" len="med"/>
+                      <a:tailEnd type="none" w="med" len="med"/>
+                    </a:lnL>
+                    <a:lnR w="9525" cap="flat" cmpd="sng" algn="ctr">
+                      <a:solidFill>
+                        <a:srgbClr val="DDE9EE"/>
+                      </a:solidFill>
+                      <a:prstDash val="solid"/>
+                      <a:round/>
+                      <a:headEnd type="none" w="med" len="med"/>
+                      <a:tailEnd type="none" w="med" len="med"/>
+                    </a:lnR>
+                    <a:lnT w="9525" cap="flat" cmpd="sng" algn="ctr">
+                      <a:solidFill>
+                        <a:srgbClr val="DDE9EE"/>
+                      </a:solidFill>
+                      <a:prstDash val="solid"/>
+                      <a:round/>
+                      <a:headEnd type="none" w="med" len="med"/>
+                      <a:tailEnd type="none" w="med" len="med"/>
+                    </a:lnT>
+                    <a:lnB w="9525" cap="flat" cmpd="sng" algn="ctr">
+                      <a:solidFill>
+                        <a:srgbClr val="DDE9EE"/>
+                      </a:solidFill>
+                      <a:prstDash val="solid"/>
+                      <a:round/>
+                      <a:headEnd type="none" w="med" len="med"/>
+                      <a:tailEnd type="none" w="med" len="med"/>
+                    </a:lnB>
+                  </a:tcPr>
+                </a:tc>
+                <a:tc>
+                  <a:txBody>
+                    <a:bodyPr/>
+                    <a:lstStyle/>
+                    <a:p>
+                      <a:pPr indent="0" marL="0">
+                        <a:buNone/>
+                      </a:pPr>
+                      <a:r>
+                        <a:rPr lang="en-US" sz="1100" dirty="0">
+                          <a:solidFill>
+                            <a:schemeClr val="tx1"/>
+                          </a:solidFill>
+                          <a:latin typeface="Calibri" pitchFamily="34" charset="0"/>
+                          <a:ea typeface="Calibri" pitchFamily="34" charset="-122"/>
+                          <a:cs typeface="Calibri" pitchFamily="34" charset="-120"/>
+                        </a:rPr>
+                        <a:t>Empaquetadura con apriete excesivo (recalentamiento y cristalización)</a:t>
+                      </a:r>
+                      <a:endParaRPr lang="en-US" sz="1100" dirty="0">
+                        <a:latin typeface="Calibri" charset="0"/>
+                        <a:ea typeface="Calibri" charset="0"/>
+                        <a:cs typeface="Calibri" charset="0"/>
+                      </a:endParaRPr>
+                    </a:p>
+                  </a:txBody>
+                  <a:tcPr marL="91440" marR="91440" marT="45720" marB="45720" anchor="t">
+                    <a:lnL w="9525" cap="flat" cmpd="sng" algn="ctr">
+                      <a:solidFill>
+                        <a:srgbClr val="DDE9EE"/>
+                      </a:solidFill>
+                      <a:prstDash val="solid"/>
+                      <a:round/>
+                      <a:headEnd type="none" w="med" len="med"/>
+                      <a:tailEnd type="none" w="med" len="med"/>
+                    </a:lnL>
+                    <a:lnR w="9525" cap="flat" cmpd="sng" algn="ctr">
+                      <a:solidFill>
+                        <a:srgbClr val="DDE9EE"/>
+                      </a:solidFill>
+                      <a:prstDash val="solid"/>
+                      <a:round/>
+                      <a:headEnd type="none" w="med" len="med"/>
+                      <a:tailEnd type="none" w="med" len="med"/>
+                    </a:lnR>
+                    <a:lnT w="9525" cap="flat" cmpd="sng" algn="ctr">
+                      <a:solidFill>
+                        <a:srgbClr val="DDE9EE"/>
+                      </a:solidFill>
+                      <a:prstDash val="solid"/>
+                      <a:round/>
+                      <a:headEnd type="none" w="med" len="med"/>
+                      <a:tailEnd type="none" w="med" len="med"/>
+                    </a:lnT>
+                    <a:lnB w="9525" cap="flat" cmpd="sng" algn="ctr">
+                      <a:solidFill>
+                        <a:srgbClr val="DDE9EE"/>
+                      </a:solidFill>
+                      <a:prstDash val="solid"/>
+                      <a:round/>
+                      <a:headEnd type="none" w="med" len="med"/>
+                      <a:tailEnd type="none" w="med" len="med"/>
+                    </a:lnB>
+                  </a:tcPr>
+                </a:tc>
+                <a:tc>
+                  <a:txBody>
+                    <a:bodyPr/>
+                    <a:lstStyle/>
+                    <a:p>
+                      <a:pPr indent="0" marL="0">
+                        <a:buNone/>
+                      </a:pPr>
+                      <a:r>
+                        <a:rPr lang="en-US" sz="1000" dirty="0">
+                          <a:solidFill>
+                            <a:schemeClr val="tx1"/>
+                          </a:solidFill>
+                          <a:latin typeface="Calibri" pitchFamily="34" charset="0"/>
+                          <a:ea typeface="Calibri" pitchFamily="34" charset="-122"/>
+                          <a:cs typeface="Calibri" pitchFamily="34" charset="-120"/>
+                        </a:rPr>
+                        <a:t>Ausencia de goteo y temperatura de la caja de empaquetadura: consta en pista, sin respaldo (E-2000, E-2001 SOLO-SNIPPET). E-2700 no entrega…</a:t>
+                      </a:r>
+                      <a:endParaRPr lang="en-US" sz="1000" dirty="0">
+                        <a:latin typeface="Calibri" charset="0"/>
+                        <a:ea typeface="Calibri" charset="0"/>
+                        <a:cs typeface="Calibri" charset="0"/>
+                      </a:endParaRPr>
+                    </a:p>
+                  </a:txBody>
+                  <a:tcPr marL="91440" marR="91440" marT="45720" marB="45720" anchor="t">
+                    <a:lnL w="9525" cap="flat" cmpd="sng" algn="ctr">
+                      <a:solidFill>
+                        <a:srgbClr val="DDE9EE"/>
+                      </a:solidFill>
+                      <a:prstDash val="solid"/>
+                      <a:round/>
+                      <a:headEnd type="none" w="med" len="med"/>
+                      <a:tailEnd type="none" w="med" len="med"/>
+                    </a:lnL>
+                    <a:lnR w="9525" cap="flat" cmpd="sng" algn="ctr">
+                      <a:solidFill>
+                        <a:srgbClr val="DDE9EE"/>
+                      </a:solidFill>
+                      <a:prstDash val="solid"/>
+                      <a:round/>
+                      <a:headEnd type="none" w="med" len="med"/>
+                      <a:tailEnd type="none" w="med" len="med"/>
+                    </a:lnR>
+                    <a:lnT w="9525" cap="flat" cmpd="sng" algn="ctr">
+                      <a:solidFill>
+                        <a:srgbClr val="DDE9EE"/>
+                      </a:solidFill>
+                      <a:prstDash val="solid"/>
+                      <a:round/>
+                      <a:headEnd type="none" w="med" len="med"/>
+                      <a:tailEnd type="none" w="med" len="med"/>
+                    </a:lnT>
+                    <a:lnB w="9525" cap="flat" cmpd="sng" algn="ctr">
+                      <a:solidFill>
+                        <a:srgbClr val="DDE9EE"/>
+                      </a:solidFill>
+                      <a:prstDash val="solid"/>
+                      <a:round/>
+                      <a:headEnd type="none" w="med" len="med"/>
+                      <a:tailEnd type="none" w="med" len="med"/>
+                    </a:lnB>
+                  </a:tcPr>
+                </a:tc>
+                <a:tc>
+                  <a:txBody>
+                    <a:bodyPr/>
+                    <a:lstStyle/>
+                    <a:p>
+                      <a:pPr indent="0" marL="0">
+                        <a:buNone/>
+                      </a:pPr>
+                      <a:r>
+                        <a:rPr lang="en-US" sz="1000" dirty="0">
+                          <a:solidFill>
+                            <a:schemeClr val="tx1"/>
+                          </a:solidFill>
+                          <a:latin typeface="Calibri" pitchFamily="34" charset="0"/>
+                          <a:ea typeface="Calibri" pitchFamily="34" charset="-122"/>
+                          <a:cs typeface="Calibri" pitchFamily="34" charset="-120"/>
+                        </a:rPr>
+                        <a:t>Rediseño del procedimiento de ajuste (criterio) y en condición (temperatura y goteo) (consecuencia: A confirmar). La causa está en el…</a:t>
+                      </a:r>
+                      <a:endParaRPr lang="en-US" sz="1000" dirty="0">
+                        <a:latin typeface="Calibri" charset="0"/>
+                        <a:ea typeface="Calibri" charset="0"/>
+                        <a:cs typeface="Calibri" charset="0"/>
+                      </a:endParaRPr>
+                    </a:p>
+                  </a:txBody>
+                  <a:tcPr marL="91440" marR="91440" marT="45720" marB="45720" anchor="t">
+                    <a:lnL w="9525" cap="flat" cmpd="sng" algn="ctr">
+                      <a:solidFill>
+                        <a:srgbClr val="DDE9EE"/>
+                      </a:solidFill>
+                      <a:prstDash val="solid"/>
+                      <a:round/>
+                      <a:headEnd type="none" w="med" len="med"/>
+                      <a:tailEnd type="none" w="med" len="med"/>
+                    </a:lnL>
+                    <a:lnR w="9525" cap="flat" cmpd="sng" algn="ctr">
+                      <a:solidFill>
+                        <a:srgbClr val="DDE9EE"/>
+                      </a:solidFill>
+                      <a:prstDash val="solid"/>
+                      <a:round/>
+                      <a:headEnd type="none" w="med" len="med"/>
+                      <a:tailEnd type="none" w="med" len="med"/>
+                    </a:lnR>
+                    <a:lnT w="9525" cap="flat" cmpd="sng" algn="ctr">
+                      <a:solidFill>
+                        <a:srgbClr val="DDE9EE"/>
+                      </a:solidFill>
+                      <a:prstDash val="solid"/>
+                      <a:round/>
+                      <a:headEnd type="none" w="med" len="med"/>
+                      <a:tailEnd type="none" w="med" len="med"/>
+                    </a:lnT>
+                    <a:lnB w="9525" cap="flat" cmpd="sng" algn="ctr">
+                      <a:solidFill>
+                        <a:srgbClr val="DDE9EE"/>
+                      </a:solidFill>
+                      <a:prstDash val="solid"/>
+                      <a:round/>
+                      <a:headEnd type="none" w="med" len="med"/>
+                      <a:tailEnd type="none" w="med" len="med"/>
+                    </a:lnB>
+                  </a:tcPr>
+                </a:tc>
+              </a:tr>
+              <a:tr h="566928">
+                <a:tc>
+                  <a:txBody>
+                    <a:bodyPr/>
+                    <a:lstStyle/>
+                    <a:p>
+                      <a:pPr indent="0" marL="0">
+                        <a:buNone/>
+                      </a:pPr>
+                      <a:r>
+                        <a:rPr lang="en-US" sz="1100" b="1" dirty="0">
+                          <a:solidFill>
+                            <a:schemeClr val="tx1"/>
+                          </a:solidFill>
+                          <a:latin typeface="Calibri" pitchFamily="34" charset="0"/>
+                          <a:ea typeface="Calibri" pitchFamily="34" charset="-122"/>
+                          <a:cs typeface="Calibri" pitchFamily="34" charset="-120"/>
+                        </a:rPr>
+                        <a:t>FM10</a:t>
+                      </a:r>
+                      <a:endParaRPr lang="en-US" sz="1100" dirty="0">
+                        <a:latin typeface="Calibri" charset="0"/>
+                        <a:ea typeface="Calibri" charset="0"/>
+                        <a:cs typeface="Calibri" charset="0"/>
+                      </a:endParaRPr>
+                    </a:p>
+                  </a:txBody>
+                  <a:tcPr marL="91440" marR="91440" marT="45720" marB="45720" anchor="t">
+                    <a:lnL w="9525" cap="flat" cmpd="sng" algn="ctr">
+                      <a:solidFill>
+                        <a:srgbClr val="DDE9EE"/>
+                      </a:solidFill>
+                      <a:prstDash val="solid"/>
+                      <a:round/>
+                      <a:headEnd type="none" w="med" len="med"/>
+                      <a:tailEnd type="none" w="med" len="med"/>
+                    </a:lnL>
+                    <a:lnR w="9525" cap="flat" cmpd="sng" algn="ctr">
+                      <a:solidFill>
+                        <a:srgbClr val="DDE9EE"/>
+                      </a:solidFill>
+                      <a:prstDash val="solid"/>
+                      <a:round/>
+                      <a:headEnd type="none" w="med" len="med"/>
+                      <a:tailEnd type="none" w="med" len="med"/>
+                    </a:lnR>
+                    <a:lnT w="9525" cap="flat" cmpd="sng" algn="ctr">
+                      <a:solidFill>
+                        <a:srgbClr val="DDE9EE"/>
+                      </a:solidFill>
+                      <a:prstDash val="solid"/>
+                      <a:round/>
+                      <a:headEnd type="none" w="med" len="med"/>
+                      <a:tailEnd type="none" w="med" len="med"/>
+                    </a:lnT>
+                    <a:lnB w="9525" cap="flat" cmpd="sng" algn="ctr">
+                      <a:solidFill>
+                        <a:srgbClr val="DDE9EE"/>
+                      </a:solidFill>
+                      <a:prstDash val="solid"/>
+                      <a:round/>
+                      <a:headEnd type="none" w="med" len="med"/>
+                      <a:tailEnd type="none" w="med" len="med"/>
+                    </a:lnB>
+                  </a:tcPr>
+                </a:tc>
+                <a:tc>
+                  <a:txBody>
+                    <a:bodyPr/>
+                    <a:lstStyle/>
+                    <a:p>
+                      <a:pPr indent="0" marL="0">
+                        <a:buNone/>
+                      </a:pPr>
+                      <a:r>
+                        <a:rPr lang="en-US" sz="1100" dirty="0">
+                          <a:solidFill>
+                            <a:schemeClr val="tx1"/>
+                          </a:solidFill>
+                          <a:latin typeface="Calibri" pitchFamily="34" charset="0"/>
+                          <a:ea typeface="Calibri" pitchFamily="34" charset="-122"/>
+                          <a:cs typeface="Calibri" pitchFamily="34" charset="-120"/>
+                        </a:rPr>
+                        <a:t>Ingreso de agua al soporte de rodamientos</a:t>
+                      </a:r>
+                      <a:endParaRPr lang="en-US" sz="1100" dirty="0">
+                        <a:latin typeface="Calibri" charset="0"/>
+                        <a:ea typeface="Calibri" charset="0"/>
+                        <a:cs typeface="Calibri" charset="0"/>
+                      </a:endParaRPr>
+                    </a:p>
+                  </a:txBody>
+                  <a:tcPr marL="91440" marR="91440" marT="45720" marB="45720" anchor="t">
+                    <a:lnL w="9525" cap="flat" cmpd="sng" algn="ctr">
+                      <a:solidFill>
+                        <a:srgbClr val="DDE9EE"/>
+                      </a:solidFill>
+                      <a:prstDash val="solid"/>
+                      <a:round/>
+                      <a:headEnd type="none" w="med" len="med"/>
+                      <a:tailEnd type="none" w="med" len="med"/>
+                    </a:lnL>
+                    <a:lnR w="9525" cap="flat" cmpd="sng" algn="ctr">
+                      <a:solidFill>
+                        <a:srgbClr val="DDE9EE"/>
+                      </a:solidFill>
+                      <a:prstDash val="solid"/>
+                      <a:round/>
+                      <a:headEnd type="none" w="med" len="med"/>
+                      <a:tailEnd type="none" w="med" len="med"/>
+                    </a:lnR>
+                    <a:lnT w="9525" cap="flat" cmpd="sng" algn="ctr">
+                      <a:solidFill>
+                        <a:srgbClr val="DDE9EE"/>
+                      </a:solidFill>
+                      <a:prstDash val="solid"/>
+                      <a:round/>
+                      <a:headEnd type="none" w="med" len="med"/>
+                      <a:tailEnd type="none" w="med" len="med"/>
+                    </a:lnT>
+                    <a:lnB w="9525" cap="flat" cmpd="sng" algn="ctr">
+                      <a:solidFill>
+                        <a:srgbClr val="DDE9EE"/>
+                      </a:solidFill>
+                      <a:prstDash val="solid"/>
+                      <a:round/>
+                      <a:headEnd type="none" w="med" len="med"/>
+                      <a:tailEnd type="none" w="med" len="med"/>
+                    </a:lnB>
+                  </a:tcPr>
+                </a:tc>
+                <a:tc>
+                  <a:txBody>
+                    <a:bodyPr/>
+                    <a:lstStyle/>
+                    <a:p>
+                      <a:pPr indent="0" marL="0">
+                        <a:buNone/>
+                      </a:pPr>
+                      <a:r>
+                        <a:rPr lang="en-US" sz="1000" dirty="0">
+                          <a:solidFill>
+                            <a:schemeClr val="tx1"/>
+                          </a:solidFill>
+                          <a:latin typeface="Calibri" pitchFamily="34" charset="0"/>
+                          <a:ea typeface="Calibri" pitchFamily="34" charset="-122"/>
+                          <a:cs typeface="Calibri" pitchFamily="34" charset="-120"/>
+                        </a:rPr>
+                        <a:t>Inspección del soporte por agua (mirilla, aceite lechoso, humedad, oxidación): consta en pista, sin respaldo (E-2211, E-2616 SOLO-SNIPPET);…</a:t>
+                      </a:r>
+                      <a:endParaRPr lang="en-US" sz="1000" dirty="0">
+                        <a:latin typeface="Calibri" charset="0"/>
+                        <a:ea typeface="Calibri" charset="0"/>
+                        <a:cs typeface="Calibri" charset="0"/>
+                      </a:endParaRPr>
+                    </a:p>
+                  </a:txBody>
+                  <a:tcPr marL="91440" marR="91440" marT="45720" marB="45720" anchor="t">
+                    <a:lnL w="9525" cap="flat" cmpd="sng" algn="ctr">
+                      <a:solidFill>
+                        <a:srgbClr val="DDE9EE"/>
+                      </a:solidFill>
+                      <a:prstDash val="solid"/>
+                      <a:round/>
+                      <a:headEnd type="none" w="med" len="med"/>
+                      <a:tailEnd type="none" w="med" len="med"/>
+                    </a:lnL>
+                    <a:lnR w="9525" cap="flat" cmpd="sng" algn="ctr">
+                      <a:solidFill>
+                        <a:srgbClr val="DDE9EE"/>
+                      </a:solidFill>
+                      <a:prstDash val="solid"/>
+                      <a:round/>
+                      <a:headEnd type="none" w="med" len="med"/>
+                      <a:tailEnd type="none" w="med" len="med"/>
+                    </a:lnR>
+                    <a:lnT w="9525" cap="flat" cmpd="sng" algn="ctr">
+                      <a:solidFill>
+                        <a:srgbClr val="DDE9EE"/>
+                      </a:solidFill>
+                      <a:prstDash val="solid"/>
+                      <a:round/>
+                      <a:headEnd type="none" w="med" len="med"/>
+                      <a:tailEnd type="none" w="med" len="med"/>
+                    </a:lnT>
+                    <a:lnB w="9525" cap="flat" cmpd="sng" algn="ctr">
+                      <a:solidFill>
+                        <a:srgbClr val="DDE9EE"/>
+                      </a:solidFill>
+                      <a:prstDash val="solid"/>
+                      <a:round/>
+                      <a:headEnd type="none" w="med" len="med"/>
+                      <a:tailEnd type="none" w="med" len="med"/>
+                    </a:lnB>
+                  </a:tcPr>
+                </a:tc>
+                <a:tc>
+                  <a:txBody>
+                    <a:bodyPr/>
+                    <a:lstStyle/>
+                    <a:p>
+                      <a:pPr indent="0" marL="0">
+                        <a:buNone/>
+                      </a:pPr>
+                      <a:r>
+                        <a:rPr lang="en-US" sz="1000" dirty="0">
+                          <a:solidFill>
+                            <a:schemeClr val="tx1"/>
+                          </a:solidFill>
+                          <a:latin typeface="Calibri" pitchFamily="34" charset="0"/>
+                          <a:ea typeface="Calibri" pitchFamily="34" charset="-122"/>
+                          <a:cs typeface="Calibri" pitchFamily="34" charset="-120"/>
+                        </a:rPr>
+                        <a:t>En condición (inspección de goteo hacia el soporte y del estado del lubricante) y búsqueda de fallas de la protección (consecuencia: A…</a:t>
+                      </a:r>
+                      <a:endParaRPr lang="en-US" sz="1000" dirty="0">
+                        <a:latin typeface="Calibri" charset="0"/>
+                        <a:ea typeface="Calibri" charset="0"/>
+                        <a:cs typeface="Calibri" charset="0"/>
+                      </a:endParaRPr>
+                    </a:p>
+                  </a:txBody>
+                  <a:tcPr marL="91440" marR="91440" marT="45720" marB="45720" anchor="t">
+                    <a:lnL w="9525" cap="flat" cmpd="sng" algn="ctr">
+                      <a:solidFill>
+                        <a:srgbClr val="DDE9EE"/>
+                      </a:solidFill>
+                      <a:prstDash val="solid"/>
+                      <a:round/>
+                      <a:headEnd type="none" w="med" len="med"/>
+                      <a:tailEnd type="none" w="med" len="med"/>
+                    </a:lnL>
+                    <a:lnR w="9525" cap="flat" cmpd="sng" algn="ctr">
+                      <a:solidFill>
+                        <a:srgbClr val="DDE9EE"/>
+                      </a:solidFill>
+                      <a:prstDash val="solid"/>
+                      <a:round/>
+                      <a:headEnd type="none" w="med" len="med"/>
+                      <a:tailEnd type="none" w="med" len="med"/>
+                    </a:lnR>
+                    <a:lnT w="9525" cap="flat" cmpd="sng" algn="ctr">
+                      <a:solidFill>
+                        <a:srgbClr val="DDE9EE"/>
+                      </a:solidFill>
+                      <a:prstDash val="solid"/>
+                      <a:round/>
+                      <a:headEnd type="none" w="med" len="med"/>
+                      <a:tailEnd type="none" w="med" len="med"/>
+                    </a:lnT>
+                    <a:lnB w="9525" cap="flat" cmpd="sng" algn="ctr">
+                      <a:solidFill>
+                        <a:srgbClr val="DDE9EE"/>
+                      </a:solidFill>
+                      <a:prstDash val="solid"/>
+                      <a:round/>
+                      <a:headEnd type="none" w="med" len="med"/>
+                      <a:tailEnd type="none" w="med" len="med"/>
+                    </a:lnB>
+                  </a:tcPr>
+                </a:tc>
+              </a:tr>
+              <a:tr h="566928">
+                <a:tc>
+                  <a:txBody>
+                    <a:bodyPr/>
+                    <a:lstStyle/>
+                    <a:p>
+                      <a:pPr indent="0" marL="0">
+                        <a:buNone/>
+                      </a:pPr>
+                      <a:r>
+                        <a:rPr lang="en-US" sz="1100" b="1" dirty="0">
+                          <a:solidFill>
+                            <a:schemeClr val="tx1"/>
+                          </a:solidFill>
+                          <a:latin typeface="Calibri" pitchFamily="34" charset="0"/>
+                          <a:ea typeface="Calibri" pitchFamily="34" charset="-122"/>
+                          <a:cs typeface="Calibri" pitchFamily="34" charset="-120"/>
+                        </a:rPr>
+                        <a:t>FM11</a:t>
+                      </a:r>
+                      <a:endParaRPr lang="en-US" sz="1100" dirty="0">
+                        <a:latin typeface="Calibri" charset="0"/>
+                        <a:ea typeface="Calibri" charset="0"/>
+                        <a:cs typeface="Calibri" charset="0"/>
+                      </a:endParaRPr>
+                    </a:p>
+                  </a:txBody>
+                  <a:tcPr marL="91440" marR="91440" marT="45720" marB="45720" anchor="t">
+                    <a:lnL w="9525" cap="flat" cmpd="sng" algn="ctr">
+                      <a:solidFill>
+                        <a:srgbClr val="DDE9EE"/>
+                      </a:solidFill>
+                      <a:prstDash val="solid"/>
+                      <a:round/>
+                      <a:headEnd type="none" w="med" len="med"/>
+                      <a:tailEnd type="none" w="med" len="med"/>
+                    </a:lnL>
+                    <a:lnR w="9525" cap="flat" cmpd="sng" algn="ctr">
+                      <a:solidFill>
+                        <a:srgbClr val="DDE9EE"/>
+                      </a:solidFill>
+                      <a:prstDash val="solid"/>
+                      <a:round/>
+                      <a:headEnd type="none" w="med" len="med"/>
+                      <a:tailEnd type="none" w="med" len="med"/>
+                    </a:lnR>
+                    <a:lnT w="9525" cap="flat" cmpd="sng" algn="ctr">
+                      <a:solidFill>
+                        <a:srgbClr val="DDE9EE"/>
+                      </a:solidFill>
+                      <a:prstDash val="solid"/>
+                      <a:round/>
+                      <a:headEnd type="none" w="med" len="med"/>
+                      <a:tailEnd type="none" w="med" len="med"/>
+                    </a:lnT>
+                    <a:lnB w="9525" cap="flat" cmpd="sng" algn="ctr">
+                      <a:solidFill>
+                        <a:srgbClr val="DDE9EE"/>
+                      </a:solidFill>
+                      <a:prstDash val="solid"/>
+                      <a:round/>
+                      <a:headEnd type="none" w="med" len="med"/>
+                      <a:tailEnd type="none" w="med" len="med"/>
+                    </a:lnB>
+                  </a:tcPr>
+                </a:tc>
+                <a:tc>
+                  <a:txBody>
+                    <a:bodyPr/>
+                    <a:lstStyle/>
+                    <a:p>
+                      <a:pPr indent="0" marL="0">
+                        <a:buNone/>
+                      </a:pPr>
+                      <a:r>
+                        <a:rPr lang="en-US" sz="1100" dirty="0">
+                          <a:solidFill>
+                            <a:schemeClr val="tx1"/>
+                          </a:solidFill>
+                          <a:latin typeface="Calibri" pitchFamily="34" charset="0"/>
+                          <a:ea typeface="Calibri" pitchFamily="34" charset="-122"/>
+                          <a:cs typeface="Calibri" pitchFamily="34" charset="-120"/>
+                        </a:rPr>
+                        <a:t>Pérdida de película de lubricante por contaminación con agua</a:t>
+                      </a:r>
+                      <a:endParaRPr lang="en-US" sz="1100" dirty="0">
+                        <a:latin typeface="Calibri" charset="0"/>
+                        <a:ea typeface="Calibri" charset="0"/>
+                        <a:cs typeface="Calibri" charset="0"/>
+                      </a:endParaRPr>
+                    </a:p>
+                  </a:txBody>
+                  <a:tcPr marL="91440" marR="91440" marT="45720" marB="45720" anchor="t">
+                    <a:lnL w="9525" cap="flat" cmpd="sng" algn="ctr">
+                      <a:solidFill>
+                        <a:srgbClr val="DDE9EE"/>
+                      </a:solidFill>
+                      <a:prstDash val="solid"/>
+                      <a:round/>
+                      <a:headEnd type="none" w="med" len="med"/>
+                      <a:tailEnd type="none" w="med" len="med"/>
+                    </a:lnL>
+                    <a:lnR w="9525" cap="flat" cmpd="sng" algn="ctr">
+                      <a:solidFill>
+                        <a:srgbClr val="DDE9EE"/>
+                      </a:solidFill>
+                      <a:prstDash val="solid"/>
+                      <a:round/>
+                      <a:headEnd type="none" w="med" len="med"/>
+                      <a:tailEnd type="none" w="med" len="med"/>
+                    </a:lnR>
+                    <a:lnT w="9525" cap="flat" cmpd="sng" algn="ctr">
+                      <a:solidFill>
+                        <a:srgbClr val="DDE9EE"/>
+                      </a:solidFill>
+                      <a:prstDash val="solid"/>
+                      <a:round/>
+                      <a:headEnd type="none" w="med" len="med"/>
+                      <a:tailEnd type="none" w="med" len="med"/>
+                    </a:lnT>
+                    <a:lnB w="9525" cap="flat" cmpd="sng" algn="ctr">
+                      <a:solidFill>
+                        <a:srgbClr val="DDE9EE"/>
+                      </a:solidFill>
+                      <a:prstDash val="solid"/>
+                      <a:round/>
+                      <a:headEnd type="none" w="med" len="med"/>
+                      <a:tailEnd type="none" w="med" len="med"/>
+                    </a:lnB>
+                  </a:tcPr>
+                </a:tc>
+                <a:tc>
+                  <a:txBody>
+                    <a:bodyPr/>
+                    <a:lstStyle/>
+                    <a:p>
+                      <a:pPr indent="0" marL="0">
+                        <a:buNone/>
+                      </a:pPr>
+                      <a:r>
+                        <a:rPr lang="en-US" sz="1000" dirty="0">
+                          <a:solidFill>
+                            <a:schemeClr val="tx1"/>
+                          </a:solidFill>
+                          <a:latin typeface="Calibri" pitchFamily="34" charset="0"/>
+                          <a:ea typeface="Calibri" pitchFamily="34" charset="-122"/>
+                          <a:cs typeface="Calibri" pitchFamily="34" charset="-120"/>
+                        </a:rPr>
+                        <a:t>Análisis de lubricante por agua (por ejemplo Karl Fischer, apariencia): consta en pista, sin respaldo (E-2211, E-2607, E-2611, E-2612,…</a:t>
+                      </a:r>
+                      <a:endParaRPr lang="en-US" sz="1000" dirty="0">
+                        <a:latin typeface="Calibri" charset="0"/>
+                        <a:ea typeface="Calibri" charset="0"/>
+                        <a:cs typeface="Calibri" charset="0"/>
+                      </a:endParaRPr>
+                    </a:p>
+                  </a:txBody>
+                  <a:tcPr marL="91440" marR="91440" marT="45720" marB="45720" anchor="t">
+                    <a:lnL w="9525" cap="flat" cmpd="sng" algn="ctr">
+                      <a:solidFill>
+                        <a:srgbClr val="DDE9EE"/>
+                      </a:solidFill>
+                      <a:prstDash val="solid"/>
+                      <a:round/>
+                      <a:headEnd type="none" w="med" len="med"/>
+                      <a:tailEnd type="none" w="med" len="med"/>
+                    </a:lnL>
+                    <a:lnR w="9525" cap="flat" cmpd="sng" algn="ctr">
+                      <a:solidFill>
+                        <a:srgbClr val="DDE9EE"/>
+                      </a:solidFill>
+                      <a:prstDash val="solid"/>
+                      <a:round/>
+                      <a:headEnd type="none" w="med" len="med"/>
+                      <a:tailEnd type="none" w="med" len="med"/>
+                    </a:lnR>
+                    <a:lnT w="9525" cap="flat" cmpd="sng" algn="ctr">
+                      <a:solidFill>
+                        <a:srgbClr val="DDE9EE"/>
+                      </a:solidFill>
+                      <a:prstDash val="solid"/>
+                      <a:round/>
+                      <a:headEnd type="none" w="med" len="med"/>
+                      <a:tailEnd type="none" w="med" len="med"/>
+                    </a:lnT>
+                    <a:lnB w="9525" cap="flat" cmpd="sng" algn="ctr">
+                      <a:solidFill>
+                        <a:srgbClr val="DDE9EE"/>
+                      </a:solidFill>
+                      <a:prstDash val="solid"/>
+                      <a:round/>
+                      <a:headEnd type="none" w="med" len="med"/>
+                      <a:tailEnd type="none" w="med" len="med"/>
+                    </a:lnB>
+                  </a:tcPr>
+                </a:tc>
+                <a:tc>
+                  <a:txBody>
+                    <a:bodyPr/>
+                    <a:lstStyle/>
+                    <a:p>
+                      <a:pPr indent="0" marL="0">
+                        <a:buNone/>
+                      </a:pPr>
+                      <a:r>
+                        <a:rPr lang="en-US" sz="1000" dirty="0">
+                          <a:solidFill>
+                            <a:schemeClr val="tx1"/>
+                          </a:solidFill>
+                          <a:latin typeface="Calibri" pitchFamily="34" charset="0"/>
+                          <a:ea typeface="Calibri" pitchFamily="34" charset="-122"/>
+                          <a:cs typeface="Calibri" pitchFamily="34" charset="-120"/>
+                        </a:rPr>
+                        <a:t>En condición (análisis de lubricante) y, si el agua se confirma, protección (FM14) (consecuencia: A confirmar). El análisis de lubricante…</a:t>
+                      </a:r>
+                      <a:endParaRPr lang="en-US" sz="1000" dirty="0">
+                        <a:latin typeface="Calibri" charset="0"/>
+                        <a:ea typeface="Calibri" charset="0"/>
+                        <a:cs typeface="Calibri" charset="0"/>
+                      </a:endParaRPr>
+                    </a:p>
+                  </a:txBody>
+                  <a:tcPr marL="91440" marR="91440" marT="45720" marB="45720" anchor="t">
+                    <a:lnL w="9525" cap="flat" cmpd="sng" algn="ctr">
+                      <a:solidFill>
+                        <a:srgbClr val="DDE9EE"/>
+                      </a:solidFill>
+                      <a:prstDash val="solid"/>
+                      <a:round/>
+                      <a:headEnd type="none" w="med" len="med"/>
+                      <a:tailEnd type="none" w="med" len="med"/>
+                    </a:lnL>
+                    <a:lnR w="9525" cap="flat" cmpd="sng" algn="ctr">
+                      <a:solidFill>
+                        <a:srgbClr val="DDE9EE"/>
+                      </a:solidFill>
+                      <a:prstDash val="solid"/>
+                      <a:round/>
+                      <a:headEnd type="none" w="med" len="med"/>
+                      <a:tailEnd type="none" w="med" len="med"/>
+                    </a:lnR>
+                    <a:lnT w="9525" cap="flat" cmpd="sng" algn="ctr">
+                      <a:solidFill>
+                        <a:srgbClr val="DDE9EE"/>
+                      </a:solidFill>
+                      <a:prstDash val="solid"/>
+                      <a:round/>
+                      <a:headEnd type="none" w="med" len="med"/>
+                      <a:tailEnd type="none" w="med" len="med"/>
+                    </a:lnT>
+                    <a:lnB w="9525" cap="flat" cmpd="sng" algn="ctr">
+                      <a:solidFill>
+                        <a:srgbClr val="DDE9EE"/>
+                      </a:solidFill>
+                      <a:prstDash val="solid"/>
+                      <a:round/>
+                      <a:headEnd type="none" w="med" len="med"/>
+                      <a:tailEnd type="none" w="med" len="med"/>
+                    </a:lnB>
+                  </a:tcPr>
+                </a:tc>
+              </a:tr>
+              <a:tr h="566928">
+                <a:tc>
+                  <a:txBody>
+                    <a:bodyPr/>
+                    <a:lstStyle/>
+                    <a:p>
+                      <a:pPr indent="0" marL="0">
+                        <a:buNone/>
+                      </a:pPr>
+                      <a:r>
+                        <a:rPr lang="en-US" sz="1100" b="1" dirty="0">
+                          <a:solidFill>
+                            <a:schemeClr val="tx1"/>
+                          </a:solidFill>
+                          <a:latin typeface="Calibri" pitchFamily="34" charset="0"/>
+                          <a:ea typeface="Calibri" pitchFamily="34" charset="-122"/>
+                          <a:cs typeface="Calibri" pitchFamily="34" charset="-120"/>
+                        </a:rPr>
+                        <a:t>FM12</a:t>
+                      </a:r>
+                      <a:endParaRPr lang="en-US" sz="1100" dirty="0">
+                        <a:latin typeface="Calibri" charset="0"/>
+                        <a:ea typeface="Calibri" charset="0"/>
+                        <a:cs typeface="Calibri" charset="0"/>
+                      </a:endParaRPr>
+                    </a:p>
+                  </a:txBody>
+                  <a:tcPr marL="91440" marR="91440" marT="45720" marB="45720" anchor="t">
+                    <a:lnL w="9525" cap="flat" cmpd="sng" algn="ctr">
+                      <a:solidFill>
+                        <a:srgbClr val="DDE9EE"/>
+                      </a:solidFill>
+                      <a:prstDash val="solid"/>
+                      <a:round/>
+                      <a:headEnd type="none" w="med" len="med"/>
+                      <a:tailEnd type="none" w="med" len="med"/>
+                    </a:lnL>
+                    <a:lnR w="9525" cap="flat" cmpd="sng" algn="ctr">
+                      <a:solidFill>
+                        <a:srgbClr val="DDE9EE"/>
+                      </a:solidFill>
+                      <a:prstDash val="solid"/>
+                      <a:round/>
+                      <a:headEnd type="none" w="med" len="med"/>
+                      <a:tailEnd type="none" w="med" len="med"/>
+                    </a:lnR>
+                    <a:lnT w="9525" cap="flat" cmpd="sng" algn="ctr">
+                      <a:solidFill>
+                        <a:srgbClr val="DDE9EE"/>
+                      </a:solidFill>
+                      <a:prstDash val="solid"/>
+                      <a:round/>
+                      <a:headEnd type="none" w="med" len="med"/>
+                      <a:tailEnd type="none" w="med" len="med"/>
+                    </a:lnT>
+                    <a:lnB w="9525" cap="flat" cmpd="sng" algn="ctr">
+                      <a:solidFill>
+                        <a:srgbClr val="DDE9EE"/>
+                      </a:solidFill>
+                      <a:prstDash val="solid"/>
+                      <a:round/>
+                      <a:headEnd type="none" w="med" len="med"/>
+                      <a:tailEnd type="none" w="med" len="med"/>
+                    </a:lnB>
+                  </a:tcPr>
+                </a:tc>
+                <a:tc>
+                  <a:txBody>
+                    <a:bodyPr/>
+                    <a:lstStyle/>
+                    <a:p>
+                      <a:pPr indent="0" marL="0">
+                        <a:buNone/>
+                      </a:pPr>
+                      <a:r>
+                        <a:rPr lang="en-US" sz="1100" dirty="0">
+                          <a:solidFill>
+                            <a:schemeClr val="tx1"/>
+                          </a:solidFill>
+                          <a:latin typeface="Calibri" pitchFamily="34" charset="0"/>
+                          <a:ea typeface="Calibri" pitchFamily="34" charset="-122"/>
+                          <a:cs typeface="Calibri" pitchFamily="34" charset="-120"/>
+                        </a:rPr>
+                        <a:t>Corrosión y fatiga del rodamiento por agua</a:t>
+                      </a:r>
+                      <a:endParaRPr lang="en-US" sz="1100" dirty="0">
+                        <a:latin typeface="Calibri" charset="0"/>
+                        <a:ea typeface="Calibri" charset="0"/>
+                        <a:cs typeface="Calibri" charset="0"/>
+                      </a:endParaRPr>
+                    </a:p>
+                  </a:txBody>
+                  <a:tcPr marL="91440" marR="91440" marT="45720" marB="45720" anchor="t">
+                    <a:lnL w="9525" cap="flat" cmpd="sng" algn="ctr">
+                      <a:solidFill>
+                        <a:srgbClr val="DDE9EE"/>
+                      </a:solidFill>
+                      <a:prstDash val="solid"/>
+                      <a:round/>
+                      <a:headEnd type="none" w="med" len="med"/>
+                      <a:tailEnd type="none" w="med" len="med"/>
+                    </a:lnL>
+                    <a:lnR w="9525" cap="flat" cmpd="sng" algn="ctr">
+                      <a:solidFill>
+                        <a:srgbClr val="DDE9EE"/>
+                      </a:solidFill>
+                      <a:prstDash val="solid"/>
+                      <a:round/>
+                      <a:headEnd type="none" w="med" len="med"/>
+                      <a:tailEnd type="none" w="med" len="med"/>
+                    </a:lnR>
+                    <a:lnT w="9525" cap="flat" cmpd="sng" algn="ctr">
+                      <a:solidFill>
+                        <a:srgbClr val="DDE9EE"/>
+                      </a:solidFill>
+                      <a:prstDash val="solid"/>
+                      <a:round/>
+                      <a:headEnd type="none" w="med" len="med"/>
+                      <a:tailEnd type="none" w="med" len="med"/>
+                    </a:lnT>
+                    <a:lnB w="9525" cap="flat" cmpd="sng" algn="ctr">
+                      <a:solidFill>
+                        <a:srgbClr val="DDE9EE"/>
+                      </a:solidFill>
+                      <a:prstDash val="solid"/>
+                      <a:round/>
+                      <a:headEnd type="none" w="med" len="med"/>
+                      <a:tailEnd type="none" w="med" len="med"/>
+                    </a:lnB>
+                  </a:tcPr>
+                </a:tc>
+                <a:tc>
+                  <a:txBody>
+                    <a:bodyPr/>
+                    <a:lstStyle/>
+                    <a:p>
+                      <a:pPr indent="0" marL="0">
+                        <a:buNone/>
+                      </a:pPr>
+                      <a:r>
+                        <a:rPr lang="en-US" sz="1000" dirty="0">
+                          <a:solidFill>
+                            <a:schemeClr val="tx1"/>
+                          </a:solidFill>
+                          <a:latin typeface="Calibri" pitchFamily="34" charset="0"/>
+                          <a:ea typeface="Calibri" pitchFamily="34" charset="-122"/>
+                          <a:cs typeface="Calibri" pitchFamily="34" charset="-120"/>
+                        </a:rPr>
+                        <a:t>Envolvente y tendencia de vibración (E-8001, E-8008) para el defecto ya formado; análisis de lubricante por agua y partículas: consta en…</a:t>
+                      </a:r>
+                      <a:endParaRPr lang="en-US" sz="1000" dirty="0">
+                        <a:latin typeface="Calibri" charset="0"/>
+                        <a:ea typeface="Calibri" charset="0"/>
+                        <a:cs typeface="Calibri" charset="0"/>
+                      </a:endParaRPr>
+                    </a:p>
+                  </a:txBody>
+                  <a:tcPr marL="91440" marR="91440" marT="45720" marB="45720" anchor="t">
+                    <a:lnL w="9525" cap="flat" cmpd="sng" algn="ctr">
+                      <a:solidFill>
+                        <a:srgbClr val="DDE9EE"/>
+                      </a:solidFill>
+                      <a:prstDash val="solid"/>
+                      <a:round/>
+                      <a:headEnd type="none" w="med" len="med"/>
+                      <a:tailEnd type="none" w="med" len="med"/>
+                    </a:lnL>
+                    <a:lnR w="9525" cap="flat" cmpd="sng" algn="ctr">
+                      <a:solidFill>
+                        <a:srgbClr val="DDE9EE"/>
+                      </a:solidFill>
+                      <a:prstDash val="solid"/>
+                      <a:round/>
+                      <a:headEnd type="none" w="med" len="med"/>
+                      <a:tailEnd type="none" w="med" len="med"/>
+                    </a:lnR>
+                    <a:lnT w="9525" cap="flat" cmpd="sng" algn="ctr">
+                      <a:solidFill>
+                        <a:srgbClr val="DDE9EE"/>
+                      </a:solidFill>
+                      <a:prstDash val="solid"/>
+                      <a:round/>
+                      <a:headEnd type="none" w="med" len="med"/>
+                      <a:tailEnd type="none" w="med" len="med"/>
+                    </a:lnT>
+                    <a:lnB w="9525" cap="flat" cmpd="sng" algn="ctr">
+                      <a:solidFill>
+                        <a:srgbClr val="DDE9EE"/>
+                      </a:solidFill>
+                      <a:prstDash val="solid"/>
+                      <a:round/>
+                      <a:headEnd type="none" w="med" len="med"/>
+                      <a:tailEnd type="none" w="med" len="med"/>
+                    </a:lnB>
+                  </a:tcPr>
+                </a:tc>
+                <a:tc>
+                  <a:txBody>
+                    <a:bodyPr/>
+                    <a:lstStyle/>
+                    <a:p>
+                      <a:pPr indent="0" marL="0">
+                        <a:buNone/>
+                      </a:pPr>
+                      <a:r>
+                        <a:rPr lang="en-US" sz="1000" dirty="0">
+                          <a:solidFill>
+                            <a:schemeClr val="tx1"/>
+                          </a:solidFill>
+                          <a:latin typeface="Calibri" pitchFamily="34" charset="0"/>
+                          <a:ea typeface="Calibri" pitchFamily="34" charset="-122"/>
+                          <a:cs typeface="Calibri" pitchFamily="34" charset="-120"/>
+                        </a:rPr>
+                        <a:t>En condición (vibración con envolvente, análisis de lubricante) y rediseño de la protección (consecuencia: A confirmar; operacional si…</a:t>
+                      </a:r>
+                      <a:endParaRPr lang="en-US" sz="1000" dirty="0">
+                        <a:latin typeface="Calibri" charset="0"/>
+                        <a:ea typeface="Calibri" charset="0"/>
+                        <a:cs typeface="Calibri" charset="0"/>
+                      </a:endParaRPr>
+                    </a:p>
+                  </a:txBody>
+                  <a:tcPr marL="91440" marR="91440" marT="45720" marB="45720" anchor="t">
+                    <a:lnL w="9525" cap="flat" cmpd="sng" algn="ctr">
+                      <a:solidFill>
+                        <a:srgbClr val="DDE9EE"/>
+                      </a:solidFill>
+                      <a:prstDash val="solid"/>
+                      <a:round/>
+                      <a:headEnd type="none" w="med" len="med"/>
+                      <a:tailEnd type="none" w="med" len="med"/>
+                    </a:lnL>
+                    <a:lnR w="9525" cap="flat" cmpd="sng" algn="ctr">
+                      <a:solidFill>
+                        <a:srgbClr val="DDE9EE"/>
+                      </a:solidFill>
+                      <a:prstDash val="solid"/>
+                      <a:round/>
+                      <a:headEnd type="none" w="med" len="med"/>
+                      <a:tailEnd type="none" w="med" len="med"/>
+                    </a:lnR>
+                    <a:lnT w="9525" cap="flat" cmpd="sng" algn="ctr">
+                      <a:solidFill>
+                        <a:srgbClr val="DDE9EE"/>
+                      </a:solidFill>
+                      <a:prstDash val="solid"/>
+                      <a:round/>
+                      <a:headEnd type="none" w="med" len="med"/>
+                      <a:tailEnd type="none" w="med" len="med"/>
+                    </a:lnT>
+                    <a:lnB w="9525" cap="flat" cmpd="sng" algn="ctr">
+                      <a:solidFill>
+                        <a:srgbClr val="DDE9EE"/>
+                      </a:solidFill>
+                      <a:prstDash val="solid"/>
+                      <a:round/>
+                      <a:headEnd type="none" w="med" len="med"/>
+                      <a:tailEnd type="none" w="med" len="med"/>
+                    </a:lnB>
+                  </a:tcPr>
+                </a:tc>
+              </a:tr>
+              <a:tr h="566928">
+                <a:tc>
+                  <a:txBody>
+                    <a:bodyPr/>
+                    <a:lstStyle/>
+                    <a:p>
+                      <a:pPr indent="0" marL="0">
+                        <a:buNone/>
+                      </a:pPr>
+                      <a:r>
+                        <a:rPr lang="en-US" sz="1100" b="1" dirty="0">
+                          <a:solidFill>
+                            <a:schemeClr val="tx1"/>
+                          </a:solidFill>
+                          <a:latin typeface="Calibri" pitchFamily="34" charset="0"/>
+                          <a:ea typeface="Calibri" pitchFamily="34" charset="-122"/>
+                          <a:cs typeface="Calibri" pitchFamily="34" charset="-120"/>
+                        </a:rPr>
+                        <a:t>FM13</a:t>
+                      </a:r>
+                      <a:endParaRPr lang="en-US" sz="1100" dirty="0">
+                        <a:latin typeface="Calibri" charset="0"/>
+                        <a:ea typeface="Calibri" charset="0"/>
+                        <a:cs typeface="Calibri" charset="0"/>
+                      </a:endParaRPr>
+                    </a:p>
+                  </a:txBody>
+                  <a:tcPr marL="91440" marR="91440" marT="45720" marB="45720" anchor="t">
+                    <a:lnL w="9525" cap="flat" cmpd="sng" algn="ctr">
+                      <a:solidFill>
+                        <a:srgbClr val="DDE9EE"/>
+                      </a:solidFill>
+                      <a:prstDash val="solid"/>
+                      <a:round/>
+                      <a:headEnd type="none" w="med" len="med"/>
+                      <a:tailEnd type="none" w="med" len="med"/>
+                    </a:lnL>
+                    <a:lnR w="9525" cap="flat" cmpd="sng" algn="ctr">
+                      <a:solidFill>
+                        <a:srgbClr val="DDE9EE"/>
+                      </a:solidFill>
+                      <a:prstDash val="solid"/>
+                      <a:round/>
+                      <a:headEnd type="none" w="med" len="med"/>
+                      <a:tailEnd type="none" w="med" len="med"/>
+                    </a:lnR>
+                    <a:lnT w="9525" cap="flat" cmpd="sng" algn="ctr">
+                      <a:solidFill>
+                        <a:srgbClr val="DDE9EE"/>
+                      </a:solidFill>
+                      <a:prstDash val="solid"/>
+                      <a:round/>
+                      <a:headEnd type="none" w="med" len="med"/>
+                      <a:tailEnd type="none" w="med" len="med"/>
+                    </a:lnT>
+                    <a:lnB w="9525" cap="flat" cmpd="sng" algn="ctr">
+                      <a:solidFill>
+                        <a:srgbClr val="DDE9EE"/>
+                      </a:solidFill>
+                      <a:prstDash val="solid"/>
+                      <a:round/>
+                      <a:headEnd type="none" w="med" len="med"/>
+                      <a:tailEnd type="none" w="med" len="med"/>
+                    </a:lnB>
+                  </a:tcPr>
+                </a:tc>
+                <a:tc>
+                  <a:txBody>
+                    <a:bodyPr/>
+                    <a:lstStyle/>
+                    <a:p>
+                      <a:pPr indent="0" marL="0">
+                        <a:buNone/>
+                      </a:pPr>
+                      <a:r>
+                        <a:rPr lang="en-US" sz="1100" dirty="0">
+                          <a:solidFill>
+                            <a:schemeClr val="tx1"/>
+                          </a:solidFill>
+                          <a:latin typeface="Calibri" pitchFamily="34" charset="0"/>
+                          <a:ea typeface="Calibri" pitchFamily="34" charset="-122"/>
+                          <a:cs typeface="Calibri" pitchFamily="34" charset="-120"/>
+                        </a:rPr>
+                        <a:t>Desgaste de la camisa del eje</a:t>
+                      </a:r>
+                      <a:endParaRPr lang="en-US" sz="1100" dirty="0">
+                        <a:latin typeface="Calibri" charset="0"/>
+                        <a:ea typeface="Calibri" charset="0"/>
+                        <a:cs typeface="Calibri" charset="0"/>
+                      </a:endParaRPr>
+                    </a:p>
+                  </a:txBody>
+                  <a:tcPr marL="91440" marR="91440" marT="45720" marB="45720" anchor="t">
+                    <a:lnL w="9525" cap="flat" cmpd="sng" algn="ctr">
+                      <a:solidFill>
+                        <a:srgbClr val="DDE9EE"/>
+                      </a:solidFill>
+                      <a:prstDash val="solid"/>
+                      <a:round/>
+                      <a:headEnd type="none" w="med" len="med"/>
+                      <a:tailEnd type="none" w="med" len="med"/>
+                    </a:lnL>
+                    <a:lnR w="9525" cap="flat" cmpd="sng" algn="ctr">
+                      <a:solidFill>
+                        <a:srgbClr val="DDE9EE"/>
+                      </a:solidFill>
+                      <a:prstDash val="solid"/>
+                      <a:round/>
+                      <a:headEnd type="none" w="med" len="med"/>
+                      <a:tailEnd type="none" w="med" len="med"/>
+                    </a:lnR>
+                    <a:lnT w="9525" cap="flat" cmpd="sng" algn="ctr">
+                      <a:solidFill>
+                        <a:srgbClr val="DDE9EE"/>
+                      </a:solidFill>
+                      <a:prstDash val="solid"/>
+                      <a:round/>
+                      <a:headEnd type="none" w="med" len="med"/>
+                      <a:tailEnd type="none" w="med" len="med"/>
+                    </a:lnT>
+                    <a:lnB w="9525" cap="flat" cmpd="sng" algn="ctr">
+                      <a:solidFill>
+                        <a:srgbClr val="DDE9EE"/>
+                      </a:solidFill>
+                      <a:prstDash val="solid"/>
+                      <a:round/>
+                      <a:headEnd type="none" w="med" len="med"/>
+                      <a:tailEnd type="none" w="med" len="med"/>
+                    </a:lnB>
+                  </a:tcPr>
+                </a:tc>
+                <a:tc>
+                  <a:txBody>
+                    <a:bodyPr/>
+                    <a:lstStyle/>
+                    <a:p>
+                      <a:pPr indent="0" marL="0">
+                        <a:buNone/>
+                      </a:pPr>
+                      <a:r>
+                        <a:rPr lang="en-US" sz="1000" dirty="0">
+                          <a:solidFill>
+                            <a:schemeClr val="tx1"/>
+                          </a:solidFill>
+                          <a:latin typeface="Calibri" pitchFamily="34" charset="0"/>
+                          <a:ea typeface="Calibri" pitchFamily="34" charset="-122"/>
+                          <a:cs typeface="Calibri" pitchFamily="34" charset="-120"/>
+                        </a:rPr>
+                        <a:t>Inspección de la camisa (rayado, diámetro) en cada reemplazo de empaquetadura: consta en pista, sin respaldo (E-2004, E-2110).</a:t>
+                      </a:r>
+                      <a:endParaRPr lang="en-US" sz="1000" dirty="0">
+                        <a:latin typeface="Calibri" charset="0"/>
+                        <a:ea typeface="Calibri" charset="0"/>
+                        <a:cs typeface="Calibri" charset="0"/>
+                      </a:endParaRPr>
+                    </a:p>
+                  </a:txBody>
+                  <a:tcPr marL="91440" marR="91440" marT="45720" marB="45720" anchor="t">
+                    <a:lnL w="9525" cap="flat" cmpd="sng" algn="ctr">
+                      <a:solidFill>
+                        <a:srgbClr val="DDE9EE"/>
+                      </a:solidFill>
+                      <a:prstDash val="solid"/>
+                      <a:round/>
+                      <a:headEnd type="none" w="med" len="med"/>
+                      <a:tailEnd type="none" w="med" len="med"/>
+                    </a:lnL>
+                    <a:lnR w="9525" cap="flat" cmpd="sng" algn="ctr">
+                      <a:solidFill>
+                        <a:srgbClr val="DDE9EE"/>
+                      </a:solidFill>
+                      <a:prstDash val="solid"/>
+                      <a:round/>
+                      <a:headEnd type="none" w="med" len="med"/>
+                      <a:tailEnd type="none" w="med" len="med"/>
+                    </a:lnR>
+                    <a:lnT w="9525" cap="flat" cmpd="sng" algn="ctr">
+                      <a:solidFill>
+                        <a:srgbClr val="DDE9EE"/>
+                      </a:solidFill>
+                      <a:prstDash val="solid"/>
+                      <a:round/>
+                      <a:headEnd type="none" w="med" len="med"/>
+                      <a:tailEnd type="none" w="med" len="med"/>
+                    </a:lnT>
+                    <a:lnB w="9525" cap="flat" cmpd="sng" algn="ctr">
+                      <a:solidFill>
+                        <a:srgbClr val="DDE9EE"/>
+                      </a:solidFill>
+                      <a:prstDash val="solid"/>
+                      <a:round/>
+                      <a:headEnd type="none" w="med" len="med"/>
+                      <a:tailEnd type="none" w="med" len="med"/>
+                    </a:lnB>
+                  </a:tcPr>
+                </a:tc>
+                <a:tc>
+                  <a:txBody>
+                    <a:bodyPr/>
+                    <a:lstStyle/>
+                    <a:p>
+                      <a:pPr indent="0" marL="0">
+                        <a:buNone/>
+                      </a:pPr>
+                      <a:r>
+                        <a:rPr lang="en-US" sz="1000" dirty="0">
+                          <a:solidFill>
+                            <a:schemeClr val="tx1"/>
+                          </a:solidFill>
+                          <a:latin typeface="Calibri" pitchFamily="34" charset="0"/>
+                          <a:ea typeface="Calibri" pitchFamily="34" charset="-122"/>
+                          <a:cs typeface="Calibri" pitchFamily="34" charset="-120"/>
+                        </a:rPr>
+                        <a:t>En condición (inspección de la camisa) y restauración o reemplazo solo con edad de desgaste identificable (consecuencia: A confirmar). El…</a:t>
+                      </a:r>
+                      <a:endParaRPr lang="en-US" sz="1000" dirty="0">
+                        <a:latin typeface="Calibri" charset="0"/>
+                        <a:ea typeface="Calibri" charset="0"/>
+                        <a:cs typeface="Calibri" charset="0"/>
+                      </a:endParaRPr>
+                    </a:p>
+                  </a:txBody>
+                  <a:tcPr marL="91440" marR="91440" marT="45720" marB="45720" anchor="t">
+                    <a:lnL w="9525" cap="flat" cmpd="sng" algn="ctr">
+                      <a:solidFill>
+                        <a:srgbClr val="DDE9EE"/>
+                      </a:solidFill>
+                      <a:prstDash val="solid"/>
+                      <a:round/>
+                      <a:headEnd type="none" w="med" len="med"/>
+                      <a:tailEnd type="none" w="med" len="med"/>
+                    </a:lnL>
+                    <a:lnR w="9525" cap="flat" cmpd="sng" algn="ctr">
+                      <a:solidFill>
+                        <a:srgbClr val="DDE9EE"/>
+                      </a:solidFill>
+                      <a:prstDash val="solid"/>
+                      <a:round/>
+                      <a:headEnd type="none" w="med" len="med"/>
+                      <a:tailEnd type="none" w="med" len="med"/>
+                    </a:lnR>
+                    <a:lnT w="9525" cap="flat" cmpd="sng" algn="ctr">
+                      <a:solidFill>
+                        <a:srgbClr val="DDE9EE"/>
+                      </a:solidFill>
+                      <a:prstDash val="solid"/>
+                      <a:round/>
+                      <a:headEnd type="none" w="med" len="med"/>
+                      <a:tailEnd type="none" w="med" len="med"/>
+                    </a:lnT>
+                    <a:lnB w="9525" cap="flat" cmpd="sng" algn="ctr">
+                      <a:solidFill>
+                        <a:srgbClr val="DDE9EE"/>
+                      </a:solidFill>
+                      <a:prstDash val="solid"/>
+                      <a:round/>
+                      <a:headEnd type="none" w="med" len="med"/>
+                      <a:tailEnd type="none" w="med" len="med"/>
+                    </a:lnB>
+                  </a:tcPr>
+                </a:tc>
+              </a:tr>
+              <a:tr h="566928">
+                <a:tc>
+                  <a:txBody>
+                    <a:bodyPr/>
+                    <a:lstStyle/>
+                    <a:p>
+                      <a:pPr indent="0" marL="0">
+                        <a:buNone/>
+                      </a:pPr>
+                      <a:r>
+                        <a:rPr lang="en-US" sz="1100" b="1" dirty="0">
+                          <a:solidFill>
+                            <a:schemeClr val="tx1"/>
+                          </a:solidFill>
+                          <a:latin typeface="Calibri" pitchFamily="34" charset="0"/>
+                          <a:ea typeface="Calibri" pitchFamily="34" charset="-122"/>
+                          <a:cs typeface="Calibri" pitchFamily="34" charset="-120"/>
+                        </a:rPr>
+                        <a:t>FM14</a:t>
+                      </a:r>
+                      <a:endParaRPr lang="en-US" sz="1100" dirty="0">
+                        <a:latin typeface="Calibri" charset="0"/>
+                        <a:ea typeface="Calibri" charset="0"/>
+                        <a:cs typeface="Calibri" charset="0"/>
+                      </a:endParaRPr>
+                    </a:p>
+                  </a:txBody>
+                  <a:tcPr marL="91440" marR="91440" marT="45720" marB="45720" anchor="t">
+                    <a:lnL w="9525" cap="flat" cmpd="sng" algn="ctr">
+                      <a:solidFill>
+                        <a:srgbClr val="DDE9EE"/>
+                      </a:solidFill>
+                      <a:prstDash val="solid"/>
+                      <a:round/>
+                      <a:headEnd type="none" w="med" len="med"/>
+                      <a:tailEnd type="none" w="med" len="med"/>
+                    </a:lnL>
+                    <a:lnR w="9525" cap="flat" cmpd="sng" algn="ctr">
+                      <a:solidFill>
+                        <a:srgbClr val="DDE9EE"/>
+                      </a:solidFill>
+                      <a:prstDash val="solid"/>
+                      <a:round/>
+                      <a:headEnd type="none" w="med" len="med"/>
+                      <a:tailEnd type="none" w="med" len="med"/>
+                    </a:lnR>
+                    <a:lnT w="9525" cap="flat" cmpd="sng" algn="ctr">
+                      <a:solidFill>
+                        <a:srgbClr val="DDE9EE"/>
+                      </a:solidFill>
+                      <a:prstDash val="solid"/>
+                      <a:round/>
+                      <a:headEnd type="none" w="med" len="med"/>
+                      <a:tailEnd type="none" w="med" len="med"/>
+                    </a:lnT>
+                    <a:lnB w="9525" cap="flat" cmpd="sng" algn="ctr">
+                      <a:solidFill>
+                        <a:srgbClr val="DDE9EE"/>
+                      </a:solidFill>
+                      <a:prstDash val="solid"/>
+                      <a:round/>
+                      <a:headEnd type="none" w="med" len="med"/>
+                      <a:tailEnd type="none" w="med" len="med"/>
+                    </a:lnB>
+                  </a:tcPr>
+                </a:tc>
+                <a:tc>
+                  <a:txBody>
+                    <a:bodyPr/>
+                    <a:lstStyle/>
+                    <a:p>
+                      <a:pPr indent="0" marL="0">
+                        <a:buNone/>
+                      </a:pPr>
+                      <a:r>
+                        <a:rPr lang="en-US" sz="1100" dirty="0">
+                          <a:solidFill>
+                            <a:schemeClr val="tx1"/>
+                          </a:solidFill>
+                          <a:latin typeface="Calibri" pitchFamily="34" charset="0"/>
+                          <a:ea typeface="Calibri" pitchFamily="34" charset="-122"/>
+                          <a:cs typeface="Calibri" pitchFamily="34" charset="-120"/>
+                        </a:rPr>
+                        <a:t>Protección del soporte inexistente o ineficaz (deflector, laberinto,…</a:t>
+                      </a:r>
+                      <a:endParaRPr lang="en-US" sz="1100" dirty="0">
+                        <a:latin typeface="Calibri" charset="0"/>
+                        <a:ea typeface="Calibri" charset="0"/>
+                        <a:cs typeface="Calibri" charset="0"/>
+                      </a:endParaRPr>
+                    </a:p>
+                  </a:txBody>
+                  <a:tcPr marL="91440" marR="91440" marT="45720" marB="45720" anchor="t">
+                    <a:lnL w="9525" cap="flat" cmpd="sng" algn="ctr">
+                      <a:solidFill>
+                        <a:srgbClr val="DDE9EE"/>
+                      </a:solidFill>
+                      <a:prstDash val="solid"/>
+                      <a:round/>
+                      <a:headEnd type="none" w="med" len="med"/>
+                      <a:tailEnd type="none" w="med" len="med"/>
+                    </a:lnL>
+                    <a:lnR w="9525" cap="flat" cmpd="sng" algn="ctr">
+                      <a:solidFill>
+                        <a:srgbClr val="DDE9EE"/>
+                      </a:solidFill>
+                      <a:prstDash val="solid"/>
+                      <a:round/>
+                      <a:headEnd type="none" w="med" len="med"/>
+                      <a:tailEnd type="none" w="med" len="med"/>
+                    </a:lnR>
+                    <a:lnT w="9525" cap="flat" cmpd="sng" algn="ctr">
+                      <a:solidFill>
+                        <a:srgbClr val="DDE9EE"/>
+                      </a:solidFill>
+                      <a:prstDash val="solid"/>
+                      <a:round/>
+                      <a:headEnd type="none" w="med" len="med"/>
+                      <a:tailEnd type="none" w="med" len="med"/>
+                    </a:lnT>
+                    <a:lnB w="9525" cap="flat" cmpd="sng" algn="ctr">
+                      <a:solidFill>
+                        <a:srgbClr val="DDE9EE"/>
+                      </a:solidFill>
+                      <a:prstDash val="solid"/>
+                      <a:round/>
+                      <a:headEnd type="none" w="med" len="med"/>
+                      <a:tailEnd type="none" w="med" len="med"/>
+                    </a:lnB>
+                  </a:tcPr>
+                </a:tc>
+                <a:tc>
+                  <a:txBody>
+                    <a:bodyPr/>
+                    <a:lstStyle/>
+                    <a:p>
+                      <a:pPr indent="0" marL="0">
+                        <a:buNone/>
+                      </a:pPr>
+                      <a:r>
+                        <a:rPr lang="en-US" sz="1000" dirty="0">
+                          <a:solidFill>
+                            <a:schemeClr val="tx1"/>
+                          </a:solidFill>
+                          <a:latin typeface="Calibri" pitchFamily="34" charset="0"/>
+                          <a:ea typeface="Calibri" pitchFamily="34" charset="-122"/>
+                          <a:cs typeface="Calibri" pitchFamily="34" charset="-120"/>
+                        </a:rPr>
+                        <a:t>Inspección de deflector, estado del laberinto y limpieza del drenaje: consta en pista, sin respaldo (E-2001).</a:t>
+                      </a:r>
+                      <a:endParaRPr lang="en-US" sz="1000" dirty="0">
+                        <a:latin typeface="Calibri" charset="0"/>
+                        <a:ea typeface="Calibri" charset="0"/>
+                        <a:cs typeface="Calibri" charset="0"/>
+                      </a:endParaRPr>
+                    </a:p>
+                  </a:txBody>
+                  <a:tcPr marL="91440" marR="91440" marT="45720" marB="45720" anchor="t">
+                    <a:lnL w="9525" cap="flat" cmpd="sng" algn="ctr">
+                      <a:solidFill>
+                        <a:srgbClr val="DDE9EE"/>
+                      </a:solidFill>
+                      <a:prstDash val="solid"/>
+                      <a:round/>
+                      <a:headEnd type="none" w="med" len="med"/>
+                      <a:tailEnd type="none" w="med" len="med"/>
+                    </a:lnL>
+                    <a:lnR w="9525" cap="flat" cmpd="sng" algn="ctr">
+                      <a:solidFill>
+                        <a:srgbClr val="DDE9EE"/>
+                      </a:solidFill>
+                      <a:prstDash val="solid"/>
+                      <a:round/>
+                      <a:headEnd type="none" w="med" len="med"/>
+                      <a:tailEnd type="none" w="med" len="med"/>
+                    </a:lnR>
+                    <a:lnT w="9525" cap="flat" cmpd="sng" algn="ctr">
+                      <a:solidFill>
+                        <a:srgbClr val="DDE9EE"/>
+                      </a:solidFill>
+                      <a:prstDash val="solid"/>
+                      <a:round/>
+                      <a:headEnd type="none" w="med" len="med"/>
+                      <a:tailEnd type="none" w="med" len="med"/>
+                    </a:lnT>
+                    <a:lnB w="9525" cap="flat" cmpd="sng" algn="ctr">
+                      <a:solidFill>
+                        <a:srgbClr val="DDE9EE"/>
+                      </a:solidFill>
+                      <a:prstDash val="solid"/>
+                      <a:round/>
+                      <a:headEnd type="none" w="med" len="med"/>
+                      <a:tailEnd type="none" w="med" len="med"/>
+                    </a:lnB>
+                  </a:tcPr>
+                </a:tc>
+                <a:tc>
+                  <a:txBody>
+                    <a:bodyPr/>
+                    <a:lstStyle/>
+                    <a:p>
+                      <a:pPr indent="0" marL="0">
+                        <a:buNone/>
+                      </a:pPr>
+                      <a:r>
+                        <a:rPr lang="en-US" sz="1000" dirty="0">
+                          <a:solidFill>
+                            <a:schemeClr val="tx1"/>
+                          </a:solidFill>
+                          <a:latin typeface="Calibri" pitchFamily="34" charset="0"/>
+                          <a:ea typeface="Calibri" pitchFamily="34" charset="-122"/>
+                          <a:cs typeface="Calibri" pitchFamily="34" charset="-120"/>
+                        </a:rPr>
+                        <a:t>Rediseño (instalar o mejorar protección y drenaje) y búsqueda de fallas (verificación funcional de drenaje y protección) (consecuencia: A…</a:t>
                       </a:r>
                       <a:endParaRPr lang="en-US" sz="1000" dirty="0">
                         <a:latin typeface="Calibri" charset="0"/>

--- a/docs/entregables/presentacion_bomba_prensaestopa.pptx
+++ b/docs/entregables/presentacion_bomba_prensaestopa.pptx
@@ -126,20 +126,20 @@
   <p:extLst>
     <p:ext uri="{521415D9-36F7-43E2-AB2F-B90AF26B5E84}">
       <p14:sectionLst xmlns:p14="http://schemas.microsoft.com/office/powerpoint/2010/main">
-        <p14:section name="Inicio" id="{af6eb44a-09c0-7f1a-aed4-8ec7c3c21413}">
+        <p14:section name="Inicio" id="{aaa74e2d-b4aa-34ee-4312-d7b341e84286}">
           <p14:sldIdLst>
             <p14:sldId id="256"/>
             <p14:sldId id="257"/>
           </p14:sldIdLst>
         </p14:section>
-        <p14:section name="Alcance y método" id="{4234e256-3155-c6b6-2e21-9cae271fa731}">
+        <p14:section name="Alcance y método" id="{916170fe-8e4c-608e-12b6-42c14e014a30}">
           <p14:sldIdLst>
             <p14:sldId id="258"/>
             <p14:sldId id="259"/>
             <p14:sldId id="260"/>
           </p14:sldIdLst>
         </p14:section>
-        <p14:section name="Análisis de causa raíz" id="{a268099e-602f-fd77-68e6-d66485809d94}">
+        <p14:section name="Análisis de causa raíz" id="{a686ccd8-8826-066f-871f-3ea997ae6659}">
           <p14:sldIdLst>
             <p14:sldId id="261"/>
             <p14:sldId id="262"/>
@@ -148,7 +148,7 @@
             <p14:sldId id="265"/>
           </p14:sldIdLst>
         </p14:section>
-        <p14:section name="Monitoreo, datos y normas" id="{6f4c6738-4a34-4277-ef16-d602057e1cf8}">
+        <p14:section name="Monitoreo, datos y normas" id="{bfaf31da-5a3e-8168-969b-ba96868953b8}">
           <p14:sldIdLst>
             <p14:sldId id="266"/>
             <p14:sldId id="267"/>
@@ -6297,7 +6297,7 @@
                   <a:schemeClr val="tx1"/>
                 </a:solidFill>
               </a:rPr>
-              <a:t>Cada paquete es una unidad con fecha de inicio, fecha de falla o de censura. Empezar por descriptivo: Kaplan-Meier (kaplan_meier y km_failure_quantile con su banda) y Weibull con fit_weibull_mle, con intervalo de la forma y advertencias del kit; la censura se trata como tal, nunca como RUL = 0.…</a:t>
+              <a:t>Cada paquete es una unidad con fecha de inicio, fecha de falla o de censura. Comparar dos grupos con logrank_test (por ejemplo ajuste programado frente a ajuste solo por fuga, o goteo en una clase frente a otra) usando un análisis de punto fijo: el grupo se asigna por el estado en una fecha de…</a:t>
             </a:r>
             <a:endParaRPr lang="en-US" sz="1200" dirty="0"/>
           </a:p>
@@ -14255,6 +14255,23 @@
                   <a:schemeClr val="tx1"/>
                 </a:solidFill>
               </a:rPr>
+              <a:t>Distribuidor de empaquetaduras (blog comercial) (s. f.). Cómo evitar el fallo prematuro de la empaquetadura en bombas. Blog de un distribuidor industrial; fragmento pegado por la persona; página no abierta desde el entorno.</a:t>
+            </a:r>
+            <a:endParaRPr lang="en-US" sz="1100" dirty="0"/>
+          </a:p>
+          <a:p>
+            <a:pPr indent="0" marL="0">
+              <a:spcAft>
+                <a:spcPts val="800"/>
+              </a:spcAft>
+              <a:buNone/>
+            </a:pPr>
+            <a:r>
+              <a:rPr lang="en-US" sz="1100" dirty="0">
+                <a:solidFill>
+                  <a:schemeClr val="tx1"/>
+                </a:solidFill>
+              </a:rPr>
               <a:t>Lillelund, C. M., Pannullo, F., Jakobsen, M. O., Morante, M., &amp; Pedersen, C. F. (2025). RULSurv: A probabilistic survival-based method for early censoring-aware prediction of remaining useful life in ball bearings. arXiv 2405.01614 (cabecera del preprint: Expert Systems with Applications). https://arxiv.org/abs/2405.01614</a:t>
             </a:r>
             <a:endParaRPr lang="en-US" sz="1100" dirty="0"/>
@@ -22797,7 +22814,7 @@
       </p:sp>
       <p:sp>
         <p:nvSpPr>
-          <p:cNvPr id="10" name="tarjeta Material  |  2 con respaldo, 3 síntesis"/>
+          <p:cNvPr id="10" name="tarjeta Material  |  2 con respaldo, 4 síntesis"/>
           <p:cNvSpPr/>
           <p:nvPr/>
         </p:nvSpPr>
@@ -22852,7 +22869,7 @@
                   <a:schemeClr val="tx1"/>
                 </a:solidFill>
               </a:rPr>
-              <a:t>Material  |  2 con respaldo, 3 síntesis</a:t>
+              <a:t>Material  |  2 con respaldo, 4 síntesis</a:t>
             </a:r>
             <a:endParaRPr lang="en-US" sz="1300" dirty="0"/>
           </a:p>
@@ -22892,7 +22909,25 @@
                   <a:schemeClr val="tx1"/>
                 </a:solidFill>
               </a:rPr>
-              <a:t>Lubricante degradado, inadecuado o incompatible, o contaminado con agua.</a:t>
+              <a:t>Lubricante degradado o inadecuado (falla de lubricante).</a:t>
+            </a:r>
+            <a:endParaRPr lang="en-US" sz="1100" dirty="0"/>
+          </a:p>
+          <a:p>
+            <a:pPr marL="342900" indent="-342900">
+              <a:spcAft>
+                <a:spcPts val="400"/>
+              </a:spcAft>
+              <a:buSzPct val="100000"/>
+              <a:buChar char="•"/>
+            </a:pPr>
+            <a:r>
+              <a:rPr lang="en-US" sz="1100" dirty="0">
+                <a:solidFill>
+                  <a:schemeClr val="tx1"/>
+                </a:solidFill>
+              </a:rPr>
+              <a:t>Lubricante contaminado con agua del prensaestopa (hipótesis).</a:t>
             </a:r>
             <a:endParaRPr lang="en-US" sz="1100" dirty="0"/>
           </a:p>
@@ -22911,24 +22946,6 @@
                 </a:solidFill>
               </a:rPr>
               <a:t>Corrosión y desgaste de las superficies del rodamiento.</a:t>
-            </a:r>
-            <a:endParaRPr lang="en-US" sz="1100" dirty="0"/>
-          </a:p>
-          <a:p>
-            <a:pPr marL="342900" indent="-342900">
-              <a:spcAft>
-                <a:spcPts val="400"/>
-              </a:spcAft>
-              <a:buSzPct val="100000"/>
-              <a:buChar char="•"/>
-            </a:pPr>
-            <a:r>
-              <a:rPr lang="en-US" sz="1100" dirty="0">
-                <a:solidFill>
-                  <a:schemeClr val="tx1"/>
-                </a:solidFill>
-              </a:rPr>
-              <a:t>Fatiga normal del material (descascarado): fin de vida esperado y no falla prematura.</a:t>
             </a:r>
             <a:endParaRPr lang="en-US" sz="1100" dirty="0"/>
           </a:p>
@@ -25679,7 +25696,7 @@
                           <a:ea typeface="Calibri" pitchFamily="34" charset="-122"/>
                           <a:cs typeface="Calibri" pitchFamily="34" charset="-120"/>
                         </a:rPr>
-                        <a:t>Empaquetadura con ajuste insuficiente (fuga excesiva)</a:t>
+                        <a:t>Empaquetadura con ajuste insuficiente (fuga)</a:t>
                       </a:r>
                       <a:endParaRPr lang="en-US" sz="1100" dirty="0">
                         <a:latin typeface="Calibri" charset="0"/>
@@ -26595,7 +26612,7 @@
                           <a:ea typeface="Calibri" pitchFamily="34" charset="-122"/>
                           <a:cs typeface="Calibri" pitchFamily="34" charset="-120"/>
                         </a:rPr>
-                        <a:t>En condición (análisis de lubricante) y, si el agua se confirma, protección (FM14) (consecuencia: A confirmar). El análisis de lubricante…</a:t>
+                        <a:t>En condición (análisis de lubricante) y, si el agua se confirma, protección (el modo de protección del soporte (sin fuente; ver vacíos))…</a:t>
                       </a:r>
                       <a:endParaRPr lang="en-US" sz="1000" dirty="0">
                         <a:latin typeface="Calibri" charset="0"/>
@@ -26924,7 +26941,7 @@
                           <a:ea typeface="Calibri" pitchFamily="34" charset="-122"/>
                           <a:cs typeface="Calibri" pitchFamily="34" charset="-120"/>
                         </a:rPr>
-                        <a:t>FM13</a:t>
+                        <a:t>el modo de desgaste de camisa (sin fuente; ver vacíos)</a:t>
                       </a:r>
                       <a:endParaRPr lang="en-US" sz="1100" dirty="0">
                         <a:latin typeface="Calibri" charset="0"/>
@@ -27186,7 +27203,7 @@
                           <a:ea typeface="Calibri" pitchFamily="34" charset="-122"/>
                           <a:cs typeface="Calibri" pitchFamily="34" charset="-120"/>
                         </a:rPr>
-                        <a:t>FM14</a:t>
+                        <a:t>el modo de protección del soporte (sin fuente; ver vacíos)</a:t>
                       </a:r>
                       <a:endParaRPr lang="en-US" sz="1100" dirty="0">
                         <a:latin typeface="Calibri" charset="0"/>
